--- a/programs/leadership-updates/2026-08-am-squad-leadership-update/deliverables/AM-Squad-Leadership-Detailed-Modern-Aug2026.pptx
+++ b/programs/leadership-updates/2026-08-am-squad-leadership-update/deliverables/AM-Squad-Leadership-Detailed-Modern-Aug2026.pptx
@@ -26,6 +26,11 @@
     <p:sldId id="274" r:id="rId25"/>
     <p:sldId id="275" r:id="rId26"/>
     <p:sldId id="276" r:id="rId27"/>
+    <p:sldId id="277" r:id="rId28"/>
+    <p:sldId id="278" r:id="rId29"/>
+    <p:sldId id="279" r:id="rId30"/>
+    <p:sldId id="280" r:id="rId31"/>
+    <p:sldId id="281" r:id="rId32"/>
   </p:sldIdLst>
   <p:sldSz cx="9144000" cy="6858000" type="screen4x3"/>
   <p:notesSz cx="6858000" cy="9144000"/>
@@ -3831,7 +3836,7 @@
               </a:defRPr>
             </a:pPr>
             <a:r>
-              <a:t>V3 Module Snapshot</a:t>
+              <a:t>V2 Stage1 Nightly Snapshot</a:t>
             </a:r>
           </a:p>
         </p:txBody>
@@ -3883,14 +3888,14 @@
               </a:defRPr>
             </a:pPr>
             <a:r>
-              <a:t>V3</a:t>
+              <a:t>V2</a:t>
             </a:r>
           </a:p>
         </p:txBody>
       </p:sp>
       <p:pic>
         <p:nvPicPr>
-          <p:cNvPr id="7" name="Picture 6" descr="11-v3-regression-by-module.png"/>
+          <p:cNvPr id="7" name="Picture 6" descr="04-v2-regression-by-module.png"/>
           <p:cNvPicPr>
             <a:picLocks noChangeAspect="1"/>
           </p:cNvPicPr>
@@ -3905,7 +3910,7 @@
         <p:spPr>
           <a:xfrm>
             <a:off x="320040" y="868680"/>
-            <a:ext cx="4892040" cy="2297850"/>
+            <a:ext cx="4892040" cy="2489524"/>
           </a:xfrm>
           <a:prstGeom prst="rect">
             <a:avLst/>
@@ -3921,7 +3926,7 @@
         <p:spPr>
           <a:xfrm>
             <a:off x="5349240" y="868680"/>
-            <a:ext cx="3474720" cy="5349240"/>
+            <a:ext cx="3474720" cy="5074920"/>
           </a:xfrm>
           <a:prstGeom prst="roundRect">
             <a:avLst/>
@@ -3964,7 +3969,7 @@
         <p:spPr>
           <a:xfrm>
             <a:off x="5349240" y="868680"/>
-            <a:ext cx="54864" cy="5349240"/>
+            <a:ext cx="54864" cy="5074920"/>
           </a:xfrm>
           <a:prstGeom prst="rect">
             <a:avLst/>
@@ -4028,7 +4033,7 @@
               </a:defRPr>
             </a:pPr>
             <a:r>
-              <a:t>V3 coverage</a:t>
+              <a:t>What this counts</a:t>
             </a:r>
           </a:p>
         </p:txBody>
@@ -4042,7 +4047,7 @@
         <p:spPr>
           <a:xfrm>
             <a:off x="5532120" y="1307592"/>
-            <a:ext cx="3200400" cy="4846320"/>
+            <a:ext cx="3200400" cy="4572000"/>
           </a:xfrm>
           <a:prstGeom prst="rect">
             <a:avLst/>
@@ -4066,7 +4071,7 @@
               </a:defRPr>
             </a:pPr>
             <a:r>
-              <a:t>• 442 methods</a:t>
+              <a:t>• 592 methods — Stage1 primary nightly only (Aug 4)</a:t>
             </a:r>
           </a:p>
           <a:p>
@@ -4081,7 +4086,37 @@
               </a:defRPr>
             </a:pPr>
             <a:r>
-              <a:t>• UE 303 · IDP 56 · Entity expanding</a:t>
+              <a:t>• Built since Q2 2025 — not Apr–Aug alone</a:t>
+            </a:r>
+          </a:p>
+          <a:p>
+            <a:pPr>
+              <a:spcAft>
+                <a:spcPts val="500"/>
+              </a:spcAft>
+              <a:defRPr sz="1000">
+                <a:solidFill>
+                  <a:srgbClr val="1A2332"/>
+                </a:solidFill>
+              </a:defRPr>
+            </a:pPr>
+            <a:r>
+              <a:t>• Excludes smoke, Stage 2/5, +33 CSR Actions pending wire</a:t>
+            </a:r>
+          </a:p>
+          <a:p>
+            <a:pPr>
+              <a:spcAft>
+                <a:spcPts val="500"/>
+              </a:spcAft>
+              <a:defRPr sz="1000">
+                <a:solidFill>
+                  <a:srgbClr val="1A2332"/>
+                </a:solidFill>
+              </a:defRPr>
+            </a:pPr>
+            <a:r>
+              <a:t>• CSR maintenance added Apr–Jul on earlier foundation</a:t>
             </a:r>
           </a:p>
         </p:txBody>
@@ -4094,8 +4129,8 @@
         </p:nvSpPr>
         <p:spPr>
           <a:xfrm>
-            <a:off x="0" y="6510528"/>
-            <a:ext cx="9144000" cy="347472"/>
+            <a:off x="0" y="6291072"/>
+            <a:ext cx="9144000" cy="566928"/>
           </a:xfrm>
           <a:prstGeom prst="rect">
             <a:avLst/>
@@ -4137,7 +4172,7 @@
         </p:nvSpPr>
         <p:spPr>
           <a:xfrm>
-            <a:off x="0" y="6510528"/>
+            <a:off x="0" y="6291072"/>
             <a:ext cx="9144000" cy="18288"/>
           </a:xfrm>
           <a:prstGeom prst="rect">
@@ -4180,8 +4215,8 @@
         </p:nvSpPr>
         <p:spPr>
           <a:xfrm>
-            <a:off x="384048" y="6583680"/>
-            <a:ext cx="7772400" cy="228600"/>
+            <a:off x="384048" y="6355080"/>
+            <a:ext cx="8046720" cy="256032"/>
           </a:xfrm>
           <a:prstGeom prst="rect">
             <a:avLst/>
@@ -4195,14 +4230,14 @@
           <a:lstStyle/>
           <a:p>
             <a:pPr>
-              <a:defRPr sz="800">
+              <a:defRPr sz="750" i="1">
                 <a:solidFill>
                   <a:srgbClr val="64748B"/>
                 </a:solidFill>
               </a:defRPr>
             </a:pPr>
             <a:r>
-              <a:t>GitLab nightly Aug 4</a:t>
+              <a:t>Note: Additional V2 coverage: Stage 5 smoke, Stage 2 smoke, on-demand fast smoke, +33 CSR Actions.</a:t>
             </a:r>
           </a:p>
         </p:txBody>
@@ -4215,8 +4250,8 @@
         </p:nvSpPr>
         <p:spPr>
           <a:xfrm>
-            <a:off x="8412480" y="6583680"/>
-            <a:ext cx="548640" cy="228600"/>
+            <a:off x="384048" y="6592824"/>
+            <a:ext cx="7772400" cy="201168"/>
           </a:xfrm>
           <a:prstGeom prst="rect">
             <a:avLst/>
@@ -4229,15 +4264,50 @@
           </a:bodyPr>
           <a:lstStyle/>
           <a:p>
+            <a:pPr>
+              <a:defRPr sz="750">
+                <a:solidFill>
+                  <a:srgbClr val="64748B"/>
+                </a:solidFill>
+              </a:defRPr>
+            </a:pPr>
+            <a:r>
+              <a:t>Jenkins STAGE1-Daily-Unite-Prime-Regression · Aug 4</a:t>
+            </a:r>
+          </a:p>
+        </p:txBody>
+      </p:sp>
+      <p:sp>
+        <p:nvSpPr>
+          <p:cNvPr id="16" name="TextBox 15"/>
+          <p:cNvSpPr txBox="1"/>
+          <p:nvPr/>
+        </p:nvSpPr>
+        <p:spPr>
+          <a:xfrm>
+            <a:off x="8412480" y="6592824"/>
+            <a:ext cx="548640" cy="201168"/>
+          </a:xfrm>
+          <a:prstGeom prst="rect">
+            <a:avLst/>
+          </a:prstGeom>
+          <a:noFill/>
+        </p:spPr>
+        <p:txBody>
+          <a:bodyPr wrap="none">
+            <a:spAutoFit/>
+          </a:bodyPr>
+          <a:lstStyle/>
+          <a:p>
             <a:pPr algn="r">
-              <a:defRPr sz="900">
+              <a:defRPr sz="800">
                 <a:solidFill>
                   <a:srgbClr val="64748B"/>
                 </a:solidFill>
               </a:defRPr>
             </a:pPr>
             <a:r>
-              <a:t>8</a:t>
+              <a:t>9</a:t>
             </a:r>
           </a:p>
         </p:txBody>
@@ -4269,7 +4339,93 @@
         <p:spPr>
           <a:xfrm>
             <a:off x="0" y="0"/>
-            <a:ext cx="411480" cy="6858000"/>
+            <a:ext cx="9144000" cy="6858000"/>
+          </a:xfrm>
+          <a:prstGeom prst="rect">
+            <a:avLst/>
+          </a:prstGeom>
+          <a:solidFill>
+            <a:srgbClr val="F0F4F8"/>
+          </a:solidFill>
+          <a:ln>
+            <a:noFill/>
+          </a:ln>
+        </p:spPr>
+        <p:style>
+          <a:lnRef idx="1">
+            <a:schemeClr val="accent1"/>
+          </a:lnRef>
+          <a:fillRef idx="3">
+            <a:schemeClr val="accent1"/>
+          </a:fillRef>
+          <a:effectRef idx="2">
+            <a:schemeClr val="accent1"/>
+          </a:effectRef>
+          <a:fontRef idx="minor">
+            <a:schemeClr val="lt1"/>
+          </a:fontRef>
+        </p:style>
+        <p:txBody>
+          <a:bodyPr rtlCol="0" anchor="ctr"/>
+          <a:lstStyle/>
+          <a:p>
+            <a:pPr algn="ctr"/>
+          </a:p>
+        </p:txBody>
+      </p:sp>
+      <p:sp>
+        <p:nvSpPr>
+          <p:cNvPr id="3" name="Rectangle 2"/>
+          <p:cNvSpPr/>
+          <p:nvPr/>
+        </p:nvSpPr>
+        <p:spPr>
+          <a:xfrm>
+            <a:off x="0" y="0"/>
+            <a:ext cx="9144000" cy="658368"/>
+          </a:xfrm>
+          <a:prstGeom prst="rect">
+            <a:avLst/>
+          </a:prstGeom>
+          <a:solidFill>
+            <a:srgbClr val="0A1628"/>
+          </a:solidFill>
+          <a:ln>
+            <a:noFill/>
+          </a:ln>
+        </p:spPr>
+        <p:style>
+          <a:lnRef idx="1">
+            <a:schemeClr val="accent1"/>
+          </a:lnRef>
+          <a:fillRef idx="3">
+            <a:schemeClr val="accent1"/>
+          </a:fillRef>
+          <a:effectRef idx="2">
+            <a:schemeClr val="accent1"/>
+          </a:effectRef>
+          <a:fontRef idx="minor">
+            <a:schemeClr val="lt1"/>
+          </a:fontRef>
+        </p:style>
+        <p:txBody>
+          <a:bodyPr rtlCol="0" anchor="ctr"/>
+          <a:lstStyle/>
+          <a:p>
+            <a:pPr algn="ctr"/>
+          </a:p>
+        </p:txBody>
+      </p:sp>
+      <p:sp>
+        <p:nvSpPr>
+          <p:cNvPr id="4" name="Rectangle 3"/>
+          <p:cNvSpPr/>
+          <p:nvPr/>
+        </p:nvSpPr>
+        <p:spPr>
+          <a:xfrm>
+            <a:off x="0" y="658368"/>
+            <a:ext cx="9144000" cy="36576"/>
           </a:xfrm>
           <a:prstGeom prst="rect">
             <a:avLst/>
@@ -4305,57 +4461,14 @@
       </p:sp>
       <p:sp>
         <p:nvSpPr>
-          <p:cNvPr id="3" name="Rectangle 2"/>
-          <p:cNvSpPr/>
-          <p:nvPr/>
-        </p:nvSpPr>
-        <p:spPr>
-          <a:xfrm>
-            <a:off x="411480" y="0"/>
-            <a:ext cx="8732520" cy="6858000"/>
-          </a:xfrm>
-          <a:prstGeom prst="rect">
-            <a:avLst/>
-          </a:prstGeom>
-          <a:solidFill>
-            <a:srgbClr val="0A1628"/>
-          </a:solidFill>
-          <a:ln>
-            <a:noFill/>
-          </a:ln>
-        </p:spPr>
-        <p:style>
-          <a:lnRef idx="1">
-            <a:schemeClr val="accent1"/>
-          </a:lnRef>
-          <a:fillRef idx="3">
-            <a:schemeClr val="accent1"/>
-          </a:fillRef>
-          <a:effectRef idx="2">
-            <a:schemeClr val="accent1"/>
-          </a:effectRef>
-          <a:fontRef idx="minor">
-            <a:schemeClr val="lt1"/>
-          </a:fontRef>
-        </p:style>
-        <p:txBody>
-          <a:bodyPr rtlCol="0" anchor="ctr"/>
-          <a:lstStyle/>
-          <a:p>
-            <a:pPr algn="ctr"/>
-          </a:p>
-        </p:txBody>
-      </p:sp>
-      <p:sp>
-        <p:nvSpPr>
-          <p:cNvPr id="4" name="TextBox 3"/>
+          <p:cNvPr id="5" name="TextBox 4"/>
           <p:cNvSpPr txBox="1"/>
           <p:nvPr/>
         </p:nvSpPr>
         <p:spPr>
           <a:xfrm>
-            <a:off x="777240" y="2560320"/>
-            <a:ext cx="7772400" cy="1097280"/>
+            <a:off x="384048" y="128016"/>
+            <a:ext cx="6858000" cy="457200"/>
           </a:xfrm>
           <a:prstGeom prst="rect">
             <a:avLst/>
@@ -4369,28 +4482,166 @@
           <a:lstStyle/>
           <a:p>
             <a:pPr>
-              <a:defRPr sz="3400" b="1">
+              <a:defRPr sz="2000" b="1">
                 <a:solidFill>
                   <a:srgbClr val="FFFFFF"/>
                 </a:solidFill>
               </a:defRPr>
             </a:pPr>
             <a:r>
-              <a:t>API / Unite MSC</a:t>
-            </a:r>
-          </a:p>
-        </p:txBody>
-      </p:sp>
-      <p:sp>
-        <p:nvSpPr>
-          <p:cNvPr id="5" name="TextBox 4"/>
+              <a:t>V2 Business Value</a:t>
+            </a:r>
+          </a:p>
+        </p:txBody>
+      </p:sp>
+      <p:sp>
+        <p:nvSpPr>
+          <p:cNvPr id="6" name="Rounded Rectangle 5"/>
+          <p:cNvSpPr/>
+          <p:nvPr/>
+        </p:nvSpPr>
+        <p:spPr>
+          <a:xfrm>
+            <a:off x="7452360" y="164592"/>
+            <a:ext cx="1417320" cy="347472"/>
+          </a:xfrm>
+          <a:prstGeom prst="roundRect">
+            <a:avLst/>
+          </a:prstGeom>
+          <a:solidFill>
+            <a:srgbClr val="00A3E0"/>
+          </a:solidFill>
+          <a:ln>
+            <a:noFill/>
+          </a:ln>
+        </p:spPr>
+        <p:style>
+          <a:lnRef idx="1">
+            <a:schemeClr val="accent1"/>
+          </a:lnRef>
+          <a:fillRef idx="3">
+            <a:schemeClr val="accent1"/>
+          </a:fillRef>
+          <a:effectRef idx="2">
+            <a:schemeClr val="accent1"/>
+          </a:effectRef>
+          <a:fontRef idx="minor">
+            <a:schemeClr val="lt1"/>
+          </a:fontRef>
+        </p:style>
+        <p:txBody>
+          <a:bodyPr rtlCol="0" anchor="ctr"/>
+          <a:lstStyle/>
+          <a:p>
+            <a:pPr algn="ctr">
+              <a:defRPr sz="900" b="1">
+                <a:solidFill>
+                  <a:srgbClr val="FFFFFF"/>
+                </a:solidFill>
+              </a:defRPr>
+            </a:pPr>
+            <a:r>
+              <a:t>V2</a:t>
+            </a:r>
+          </a:p>
+        </p:txBody>
+      </p:sp>
+      <p:sp>
+        <p:nvSpPr>
+          <p:cNvPr id="7" name="Rounded Rectangle 6"/>
+          <p:cNvSpPr/>
+          <p:nvPr/>
+        </p:nvSpPr>
+        <p:spPr>
+          <a:xfrm>
+            <a:off x="320040" y="868680"/>
+            <a:ext cx="8503920" cy="4892040"/>
+          </a:xfrm>
+          <a:prstGeom prst="roundRect">
+            <a:avLst/>
+          </a:prstGeom>
+          <a:solidFill>
+            <a:srgbClr val="E8EEF6"/>
+          </a:solidFill>
+          <a:ln>
+            <a:noFill/>
+          </a:ln>
+        </p:spPr>
+        <p:style>
+          <a:lnRef idx="1">
+            <a:schemeClr val="accent1"/>
+          </a:lnRef>
+          <a:fillRef idx="3">
+            <a:schemeClr val="accent1"/>
+          </a:fillRef>
+          <a:effectRef idx="2">
+            <a:schemeClr val="accent1"/>
+          </a:effectRef>
+          <a:fontRef idx="minor">
+            <a:schemeClr val="lt1"/>
+          </a:fontRef>
+        </p:style>
+        <p:txBody>
+          <a:bodyPr rtlCol="0" anchor="ctr"/>
+          <a:lstStyle/>
+          <a:p>
+            <a:pPr algn="ctr"/>
+          </a:p>
+        </p:txBody>
+      </p:sp>
+      <p:sp>
+        <p:nvSpPr>
+          <p:cNvPr id="8" name="Rectangle 7"/>
+          <p:cNvSpPr/>
+          <p:nvPr/>
+        </p:nvSpPr>
+        <p:spPr>
+          <a:xfrm>
+            <a:off x="320040" y="868680"/>
+            <a:ext cx="54864" cy="4892040"/>
+          </a:xfrm>
+          <a:prstGeom prst="rect">
+            <a:avLst/>
+          </a:prstGeom>
+          <a:solidFill>
+            <a:srgbClr val="00B388"/>
+          </a:solidFill>
+          <a:ln>
+            <a:noFill/>
+          </a:ln>
+        </p:spPr>
+        <p:style>
+          <a:lnRef idx="1">
+            <a:schemeClr val="accent1"/>
+          </a:lnRef>
+          <a:fillRef idx="3">
+            <a:schemeClr val="accent1"/>
+          </a:fillRef>
+          <a:effectRef idx="2">
+            <a:schemeClr val="accent1"/>
+          </a:effectRef>
+          <a:fontRef idx="minor">
+            <a:schemeClr val="lt1"/>
+          </a:fontRef>
+        </p:style>
+        <p:txBody>
+          <a:bodyPr rtlCol="0" anchor="ctr"/>
+          <a:lstStyle/>
+          <a:p>
+            <a:pPr algn="ctr"/>
+          </a:p>
+        </p:txBody>
+      </p:sp>
+      <p:sp>
+        <p:nvSpPr>
+          <p:cNvPr id="9" name="TextBox 8"/>
           <p:cNvSpPr txBox="1"/>
           <p:nvPr/>
         </p:nvSpPr>
         <p:spPr>
           <a:xfrm>
-            <a:off x="777240" y="3657600"/>
-            <a:ext cx="7315200" cy="548640"/>
+            <a:off x="502920" y="978408"/>
+            <a:ext cx="8229600" cy="320040"/>
           </a:xfrm>
           <a:prstGeom prst="rect">
             <a:avLst/>
@@ -4404,14 +4655,238 @@
           <a:lstStyle/>
           <a:p>
             <a:pPr>
-              <a:defRPr sz="1400">
-                <a:solidFill>
-                  <a:srgbClr val="00B388"/>
-                </a:solidFill>
-              </a:defRPr>
-            </a:pPr>
-            <a:r>
-              <a:t>Rescued · accelerated</a:t>
+              <a:defRPr sz="1100" b="1">
+                <a:solidFill>
+                  <a:srgbClr val="003241"/>
+                </a:solidFill>
+              </a:defRPr>
+            </a:pPr>
+            <a:r>
+              <a:t>Key points</a:t>
+            </a:r>
+          </a:p>
+        </p:txBody>
+      </p:sp>
+      <p:sp>
+        <p:nvSpPr>
+          <p:cNvPr id="10" name="TextBox 9"/>
+          <p:cNvSpPr txBox="1"/>
+          <p:nvPr/>
+        </p:nvSpPr>
+        <p:spPr>
+          <a:xfrm>
+            <a:off x="502920" y="1307592"/>
+            <a:ext cx="8229600" cy="4389120"/>
+          </a:xfrm>
+          <a:prstGeom prst="rect">
+            <a:avLst/>
+          </a:prstGeom>
+          <a:noFill/>
+        </p:spPr>
+        <p:txBody>
+          <a:bodyPr wrap="square">
+            <a:spAutoFit/>
+          </a:bodyPr>
+          <a:lstStyle/>
+          <a:p>
+            <a:pPr>
+              <a:spcAft>
+                <a:spcPts val="500"/>
+              </a:spcAft>
+              <a:defRPr sz="1000">
+                <a:solidFill>
+                  <a:srgbClr val="1A2332"/>
+                </a:solidFill>
+              </a:defRPr>
+            </a:pPr>
+            <a:r>
+              <a:t>• Core member journeys covered nightly before release</a:t>
+            </a:r>
+          </a:p>
+          <a:p>
+            <a:pPr>
+              <a:spcAft>
+                <a:spcPts val="500"/>
+              </a:spcAft>
+              <a:defRPr sz="1000">
+                <a:solidFill>
+                  <a:srgbClr val="1A2332"/>
+                </a:solidFill>
+              </a:defRPr>
+            </a:pPr>
+            <a:r>
+              <a:t>• CSR maintenance gaps closed — high-risk flows automated</a:t>
+            </a:r>
+          </a:p>
+          <a:p>
+            <a:pPr>
+              <a:spcAft>
+                <a:spcPts val="500"/>
+              </a:spcAft>
+              <a:defRPr sz="1000">
+                <a:solidFill>
+                  <a:srgbClr val="1A2332"/>
+                </a:solidFill>
+              </a:defRPr>
+            </a:pPr>
+            <a:r>
+              <a:t>• Enrollments/login triage separates env vs product defects</a:t>
+            </a:r>
+          </a:p>
+        </p:txBody>
+      </p:sp>
+      <p:sp>
+        <p:nvSpPr>
+          <p:cNvPr id="11" name="Rectangle 10"/>
+          <p:cNvSpPr/>
+          <p:nvPr/>
+        </p:nvSpPr>
+        <p:spPr>
+          <a:xfrm>
+            <a:off x="0" y="6510528"/>
+            <a:ext cx="9144000" cy="347472"/>
+          </a:xfrm>
+          <a:prstGeom prst="rect">
+            <a:avLst/>
+          </a:prstGeom>
+          <a:solidFill>
+            <a:srgbClr val="FFFFFF"/>
+          </a:solidFill>
+          <a:ln>
+            <a:noFill/>
+          </a:ln>
+        </p:spPr>
+        <p:style>
+          <a:lnRef idx="1">
+            <a:schemeClr val="accent1"/>
+          </a:lnRef>
+          <a:fillRef idx="3">
+            <a:schemeClr val="accent1"/>
+          </a:fillRef>
+          <a:effectRef idx="2">
+            <a:schemeClr val="accent1"/>
+          </a:effectRef>
+          <a:fontRef idx="minor">
+            <a:schemeClr val="lt1"/>
+          </a:fontRef>
+        </p:style>
+        <p:txBody>
+          <a:bodyPr rtlCol="0" anchor="ctr"/>
+          <a:lstStyle/>
+          <a:p>
+            <a:pPr algn="ctr"/>
+          </a:p>
+        </p:txBody>
+      </p:sp>
+      <p:sp>
+        <p:nvSpPr>
+          <p:cNvPr id="12" name="Rectangle 11"/>
+          <p:cNvSpPr/>
+          <p:nvPr/>
+        </p:nvSpPr>
+        <p:spPr>
+          <a:xfrm>
+            <a:off x="0" y="6510528"/>
+            <a:ext cx="9144000" cy="18288"/>
+          </a:xfrm>
+          <a:prstGeom prst="rect">
+            <a:avLst/>
+          </a:prstGeom>
+          <a:solidFill>
+            <a:srgbClr val="E8EEF6"/>
+          </a:solidFill>
+          <a:ln>
+            <a:noFill/>
+          </a:ln>
+        </p:spPr>
+        <p:style>
+          <a:lnRef idx="1">
+            <a:schemeClr val="accent1"/>
+          </a:lnRef>
+          <a:fillRef idx="3">
+            <a:schemeClr val="accent1"/>
+          </a:fillRef>
+          <a:effectRef idx="2">
+            <a:schemeClr val="accent1"/>
+          </a:effectRef>
+          <a:fontRef idx="minor">
+            <a:schemeClr val="lt1"/>
+          </a:fontRef>
+        </p:style>
+        <p:txBody>
+          <a:bodyPr rtlCol="0" anchor="ctr"/>
+          <a:lstStyle/>
+          <a:p>
+            <a:pPr algn="ctr"/>
+          </a:p>
+        </p:txBody>
+      </p:sp>
+      <p:sp>
+        <p:nvSpPr>
+          <p:cNvPr id="13" name="TextBox 12"/>
+          <p:cNvSpPr txBox="1"/>
+          <p:nvPr/>
+        </p:nvSpPr>
+        <p:spPr>
+          <a:xfrm>
+            <a:off x="384048" y="6574536"/>
+            <a:ext cx="7772400" cy="201168"/>
+          </a:xfrm>
+          <a:prstGeom prst="rect">
+            <a:avLst/>
+          </a:prstGeom>
+          <a:noFill/>
+        </p:spPr>
+        <p:txBody>
+          <a:bodyPr wrap="none">
+            <a:spAutoFit/>
+          </a:bodyPr>
+          <a:lstStyle/>
+          <a:p>
+            <a:pPr>
+              <a:defRPr sz="750">
+                <a:solidFill>
+                  <a:srgbClr val="64748B"/>
+                </a:solidFill>
+              </a:defRPr>
+            </a:pPr>
+            <a:r>
+              <a:t>V2 value</a:t>
+            </a:r>
+          </a:p>
+        </p:txBody>
+      </p:sp>
+      <p:sp>
+        <p:nvSpPr>
+          <p:cNvPr id="14" name="TextBox 13"/>
+          <p:cNvSpPr txBox="1"/>
+          <p:nvPr/>
+        </p:nvSpPr>
+        <p:spPr>
+          <a:xfrm>
+            <a:off x="8412480" y="6574536"/>
+            <a:ext cx="548640" cy="201168"/>
+          </a:xfrm>
+          <a:prstGeom prst="rect">
+            <a:avLst/>
+          </a:prstGeom>
+          <a:noFill/>
+        </p:spPr>
+        <p:txBody>
+          <a:bodyPr wrap="none">
+            <a:spAutoFit/>
+          </a:bodyPr>
+          <a:lstStyle/>
+          <a:p>
+            <a:pPr algn="r">
+              <a:defRPr sz="800">
+                <a:solidFill>
+                  <a:srgbClr val="64748B"/>
+                </a:solidFill>
+              </a:defRPr>
+            </a:pPr>
+            <a:r>
+              <a:t>10</a:t>
             </a:r>
           </a:p>
         </p:txBody>
@@ -4443,13 +4918,13 @@
         <p:spPr>
           <a:xfrm>
             <a:off x="0" y="0"/>
-            <a:ext cx="9144000" cy="6858000"/>
-          </a:xfrm>
-          <a:prstGeom prst="rect">
-            <a:avLst/>
-          </a:prstGeom>
-          <a:solidFill>
-            <a:srgbClr val="F0F4F8"/>
+            <a:ext cx="411480" cy="6858000"/>
+          </a:xfrm>
+          <a:prstGeom prst="rect">
+            <a:avLst/>
+          </a:prstGeom>
+          <a:solidFill>
+            <a:srgbClr val="00A3E0"/>
           </a:solidFill>
           <a:ln>
             <a:noFill/>
@@ -4485,8 +4960,8 @@
         </p:nvSpPr>
         <p:spPr>
           <a:xfrm>
-            <a:off x="0" y="0"/>
-            <a:ext cx="9144000" cy="658368"/>
+            <a:off x="411480" y="0"/>
+            <a:ext cx="8732520" cy="6858000"/>
           </a:xfrm>
           <a:prstGeom prst="rect">
             <a:avLst/>
@@ -4522,57 +4997,14 @@
       </p:sp>
       <p:sp>
         <p:nvSpPr>
-          <p:cNvPr id="4" name="Rectangle 3"/>
-          <p:cNvSpPr/>
-          <p:nvPr/>
-        </p:nvSpPr>
-        <p:spPr>
-          <a:xfrm>
-            <a:off x="0" y="658368"/>
-            <a:ext cx="9144000" cy="36576"/>
-          </a:xfrm>
-          <a:prstGeom prst="rect">
-            <a:avLst/>
-          </a:prstGeom>
-          <a:solidFill>
-            <a:srgbClr val="00A3E0"/>
-          </a:solidFill>
-          <a:ln>
-            <a:noFill/>
-          </a:ln>
-        </p:spPr>
-        <p:style>
-          <a:lnRef idx="1">
-            <a:schemeClr val="accent1"/>
-          </a:lnRef>
-          <a:fillRef idx="3">
-            <a:schemeClr val="accent1"/>
-          </a:fillRef>
-          <a:effectRef idx="2">
-            <a:schemeClr val="accent1"/>
-          </a:effectRef>
-          <a:fontRef idx="minor">
-            <a:schemeClr val="lt1"/>
-          </a:fontRef>
-        </p:style>
-        <p:txBody>
-          <a:bodyPr rtlCol="0" anchor="ctr"/>
-          <a:lstStyle/>
-          <a:p>
-            <a:pPr algn="ctr"/>
-          </a:p>
-        </p:txBody>
-      </p:sp>
-      <p:sp>
-        <p:nvSpPr>
-          <p:cNvPr id="5" name="TextBox 4"/>
+          <p:cNvPr id="4" name="TextBox 3"/>
           <p:cNvSpPr txBox="1"/>
           <p:nvPr/>
         </p:nvSpPr>
         <p:spPr>
           <a:xfrm>
-            <a:off x="384048" y="128016"/>
-            <a:ext cx="6858000" cy="457200"/>
+            <a:off x="777240" y="2560320"/>
+            <a:ext cx="7772400" cy="1097280"/>
           </a:xfrm>
           <a:prstGeom prst="rect">
             <a:avLst/>
@@ -4586,190 +5018,28 @@
           <a:lstStyle/>
           <a:p>
             <a:pPr>
-              <a:defRPr sz="2000" b="1">
+              <a:defRPr sz="3400" b="1">
                 <a:solidFill>
                   <a:srgbClr val="FFFFFF"/>
                 </a:solidFill>
               </a:defRPr>
             </a:pPr>
             <a:r>
-              <a:t>MSC Endpoint Coverage</a:t>
-            </a:r>
-          </a:p>
-        </p:txBody>
-      </p:sp>
-      <p:sp>
-        <p:nvSpPr>
-          <p:cNvPr id="6" name="Rounded Rectangle 5"/>
-          <p:cNvSpPr/>
-          <p:nvPr/>
-        </p:nvSpPr>
-        <p:spPr>
-          <a:xfrm>
-            <a:off x="7452360" y="164592"/>
-            <a:ext cx="1417320" cy="347472"/>
-          </a:xfrm>
-          <a:prstGeom prst="roundRect">
-            <a:avLst/>
-          </a:prstGeom>
-          <a:solidFill>
-            <a:srgbClr val="00A3E0"/>
-          </a:solidFill>
-          <a:ln>
-            <a:noFill/>
-          </a:ln>
-        </p:spPr>
-        <p:style>
-          <a:lnRef idx="1">
-            <a:schemeClr val="accent1"/>
-          </a:lnRef>
-          <a:fillRef idx="3">
-            <a:schemeClr val="accent1"/>
-          </a:fillRef>
-          <a:effectRef idx="2">
-            <a:schemeClr val="accent1"/>
-          </a:effectRef>
-          <a:fontRef idx="minor">
-            <a:schemeClr val="lt1"/>
-          </a:fontRef>
-        </p:style>
-        <p:txBody>
-          <a:bodyPr rtlCol="0" anchor="ctr"/>
-          <a:lstStyle/>
-          <a:p>
-            <a:pPr algn="ctr">
-              <a:defRPr sz="900" b="1">
-                <a:solidFill>
-                  <a:srgbClr val="FFFFFF"/>
-                </a:solidFill>
-              </a:defRPr>
-            </a:pPr>
-            <a:r>
-              <a:t>MSC</a:t>
-            </a:r>
-          </a:p>
-        </p:txBody>
-      </p:sp>
-      <p:pic>
-        <p:nvPicPr>
-          <p:cNvPr id="7" name="Picture 6" descr="05-unite-msc-coverage.png"/>
-          <p:cNvPicPr>
-            <a:picLocks noChangeAspect="1"/>
-          </p:cNvPicPr>
-          <p:nvPr/>
-        </p:nvPicPr>
-        <p:blipFill>
-          <a:blip r:embed="rId2"/>
-          <a:stretch>
-            <a:fillRect/>
-          </a:stretch>
-        </p:blipFill>
-        <p:spPr>
-          <a:xfrm>
-            <a:off x="320040" y="868680"/>
-            <a:ext cx="4892040" cy="3284972"/>
-          </a:xfrm>
-          <a:prstGeom prst="rect">
-            <a:avLst/>
-          </a:prstGeom>
-        </p:spPr>
-      </p:pic>
-      <p:sp>
-        <p:nvSpPr>
-          <p:cNvPr id="8" name="Rounded Rectangle 7"/>
-          <p:cNvSpPr/>
-          <p:nvPr/>
-        </p:nvSpPr>
-        <p:spPr>
-          <a:xfrm>
-            <a:off x="5349240" y="868680"/>
-            <a:ext cx="3474720" cy="5349240"/>
-          </a:xfrm>
-          <a:prstGeom prst="roundRect">
-            <a:avLst/>
-          </a:prstGeom>
-          <a:solidFill>
-            <a:srgbClr val="E8EEF6"/>
-          </a:solidFill>
-          <a:ln>
-            <a:noFill/>
-          </a:ln>
-        </p:spPr>
-        <p:style>
-          <a:lnRef idx="1">
-            <a:schemeClr val="accent1"/>
-          </a:lnRef>
-          <a:fillRef idx="3">
-            <a:schemeClr val="accent1"/>
-          </a:fillRef>
-          <a:effectRef idx="2">
-            <a:schemeClr val="accent1"/>
-          </a:effectRef>
-          <a:fontRef idx="minor">
-            <a:schemeClr val="lt1"/>
-          </a:fontRef>
-        </p:style>
-        <p:txBody>
-          <a:bodyPr rtlCol="0" anchor="ctr"/>
-          <a:lstStyle/>
-          <a:p>
-            <a:pPr algn="ctr"/>
-          </a:p>
-        </p:txBody>
-      </p:sp>
-      <p:sp>
-        <p:nvSpPr>
-          <p:cNvPr id="9" name="Rectangle 8"/>
-          <p:cNvSpPr/>
-          <p:nvPr/>
-        </p:nvSpPr>
-        <p:spPr>
-          <a:xfrm>
-            <a:off x="5349240" y="868680"/>
-            <a:ext cx="54864" cy="5349240"/>
-          </a:xfrm>
-          <a:prstGeom prst="rect">
-            <a:avLst/>
-          </a:prstGeom>
-          <a:solidFill>
-            <a:srgbClr val="00B388"/>
-          </a:solidFill>
-          <a:ln>
-            <a:noFill/>
-          </a:ln>
-        </p:spPr>
-        <p:style>
-          <a:lnRef idx="1">
-            <a:schemeClr val="accent1"/>
-          </a:lnRef>
-          <a:fillRef idx="3">
-            <a:schemeClr val="accent1"/>
-          </a:fillRef>
-          <a:effectRef idx="2">
-            <a:schemeClr val="accent1"/>
-          </a:effectRef>
-          <a:fontRef idx="minor">
-            <a:schemeClr val="lt1"/>
-          </a:fontRef>
-        </p:style>
-        <p:txBody>
-          <a:bodyPr rtlCol="0" anchor="ctr"/>
-          <a:lstStyle/>
-          <a:p>
-            <a:pPr algn="ctr"/>
-          </a:p>
-        </p:txBody>
-      </p:sp>
-      <p:sp>
-        <p:nvSpPr>
-          <p:cNvPr id="10" name="TextBox 9"/>
+              <a:t>V3 Universal Platform</a:t>
+            </a:r>
+          </a:p>
+        </p:txBody>
+      </p:sp>
+      <p:sp>
+        <p:nvSpPr>
+          <p:cNvPr id="5" name="TextBox 4"/>
           <p:cNvSpPr txBox="1"/>
           <p:nvPr/>
         </p:nvSpPr>
         <p:spPr>
           <a:xfrm>
-            <a:off x="5532120" y="978408"/>
-            <a:ext cx="3200400" cy="320040"/>
+            <a:off x="777240" y="3657600"/>
+            <a:ext cx="7315200" cy="548640"/>
           </a:xfrm>
           <a:prstGeom prst="rect">
             <a:avLst/>
@@ -4783,238 +5053,14 @@
           <a:lstStyle/>
           <a:p>
             <a:pPr>
-              <a:defRPr sz="1100" b="1">
-                <a:solidFill>
-                  <a:srgbClr val="003241"/>
-                </a:solidFill>
-              </a:defRPr>
-            </a:pPr>
-            <a:r>
-              <a:t>Endpoint coverage</a:t>
-            </a:r>
-          </a:p>
-        </p:txBody>
-      </p:sp>
-      <p:sp>
-        <p:nvSpPr>
-          <p:cNvPr id="11" name="TextBox 10"/>
-          <p:cNvSpPr txBox="1"/>
-          <p:nvPr/>
-        </p:nvSpPr>
-        <p:spPr>
-          <a:xfrm>
-            <a:off x="5532120" y="1307592"/>
-            <a:ext cx="3200400" cy="4846320"/>
-          </a:xfrm>
-          <a:prstGeom prst="rect">
-            <a:avLst/>
-          </a:prstGeom>
-          <a:noFill/>
-        </p:spPr>
-        <p:txBody>
-          <a:bodyPr wrap="square">
-            <a:spAutoFit/>
-          </a:bodyPr>
-          <a:lstStyle/>
-          <a:p>
-            <a:pPr>
-              <a:spcAft>
-                <a:spcPts val="500"/>
-              </a:spcAft>
-              <a:defRPr sz="1000">
-                <a:solidFill>
-                  <a:srgbClr val="1A2332"/>
-                </a:solidFill>
-              </a:defRPr>
-            </a:pPr>
-            <a:r>
-              <a:t>• M2 25/25</a:t>
-            </a:r>
-          </a:p>
-          <a:p>
-            <a:pPr>
-              <a:spcAft>
-                <a:spcPts val="500"/>
-              </a:spcAft>
-              <a:defRPr sz="1000">
-                <a:solidFill>
-                  <a:srgbClr val="1A2332"/>
-                </a:solidFill>
-              </a:defRPr>
-            </a:pPr>
-            <a:r>
-              <a:t>• M1 ~25/29</a:t>
-            </a:r>
-          </a:p>
-          <a:p>
-            <a:pPr>
-              <a:spcAft>
-                <a:spcPts val="500"/>
-              </a:spcAft>
-              <a:defRPr sz="1000">
-                <a:solidFill>
-                  <a:srgbClr val="1A2332"/>
-                </a:solidFill>
-              </a:defRPr>
-            </a:pPr>
-            <a:r>
-              <a:t>• ~50% ETA savings</a:t>
-            </a:r>
-          </a:p>
-        </p:txBody>
-      </p:sp>
-      <p:sp>
-        <p:nvSpPr>
-          <p:cNvPr id="12" name="Rectangle 11"/>
-          <p:cNvSpPr/>
-          <p:nvPr/>
-        </p:nvSpPr>
-        <p:spPr>
-          <a:xfrm>
-            <a:off x="0" y="6510528"/>
-            <a:ext cx="9144000" cy="347472"/>
-          </a:xfrm>
-          <a:prstGeom prst="rect">
-            <a:avLst/>
-          </a:prstGeom>
-          <a:solidFill>
-            <a:srgbClr val="FFFFFF"/>
-          </a:solidFill>
-          <a:ln>
-            <a:noFill/>
-          </a:ln>
-        </p:spPr>
-        <p:style>
-          <a:lnRef idx="1">
-            <a:schemeClr val="accent1"/>
-          </a:lnRef>
-          <a:fillRef idx="3">
-            <a:schemeClr val="accent1"/>
-          </a:fillRef>
-          <a:effectRef idx="2">
-            <a:schemeClr val="accent1"/>
-          </a:effectRef>
-          <a:fontRef idx="minor">
-            <a:schemeClr val="lt1"/>
-          </a:fontRef>
-        </p:style>
-        <p:txBody>
-          <a:bodyPr rtlCol="0" anchor="ctr"/>
-          <a:lstStyle/>
-          <a:p>
-            <a:pPr algn="ctr"/>
-          </a:p>
-        </p:txBody>
-      </p:sp>
-      <p:sp>
-        <p:nvSpPr>
-          <p:cNvPr id="13" name="Rectangle 12"/>
-          <p:cNvSpPr/>
-          <p:nvPr/>
-        </p:nvSpPr>
-        <p:spPr>
-          <a:xfrm>
-            <a:off x="0" y="6510528"/>
-            <a:ext cx="9144000" cy="18288"/>
-          </a:xfrm>
-          <a:prstGeom prst="rect">
-            <a:avLst/>
-          </a:prstGeom>
-          <a:solidFill>
-            <a:srgbClr val="E8EEF6"/>
-          </a:solidFill>
-          <a:ln>
-            <a:noFill/>
-          </a:ln>
-        </p:spPr>
-        <p:style>
-          <a:lnRef idx="1">
-            <a:schemeClr val="accent1"/>
-          </a:lnRef>
-          <a:fillRef idx="3">
-            <a:schemeClr val="accent1"/>
-          </a:fillRef>
-          <a:effectRef idx="2">
-            <a:schemeClr val="accent1"/>
-          </a:effectRef>
-          <a:fontRef idx="minor">
-            <a:schemeClr val="lt1"/>
-          </a:fontRef>
-        </p:style>
-        <p:txBody>
-          <a:bodyPr rtlCol="0" anchor="ctr"/>
-          <a:lstStyle/>
-          <a:p>
-            <a:pPr algn="ctr"/>
-          </a:p>
-        </p:txBody>
-      </p:sp>
-      <p:sp>
-        <p:nvSpPr>
-          <p:cNvPr id="14" name="TextBox 13"/>
-          <p:cNvSpPr txBox="1"/>
-          <p:nvPr/>
-        </p:nvSpPr>
-        <p:spPr>
-          <a:xfrm>
-            <a:off x="384048" y="6583680"/>
-            <a:ext cx="7772400" cy="228600"/>
-          </a:xfrm>
-          <a:prstGeom prst="rect">
-            <a:avLst/>
-          </a:prstGeom>
-          <a:noFill/>
-        </p:spPr>
-        <p:txBody>
-          <a:bodyPr wrap="none">
-            <a:spAutoFit/>
-          </a:bodyPr>
-          <a:lstStyle/>
-          <a:p>
-            <a:pPr>
-              <a:defRPr sz="800">
-                <a:solidFill>
-                  <a:srgbClr val="64748B"/>
-                </a:solidFill>
-              </a:defRPr>
-            </a:pPr>
-            <a:r>
-              <a:t>api-test-automation</a:t>
-            </a:r>
-          </a:p>
-        </p:txBody>
-      </p:sp>
-      <p:sp>
-        <p:nvSpPr>
-          <p:cNvPr id="15" name="TextBox 14"/>
-          <p:cNvSpPr txBox="1"/>
-          <p:nvPr/>
-        </p:nvSpPr>
-        <p:spPr>
-          <a:xfrm>
-            <a:off x="8412480" y="6583680"/>
-            <a:ext cx="548640" cy="228600"/>
-          </a:xfrm>
-          <a:prstGeom prst="rect">
-            <a:avLst/>
-          </a:prstGeom>
-          <a:noFill/>
-        </p:spPr>
-        <p:txBody>
-          <a:bodyPr wrap="none">
-            <a:spAutoFit/>
-          </a:bodyPr>
-          <a:lstStyle/>
-          <a:p>
-            <a:pPr algn="r">
-              <a:defRPr sz="900">
-                <a:solidFill>
-                  <a:srgbClr val="64748B"/>
-                </a:solidFill>
-              </a:defRPr>
-            </a:pPr>
-            <a:r>
-              <a:t>9</a:t>
+              <a:defRPr sz="1400">
+                <a:solidFill>
+                  <a:srgbClr val="00B388"/>
+                </a:solidFill>
+              </a:defRPr>
+            </a:pPr>
+            <a:r>
+              <a:t>GitLab CI nightly · built since Q2 2025</a:t>
             </a:r>
           </a:p>
         </p:txBody>
@@ -5196,7 +5242,7 @@
               </a:defRPr>
             </a:pPr>
             <a:r>
-              <a:t>API Module Breakdown</a:t>
+              <a:t>V3 Stage1 Nightly Snapshot</a:t>
             </a:r>
           </a:p>
         </p:txBody>
@@ -5248,14 +5294,14 @@
               </a:defRPr>
             </a:pPr>
             <a:r>
-              <a:t>API</a:t>
+              <a:t>V3</a:t>
             </a:r>
           </a:p>
         </p:txBody>
       </p:sp>
       <p:pic>
         <p:nvPicPr>
-          <p:cNvPr id="7" name="Picture 6" descr="13-api-regression-by-module.png"/>
+          <p:cNvPr id="7" name="Picture 6" descr="11-v3-regression-by-module.png"/>
           <p:cNvPicPr>
             <a:picLocks noChangeAspect="1"/>
           </p:cNvPicPr>
@@ -5270,7 +5316,7 @@
         <p:spPr>
           <a:xfrm>
             <a:off x="320040" y="868680"/>
-            <a:ext cx="4892040" cy="2712859"/>
+            <a:ext cx="4892040" cy="2698766"/>
           </a:xfrm>
           <a:prstGeom prst="rect">
             <a:avLst/>
@@ -5286,7 +5332,7 @@
         <p:spPr>
           <a:xfrm>
             <a:off x="5349240" y="868680"/>
-            <a:ext cx="3474720" cy="5349240"/>
+            <a:ext cx="3474720" cy="5074920"/>
           </a:xfrm>
           <a:prstGeom prst="roundRect">
             <a:avLst/>
@@ -5329,7 +5375,7 @@
         <p:spPr>
           <a:xfrm>
             <a:off x="5349240" y="868680"/>
-            <a:ext cx="54864" cy="5349240"/>
+            <a:ext cx="54864" cy="5074920"/>
           </a:xfrm>
           <a:prstGeom prst="rect">
             <a:avLst/>
@@ -5393,7 +5439,7 @@
               </a:defRPr>
             </a:pPr>
             <a:r>
-              <a:t>M1 categories</a:t>
+              <a:t>What this counts</a:t>
             </a:r>
           </a:p>
         </p:txBody>
@@ -5407,7 +5453,7 @@
         <p:spPr>
           <a:xfrm>
             <a:off x="5532120" y="1307592"/>
-            <a:ext cx="3200400" cy="4846320"/>
+            <a:ext cx="3200400" cy="4572000"/>
           </a:xfrm>
           <a:prstGeom prst="rect">
             <a:avLst/>
@@ -5431,7 +5477,7 @@
               </a:defRPr>
             </a:pPr>
             <a:r>
-              <a:t>• Auth, profile, biometric, device, bank</a:t>
+              <a:t>• 442 methods — GitLab Stage1 nightly only (Aug 4)</a:t>
             </a:r>
           </a:p>
           <a:p>
@@ -5446,7 +5492,37 @@
               </a:defRPr>
             </a:pPr>
             <a:r>
-              <a:t>• Master suite in progress</a:t>
+              <a:t>• Framework + CI/CD accumulated over ~1 year</a:t>
+            </a:r>
+          </a:p>
+          <a:p>
+            <a:pPr>
+              <a:spcAft>
+                <a:spcPts val="500"/>
+              </a:spcAft>
+              <a:defRPr sz="1000">
+                <a:solidFill>
+                  <a:srgbClr val="1A2332"/>
+                </a:solidFill>
+              </a:defRPr>
+            </a:pPr>
+            <a:r>
+              <a:t>• UE 303 = scenarios × plan/traunch matrix</a:t>
+            </a:r>
+          </a:p>
+          <a:p>
+            <a:pPr>
+              <a:spcAft>
+                <a:spcPts val="500"/>
+              </a:spcAft>
+              <a:defRPr sz="1000">
+                <a:solidFill>
+                  <a:srgbClr val="1A2332"/>
+                </a:solidFill>
+              </a:defRPr>
+            </a:pPr>
+            <a:r>
+              <a:t>• Entity suites expanding — not all in Aug 4 log</a:t>
             </a:r>
           </a:p>
         </p:txBody>
@@ -5459,8 +5535,8 @@
         </p:nvSpPr>
         <p:spPr>
           <a:xfrm>
-            <a:off x="0" y="6510528"/>
-            <a:ext cx="9144000" cy="347472"/>
+            <a:off x="0" y="6291072"/>
+            <a:ext cx="9144000" cy="566928"/>
           </a:xfrm>
           <a:prstGeom prst="rect">
             <a:avLst/>
@@ -5502,7 +5578,7 @@
         </p:nvSpPr>
         <p:spPr>
           <a:xfrm>
-            <a:off x="0" y="6510528"/>
+            <a:off x="0" y="6291072"/>
             <a:ext cx="9144000" cy="18288"/>
           </a:xfrm>
           <a:prstGeom prst="rect">
@@ -5545,8 +5621,8 @@
         </p:nvSpPr>
         <p:spPr>
           <a:xfrm>
-            <a:off x="384048" y="6583680"/>
-            <a:ext cx="7772400" cy="228600"/>
+            <a:off x="384048" y="6355080"/>
+            <a:ext cx="8046720" cy="256032"/>
           </a:xfrm>
           <a:prstGeom prst="rect">
             <a:avLst/>
@@ -5560,14 +5636,14 @@
           <a:lstStyle/>
           <a:p>
             <a:pPr>
-              <a:defRPr sz="800">
+              <a:defRPr sz="750" i="1">
                 <a:solidFill>
                   <a:srgbClr val="64748B"/>
                 </a:solidFill>
               </a:defRPr>
             </a:pPr>
             <a:r>
-              <a:t>api-test-automation</a:t>
+              <a:t>Note: Additional V3 coverage: Stage 5 smoke (UE + IDP), integration profiles, Entity track — not in 442.</a:t>
             </a:r>
           </a:p>
         </p:txBody>
@@ -5580,8 +5656,8 @@
         </p:nvSpPr>
         <p:spPr>
           <a:xfrm>
-            <a:off x="8412480" y="6583680"/>
-            <a:ext cx="548640" cy="228600"/>
+            <a:off x="384048" y="6592824"/>
+            <a:ext cx="7772400" cy="201168"/>
           </a:xfrm>
           <a:prstGeom prst="rect">
             <a:avLst/>
@@ -5594,15 +5670,50 @@
           </a:bodyPr>
           <a:lstStyle/>
           <a:p>
+            <a:pPr>
+              <a:defRPr sz="750">
+                <a:solidFill>
+                  <a:srgbClr val="64748B"/>
+                </a:solidFill>
+              </a:defRPr>
+            </a:pPr>
+            <a:r>
+              <a:t>GitLab scheduled_regression_job · Aug 4</a:t>
+            </a:r>
+          </a:p>
+        </p:txBody>
+      </p:sp>
+      <p:sp>
+        <p:nvSpPr>
+          <p:cNvPr id="16" name="TextBox 15"/>
+          <p:cNvSpPr txBox="1"/>
+          <p:nvPr/>
+        </p:nvSpPr>
+        <p:spPr>
+          <a:xfrm>
+            <a:off x="8412480" y="6592824"/>
+            <a:ext cx="548640" cy="201168"/>
+          </a:xfrm>
+          <a:prstGeom prst="rect">
+            <a:avLst/>
+          </a:prstGeom>
+          <a:noFill/>
+        </p:spPr>
+        <p:txBody>
+          <a:bodyPr wrap="none">
+            <a:spAutoFit/>
+          </a:bodyPr>
+          <a:lstStyle/>
+          <a:p>
             <a:pPr algn="r">
-              <a:defRPr sz="900">
+              <a:defRPr sz="800">
                 <a:solidFill>
                   <a:srgbClr val="64748B"/>
                 </a:solidFill>
               </a:defRPr>
             </a:pPr>
             <a:r>
-              <a:t>10</a:t>
+              <a:t>11</a:t>
             </a:r>
           </a:p>
         </p:txBody>
@@ -5634,7 +5745,93 @@
         <p:spPr>
           <a:xfrm>
             <a:off x="0" y="0"/>
-            <a:ext cx="411480" cy="6858000"/>
+            <a:ext cx="9144000" cy="6858000"/>
+          </a:xfrm>
+          <a:prstGeom prst="rect">
+            <a:avLst/>
+          </a:prstGeom>
+          <a:solidFill>
+            <a:srgbClr val="F0F4F8"/>
+          </a:solidFill>
+          <a:ln>
+            <a:noFill/>
+          </a:ln>
+        </p:spPr>
+        <p:style>
+          <a:lnRef idx="1">
+            <a:schemeClr val="accent1"/>
+          </a:lnRef>
+          <a:fillRef idx="3">
+            <a:schemeClr val="accent1"/>
+          </a:fillRef>
+          <a:effectRef idx="2">
+            <a:schemeClr val="accent1"/>
+          </a:effectRef>
+          <a:fontRef idx="minor">
+            <a:schemeClr val="lt1"/>
+          </a:fontRef>
+        </p:style>
+        <p:txBody>
+          <a:bodyPr rtlCol="0" anchor="ctr"/>
+          <a:lstStyle/>
+          <a:p>
+            <a:pPr algn="ctr"/>
+          </a:p>
+        </p:txBody>
+      </p:sp>
+      <p:sp>
+        <p:nvSpPr>
+          <p:cNvPr id="3" name="Rectangle 2"/>
+          <p:cNvSpPr/>
+          <p:nvPr/>
+        </p:nvSpPr>
+        <p:spPr>
+          <a:xfrm>
+            <a:off x="0" y="0"/>
+            <a:ext cx="9144000" cy="658368"/>
+          </a:xfrm>
+          <a:prstGeom prst="rect">
+            <a:avLst/>
+          </a:prstGeom>
+          <a:solidFill>
+            <a:srgbClr val="0A1628"/>
+          </a:solidFill>
+          <a:ln>
+            <a:noFill/>
+          </a:ln>
+        </p:spPr>
+        <p:style>
+          <a:lnRef idx="1">
+            <a:schemeClr val="accent1"/>
+          </a:lnRef>
+          <a:fillRef idx="3">
+            <a:schemeClr val="accent1"/>
+          </a:fillRef>
+          <a:effectRef idx="2">
+            <a:schemeClr val="accent1"/>
+          </a:effectRef>
+          <a:fontRef idx="minor">
+            <a:schemeClr val="lt1"/>
+          </a:fontRef>
+        </p:style>
+        <p:txBody>
+          <a:bodyPr rtlCol="0" anchor="ctr"/>
+          <a:lstStyle/>
+          <a:p>
+            <a:pPr algn="ctr"/>
+          </a:p>
+        </p:txBody>
+      </p:sp>
+      <p:sp>
+        <p:nvSpPr>
+          <p:cNvPr id="4" name="Rectangle 3"/>
+          <p:cNvSpPr/>
+          <p:nvPr/>
+        </p:nvSpPr>
+        <p:spPr>
+          <a:xfrm>
+            <a:off x="0" y="658368"/>
+            <a:ext cx="9144000" cy="36576"/>
           </a:xfrm>
           <a:prstGeom prst="rect">
             <a:avLst/>
@@ -5670,57 +5867,14 @@
       </p:sp>
       <p:sp>
         <p:nvSpPr>
-          <p:cNvPr id="3" name="Rectangle 2"/>
-          <p:cNvSpPr/>
-          <p:nvPr/>
-        </p:nvSpPr>
-        <p:spPr>
-          <a:xfrm>
-            <a:off x="411480" y="0"/>
-            <a:ext cx="8732520" cy="6858000"/>
-          </a:xfrm>
-          <a:prstGeom prst="rect">
-            <a:avLst/>
-          </a:prstGeom>
-          <a:solidFill>
-            <a:srgbClr val="0A1628"/>
-          </a:solidFill>
-          <a:ln>
-            <a:noFill/>
-          </a:ln>
-        </p:spPr>
-        <p:style>
-          <a:lnRef idx="1">
-            <a:schemeClr val="accent1"/>
-          </a:lnRef>
-          <a:fillRef idx="3">
-            <a:schemeClr val="accent1"/>
-          </a:fillRef>
-          <a:effectRef idx="2">
-            <a:schemeClr val="accent1"/>
-          </a:effectRef>
-          <a:fontRef idx="minor">
-            <a:schemeClr val="lt1"/>
-          </a:fontRef>
-        </p:style>
-        <p:txBody>
-          <a:bodyPr rtlCol="0" anchor="ctr"/>
-          <a:lstStyle/>
-          <a:p>
-            <a:pPr algn="ctr"/>
-          </a:p>
-        </p:txBody>
-      </p:sp>
-      <p:sp>
-        <p:nvSpPr>
-          <p:cNvPr id="4" name="TextBox 3"/>
+          <p:cNvPr id="5" name="TextBox 4"/>
           <p:cNvSpPr txBox="1"/>
           <p:nvPr/>
         </p:nvSpPr>
         <p:spPr>
           <a:xfrm>
-            <a:off x="777240" y="2560320"/>
-            <a:ext cx="7772400" cy="1097280"/>
+            <a:off x="384048" y="128016"/>
+            <a:ext cx="6858000" cy="457200"/>
           </a:xfrm>
           <a:prstGeom prst="rect">
             <a:avLst/>
@@ -5734,28 +5888,166 @@
           <a:lstStyle/>
           <a:p>
             <a:pPr>
-              <a:defRPr sz="3400" b="1">
+              <a:defRPr sz="2000" b="1">
                 <a:solidFill>
                   <a:srgbClr val="FFFFFF"/>
                 </a:solidFill>
               </a:defRPr>
             </a:pPr>
             <a:r>
-              <a:t>Performance Testing</a:t>
-            </a:r>
-          </a:p>
-        </p:txBody>
-      </p:sp>
-      <p:sp>
-        <p:nvSpPr>
-          <p:cNvPr id="5" name="TextBox 4"/>
+              <a:t>V3 Delivery Highlights</a:t>
+            </a:r>
+          </a:p>
+        </p:txBody>
+      </p:sp>
+      <p:sp>
+        <p:nvSpPr>
+          <p:cNvPr id="6" name="Rounded Rectangle 5"/>
+          <p:cNvSpPr/>
+          <p:nvPr/>
+        </p:nvSpPr>
+        <p:spPr>
+          <a:xfrm>
+            <a:off x="7452360" y="164592"/>
+            <a:ext cx="1417320" cy="347472"/>
+          </a:xfrm>
+          <a:prstGeom prst="roundRect">
+            <a:avLst/>
+          </a:prstGeom>
+          <a:solidFill>
+            <a:srgbClr val="00A3E0"/>
+          </a:solidFill>
+          <a:ln>
+            <a:noFill/>
+          </a:ln>
+        </p:spPr>
+        <p:style>
+          <a:lnRef idx="1">
+            <a:schemeClr val="accent1"/>
+          </a:lnRef>
+          <a:fillRef idx="3">
+            <a:schemeClr val="accent1"/>
+          </a:fillRef>
+          <a:effectRef idx="2">
+            <a:schemeClr val="accent1"/>
+          </a:effectRef>
+          <a:fontRef idx="minor">
+            <a:schemeClr val="lt1"/>
+          </a:fontRef>
+        </p:style>
+        <p:txBody>
+          <a:bodyPr rtlCol="0" anchor="ctr"/>
+          <a:lstStyle/>
+          <a:p>
+            <a:pPr algn="ctr">
+              <a:defRPr sz="900" b="1">
+                <a:solidFill>
+                  <a:srgbClr val="FFFFFF"/>
+                </a:solidFill>
+              </a:defRPr>
+            </a:pPr>
+            <a:r>
+              <a:t>V3</a:t>
+            </a:r>
+          </a:p>
+        </p:txBody>
+      </p:sp>
+      <p:sp>
+        <p:nvSpPr>
+          <p:cNvPr id="7" name="Rounded Rectangle 6"/>
+          <p:cNvSpPr/>
+          <p:nvPr/>
+        </p:nvSpPr>
+        <p:spPr>
+          <a:xfrm>
+            <a:off x="320040" y="868680"/>
+            <a:ext cx="8503920" cy="4892040"/>
+          </a:xfrm>
+          <a:prstGeom prst="roundRect">
+            <a:avLst/>
+          </a:prstGeom>
+          <a:solidFill>
+            <a:srgbClr val="E8EEF6"/>
+          </a:solidFill>
+          <a:ln>
+            <a:noFill/>
+          </a:ln>
+        </p:spPr>
+        <p:style>
+          <a:lnRef idx="1">
+            <a:schemeClr val="accent1"/>
+          </a:lnRef>
+          <a:fillRef idx="3">
+            <a:schemeClr val="accent1"/>
+          </a:fillRef>
+          <a:effectRef idx="2">
+            <a:schemeClr val="accent1"/>
+          </a:effectRef>
+          <a:fontRef idx="minor">
+            <a:schemeClr val="lt1"/>
+          </a:fontRef>
+        </p:style>
+        <p:txBody>
+          <a:bodyPr rtlCol="0" anchor="ctr"/>
+          <a:lstStyle/>
+          <a:p>
+            <a:pPr algn="ctr"/>
+          </a:p>
+        </p:txBody>
+      </p:sp>
+      <p:sp>
+        <p:nvSpPr>
+          <p:cNvPr id="8" name="Rectangle 7"/>
+          <p:cNvSpPr/>
+          <p:nvPr/>
+        </p:nvSpPr>
+        <p:spPr>
+          <a:xfrm>
+            <a:off x="320040" y="868680"/>
+            <a:ext cx="54864" cy="4892040"/>
+          </a:xfrm>
+          <a:prstGeom prst="rect">
+            <a:avLst/>
+          </a:prstGeom>
+          <a:solidFill>
+            <a:srgbClr val="00B388"/>
+          </a:solidFill>
+          <a:ln>
+            <a:noFill/>
+          </a:ln>
+        </p:spPr>
+        <p:style>
+          <a:lnRef idx="1">
+            <a:schemeClr val="accent1"/>
+          </a:lnRef>
+          <a:fillRef idx="3">
+            <a:schemeClr val="accent1"/>
+          </a:fillRef>
+          <a:effectRef idx="2">
+            <a:schemeClr val="accent1"/>
+          </a:effectRef>
+          <a:fontRef idx="minor">
+            <a:schemeClr val="lt1"/>
+          </a:fontRef>
+        </p:style>
+        <p:txBody>
+          <a:bodyPr rtlCol="0" anchor="ctr"/>
+          <a:lstStyle/>
+          <a:p>
+            <a:pPr algn="ctr"/>
+          </a:p>
+        </p:txBody>
+      </p:sp>
+      <p:sp>
+        <p:nvSpPr>
+          <p:cNvPr id="9" name="TextBox 8"/>
           <p:cNvSpPr txBox="1"/>
           <p:nvPr/>
         </p:nvSpPr>
         <p:spPr>
           <a:xfrm>
-            <a:off x="777240" y="3657600"/>
-            <a:ext cx="7315200" cy="548640"/>
+            <a:off x="502920" y="978408"/>
+            <a:ext cx="8229600" cy="320040"/>
           </a:xfrm>
           <a:prstGeom prst="rect">
             <a:avLst/>
@@ -5769,14 +6061,253 @@
           <a:lstStyle/>
           <a:p>
             <a:pPr>
-              <a:defRPr sz="1400">
-                <a:solidFill>
-                  <a:srgbClr val="00B388"/>
-                </a:solidFill>
-              </a:defRPr>
-            </a:pPr>
-            <a:r>
-              <a:t>Labels × plans model</a:t>
+              <a:defRPr sz="1100" b="1">
+                <a:solidFill>
+                  <a:srgbClr val="003241"/>
+                </a:solidFill>
+              </a:defRPr>
+            </a:pPr>
+            <a:r>
+              <a:t>Key points</a:t>
+            </a:r>
+          </a:p>
+        </p:txBody>
+      </p:sp>
+      <p:sp>
+        <p:nvSpPr>
+          <p:cNvPr id="10" name="TextBox 9"/>
+          <p:cNvSpPr txBox="1"/>
+          <p:nvPr/>
+        </p:nvSpPr>
+        <p:spPr>
+          <a:xfrm>
+            <a:off x="502920" y="1307592"/>
+            <a:ext cx="8229600" cy="4389120"/>
+          </a:xfrm>
+          <a:prstGeom prst="rect">
+            <a:avLst/>
+          </a:prstGeom>
+          <a:noFill/>
+        </p:spPr>
+        <p:txBody>
+          <a:bodyPr wrap="square">
+            <a:spAutoFit/>
+          </a:bodyPr>
+          <a:lstStyle/>
+          <a:p>
+            <a:pPr>
+              <a:spcAft>
+                <a:spcPts val="500"/>
+              </a:spcAft>
+              <a:defRPr sz="1000">
+                <a:solidFill>
+                  <a:srgbClr val="1A2332"/>
+                </a:solidFill>
+              </a:defRPr>
+            </a:pPr>
+            <a:r>
+              <a:t>• Entity registration/login suites expanded</a:t>
+            </a:r>
+          </a:p>
+          <a:p>
+            <a:pPr>
+              <a:spcAft>
+                <a:spcPts val="500"/>
+              </a:spcAft>
+              <a:defRPr sz="1000">
+                <a:solidFill>
+                  <a:srgbClr val="1A2332"/>
+                </a:solidFill>
+              </a:defRPr>
+            </a:pPr>
+            <a:r>
+              <a:t>• IDP open-account and member withdrawal regression</a:t>
+            </a:r>
+          </a:p>
+          <a:p>
+            <a:pPr>
+              <a:spcAft>
+                <a:spcPts val="500"/>
+              </a:spcAft>
+              <a:defRPr sz="1000">
+                <a:solidFill>
+                  <a:srgbClr val="1A2332"/>
+                </a:solidFill>
+              </a:defRPr>
+            </a:pPr>
+            <a:r>
+              <a:t>• Flaky-test stabilization and web registration flows</a:t>
+            </a:r>
+          </a:p>
+          <a:p>
+            <a:pPr>
+              <a:spcAft>
+                <a:spcPts val="500"/>
+              </a:spcAft>
+              <a:defRPr sz="1000">
+                <a:solidFill>
+                  <a:srgbClr val="1A2332"/>
+                </a:solidFill>
+              </a:defRPr>
+            </a:pPr>
+            <a:r>
+              <a:t>• Stage 5 smoke suites for UE + IDP</a:t>
+            </a:r>
+          </a:p>
+        </p:txBody>
+      </p:sp>
+      <p:sp>
+        <p:nvSpPr>
+          <p:cNvPr id="11" name="Rectangle 10"/>
+          <p:cNvSpPr/>
+          <p:nvPr/>
+        </p:nvSpPr>
+        <p:spPr>
+          <a:xfrm>
+            <a:off x="0" y="6510528"/>
+            <a:ext cx="9144000" cy="347472"/>
+          </a:xfrm>
+          <a:prstGeom prst="rect">
+            <a:avLst/>
+          </a:prstGeom>
+          <a:solidFill>
+            <a:srgbClr val="FFFFFF"/>
+          </a:solidFill>
+          <a:ln>
+            <a:noFill/>
+          </a:ln>
+        </p:spPr>
+        <p:style>
+          <a:lnRef idx="1">
+            <a:schemeClr val="accent1"/>
+          </a:lnRef>
+          <a:fillRef idx="3">
+            <a:schemeClr val="accent1"/>
+          </a:fillRef>
+          <a:effectRef idx="2">
+            <a:schemeClr val="accent1"/>
+          </a:effectRef>
+          <a:fontRef idx="minor">
+            <a:schemeClr val="lt1"/>
+          </a:fontRef>
+        </p:style>
+        <p:txBody>
+          <a:bodyPr rtlCol="0" anchor="ctr"/>
+          <a:lstStyle/>
+          <a:p>
+            <a:pPr algn="ctr"/>
+          </a:p>
+        </p:txBody>
+      </p:sp>
+      <p:sp>
+        <p:nvSpPr>
+          <p:cNvPr id="12" name="Rectangle 11"/>
+          <p:cNvSpPr/>
+          <p:nvPr/>
+        </p:nvSpPr>
+        <p:spPr>
+          <a:xfrm>
+            <a:off x="0" y="6510528"/>
+            <a:ext cx="9144000" cy="18288"/>
+          </a:xfrm>
+          <a:prstGeom prst="rect">
+            <a:avLst/>
+          </a:prstGeom>
+          <a:solidFill>
+            <a:srgbClr val="E8EEF6"/>
+          </a:solidFill>
+          <a:ln>
+            <a:noFill/>
+          </a:ln>
+        </p:spPr>
+        <p:style>
+          <a:lnRef idx="1">
+            <a:schemeClr val="accent1"/>
+          </a:lnRef>
+          <a:fillRef idx="3">
+            <a:schemeClr val="accent1"/>
+          </a:fillRef>
+          <a:effectRef idx="2">
+            <a:schemeClr val="accent1"/>
+          </a:effectRef>
+          <a:fontRef idx="minor">
+            <a:schemeClr val="lt1"/>
+          </a:fontRef>
+        </p:style>
+        <p:txBody>
+          <a:bodyPr rtlCol="0" anchor="ctr"/>
+          <a:lstStyle/>
+          <a:p>
+            <a:pPr algn="ctr"/>
+          </a:p>
+        </p:txBody>
+      </p:sp>
+      <p:sp>
+        <p:nvSpPr>
+          <p:cNvPr id="13" name="TextBox 12"/>
+          <p:cNvSpPr txBox="1"/>
+          <p:nvPr/>
+        </p:nvSpPr>
+        <p:spPr>
+          <a:xfrm>
+            <a:off x="384048" y="6574536"/>
+            <a:ext cx="7772400" cy="201168"/>
+          </a:xfrm>
+          <a:prstGeom prst="rect">
+            <a:avLst/>
+          </a:prstGeom>
+          <a:noFill/>
+        </p:spPr>
+        <p:txBody>
+          <a:bodyPr wrap="none">
+            <a:spAutoFit/>
+          </a:bodyPr>
+          <a:lstStyle/>
+          <a:p>
+            <a:pPr>
+              <a:defRPr sz="750">
+                <a:solidFill>
+                  <a:srgbClr val="64748B"/>
+                </a:solidFill>
+              </a:defRPr>
+            </a:pPr>
+            <a:r>
+              <a:t>V3 highlights</a:t>
+            </a:r>
+          </a:p>
+        </p:txBody>
+      </p:sp>
+      <p:sp>
+        <p:nvSpPr>
+          <p:cNvPr id="14" name="TextBox 13"/>
+          <p:cNvSpPr txBox="1"/>
+          <p:nvPr/>
+        </p:nvSpPr>
+        <p:spPr>
+          <a:xfrm>
+            <a:off x="8412480" y="6574536"/>
+            <a:ext cx="548640" cy="201168"/>
+          </a:xfrm>
+          <a:prstGeom prst="rect">
+            <a:avLst/>
+          </a:prstGeom>
+          <a:noFill/>
+        </p:spPr>
+        <p:txBody>
+          <a:bodyPr wrap="none">
+            <a:spAutoFit/>
+          </a:bodyPr>
+          <a:lstStyle/>
+          <a:p>
+            <a:pPr algn="r">
+              <a:defRPr sz="800">
+                <a:solidFill>
+                  <a:srgbClr val="64748B"/>
+                </a:solidFill>
+              </a:defRPr>
+            </a:pPr>
+            <a:r>
+              <a:t>12</a:t>
             </a:r>
           </a:p>
         </p:txBody>
@@ -5808,13 +6339,13 @@
         <p:spPr>
           <a:xfrm>
             <a:off x="0" y="0"/>
-            <a:ext cx="9144000" cy="6858000"/>
-          </a:xfrm>
-          <a:prstGeom prst="rect">
-            <a:avLst/>
-          </a:prstGeom>
-          <a:solidFill>
-            <a:srgbClr val="F0F4F8"/>
+            <a:ext cx="411480" cy="6858000"/>
+          </a:xfrm>
+          <a:prstGeom prst="rect">
+            <a:avLst/>
+          </a:prstGeom>
+          <a:solidFill>
+            <a:srgbClr val="00A3E0"/>
           </a:solidFill>
           <a:ln>
             <a:noFill/>
@@ -5850,8 +6381,8 @@
         </p:nvSpPr>
         <p:spPr>
           <a:xfrm>
-            <a:off x="0" y="0"/>
-            <a:ext cx="9144000" cy="658368"/>
+            <a:off x="411480" y="0"/>
+            <a:ext cx="8732520" cy="6858000"/>
           </a:xfrm>
           <a:prstGeom prst="rect">
             <a:avLst/>
@@ -5887,57 +6418,14 @@
       </p:sp>
       <p:sp>
         <p:nvSpPr>
-          <p:cNvPr id="4" name="Rectangle 3"/>
-          <p:cNvSpPr/>
-          <p:nvPr/>
-        </p:nvSpPr>
-        <p:spPr>
-          <a:xfrm>
-            <a:off x="0" y="658368"/>
-            <a:ext cx="9144000" cy="36576"/>
-          </a:xfrm>
-          <a:prstGeom prst="rect">
-            <a:avLst/>
-          </a:prstGeom>
-          <a:solidFill>
-            <a:srgbClr val="00A3E0"/>
-          </a:solidFill>
-          <a:ln>
-            <a:noFill/>
-          </a:ln>
-        </p:spPr>
-        <p:style>
-          <a:lnRef idx="1">
-            <a:schemeClr val="accent1"/>
-          </a:lnRef>
-          <a:fillRef idx="3">
-            <a:schemeClr val="accent1"/>
-          </a:fillRef>
-          <a:effectRef idx="2">
-            <a:schemeClr val="accent1"/>
-          </a:effectRef>
-          <a:fontRef idx="minor">
-            <a:schemeClr val="lt1"/>
-          </a:fontRef>
-        </p:style>
-        <p:txBody>
-          <a:bodyPr rtlCol="0" anchor="ctr"/>
-          <a:lstStyle/>
-          <a:p>
-            <a:pPr algn="ctr"/>
-          </a:p>
-        </p:txBody>
-      </p:sp>
-      <p:sp>
-        <p:nvSpPr>
-          <p:cNvPr id="5" name="TextBox 4"/>
+          <p:cNvPr id="4" name="TextBox 3"/>
           <p:cNvSpPr txBox="1"/>
           <p:nvPr/>
         </p:nvSpPr>
         <p:spPr>
           <a:xfrm>
-            <a:off x="384048" y="128016"/>
-            <a:ext cx="6858000" cy="457200"/>
+            <a:off x="777240" y="2560320"/>
+            <a:ext cx="7772400" cy="1097280"/>
           </a:xfrm>
           <a:prstGeom prst="rect">
             <a:avLst/>
@@ -5951,190 +6439,28 @@
           <a:lstStyle/>
           <a:p>
             <a:pPr>
-              <a:defRPr sz="2000" b="1">
+              <a:defRPr sz="3400" b="1">
                 <a:solidFill>
                   <a:srgbClr val="FFFFFF"/>
                 </a:solidFill>
               </a:defRPr>
             </a:pPr>
             <a:r>
-              <a:t>Perf Test Case Inventory</a:t>
-            </a:r>
-          </a:p>
-        </p:txBody>
-      </p:sp>
-      <p:sp>
-        <p:nvSpPr>
-          <p:cNvPr id="6" name="Rounded Rectangle 5"/>
-          <p:cNvSpPr/>
-          <p:nvPr/>
-        </p:nvSpPr>
-        <p:spPr>
-          <a:xfrm>
-            <a:off x="7452360" y="164592"/>
-            <a:ext cx="1417320" cy="347472"/>
-          </a:xfrm>
-          <a:prstGeom prst="roundRect">
-            <a:avLst/>
-          </a:prstGeom>
-          <a:solidFill>
-            <a:srgbClr val="00A3E0"/>
-          </a:solidFill>
-          <a:ln>
-            <a:noFill/>
-          </a:ln>
-        </p:spPr>
-        <p:style>
-          <a:lnRef idx="1">
-            <a:schemeClr val="accent1"/>
-          </a:lnRef>
-          <a:fillRef idx="3">
-            <a:schemeClr val="accent1"/>
-          </a:fillRef>
-          <a:effectRef idx="2">
-            <a:schemeClr val="accent1"/>
-          </a:effectRef>
-          <a:fontRef idx="minor">
-            <a:schemeClr val="lt1"/>
-          </a:fontRef>
-        </p:style>
-        <p:txBody>
-          <a:bodyPr rtlCol="0" anchor="ctr"/>
-          <a:lstStyle/>
-          <a:p>
-            <a:pPr algn="ctr">
-              <a:defRPr sz="900" b="1">
-                <a:solidFill>
-                  <a:srgbClr val="FFFFFF"/>
-                </a:solidFill>
-              </a:defRPr>
-            </a:pPr>
-            <a:r>
-              <a:t>Perf</a:t>
-            </a:r>
-          </a:p>
-        </p:txBody>
-      </p:sp>
-      <p:pic>
-        <p:nvPicPr>
-          <p:cNvPr id="7" name="Picture 6" descr="12-perf-test-case-inventory.png"/>
-          <p:cNvPicPr>
-            <a:picLocks noChangeAspect="1"/>
-          </p:cNvPicPr>
-          <p:nvPr/>
-        </p:nvPicPr>
-        <p:blipFill>
-          <a:blip r:embed="rId2"/>
-          <a:stretch>
-            <a:fillRect/>
-          </a:stretch>
-        </p:blipFill>
-        <p:spPr>
-          <a:xfrm>
-            <a:off x="320040" y="868680"/>
-            <a:ext cx="4892040" cy="2210826"/>
-          </a:xfrm>
-          <a:prstGeom prst="rect">
-            <a:avLst/>
-          </a:prstGeom>
-        </p:spPr>
-      </p:pic>
-      <p:sp>
-        <p:nvSpPr>
-          <p:cNvPr id="8" name="Rounded Rectangle 7"/>
-          <p:cNvSpPr/>
-          <p:nvPr/>
-        </p:nvSpPr>
-        <p:spPr>
-          <a:xfrm>
-            <a:off x="5349240" y="868680"/>
-            <a:ext cx="3474720" cy="5349240"/>
-          </a:xfrm>
-          <a:prstGeom prst="roundRect">
-            <a:avLst/>
-          </a:prstGeom>
-          <a:solidFill>
-            <a:srgbClr val="E8EEF6"/>
-          </a:solidFill>
-          <a:ln>
-            <a:noFill/>
-          </a:ln>
-        </p:spPr>
-        <p:style>
-          <a:lnRef idx="1">
-            <a:schemeClr val="accent1"/>
-          </a:lnRef>
-          <a:fillRef idx="3">
-            <a:schemeClr val="accent1"/>
-          </a:fillRef>
-          <a:effectRef idx="2">
-            <a:schemeClr val="accent1"/>
-          </a:effectRef>
-          <a:fontRef idx="minor">
-            <a:schemeClr val="lt1"/>
-          </a:fontRef>
-        </p:style>
-        <p:txBody>
-          <a:bodyPr rtlCol="0" anchor="ctr"/>
-          <a:lstStyle/>
-          <a:p>
-            <a:pPr algn="ctr"/>
-          </a:p>
-        </p:txBody>
-      </p:sp>
-      <p:sp>
-        <p:nvSpPr>
-          <p:cNvPr id="9" name="Rectangle 8"/>
-          <p:cNvSpPr/>
-          <p:nvPr/>
-        </p:nvSpPr>
-        <p:spPr>
-          <a:xfrm>
-            <a:off x="5349240" y="868680"/>
-            <a:ext cx="54864" cy="5349240"/>
-          </a:xfrm>
-          <a:prstGeom prst="rect">
-            <a:avLst/>
-          </a:prstGeom>
-          <a:solidFill>
-            <a:srgbClr val="00B388"/>
-          </a:solidFill>
-          <a:ln>
-            <a:noFill/>
-          </a:ln>
-        </p:spPr>
-        <p:style>
-          <a:lnRef idx="1">
-            <a:schemeClr val="accent1"/>
-          </a:lnRef>
-          <a:fillRef idx="3">
-            <a:schemeClr val="accent1"/>
-          </a:fillRef>
-          <a:effectRef idx="2">
-            <a:schemeClr val="accent1"/>
-          </a:effectRef>
-          <a:fontRef idx="minor">
-            <a:schemeClr val="lt1"/>
-          </a:fontRef>
-        </p:style>
-        <p:txBody>
-          <a:bodyPr rtlCol="0" anchor="ctr"/>
-          <a:lstStyle/>
-          <a:p>
-            <a:pPr algn="ctr"/>
-          </a:p>
-        </p:txBody>
-      </p:sp>
-      <p:sp>
-        <p:nvSpPr>
-          <p:cNvPr id="10" name="TextBox 9"/>
+              <a:t>API / Unite MSC</a:t>
+            </a:r>
+          </a:p>
+        </p:txBody>
+      </p:sp>
+      <p:sp>
+        <p:nvSpPr>
+          <p:cNvPr id="5" name="TextBox 4"/>
           <p:cNvSpPr txBox="1"/>
           <p:nvPr/>
         </p:nvSpPr>
         <p:spPr>
           <a:xfrm>
-            <a:off x="5532120" y="978408"/>
-            <a:ext cx="3200400" cy="320040"/>
+            <a:off x="777240" y="3657600"/>
+            <a:ext cx="7315200" cy="548640"/>
           </a:xfrm>
           <a:prstGeom prst="rect">
             <a:avLst/>
@@ -6148,253 +6474,14 @@
           <a:lstStyle/>
           <a:p>
             <a:pPr>
-              <a:defRPr sz="1100" b="1">
-                <a:solidFill>
-                  <a:srgbClr val="003241"/>
-                </a:solidFill>
-              </a:defRPr>
-            </a:pPr>
-            <a:r>
-              <a:t>323 test cases</a:t>
-            </a:r>
-          </a:p>
-        </p:txBody>
-      </p:sp>
-      <p:sp>
-        <p:nvSpPr>
-          <p:cNvPr id="11" name="TextBox 10"/>
-          <p:cNvSpPr txBox="1"/>
-          <p:nvPr/>
-        </p:nvSpPr>
-        <p:spPr>
-          <a:xfrm>
-            <a:off x="5532120" y="1307592"/>
-            <a:ext cx="3200400" cy="4846320"/>
-          </a:xfrm>
-          <a:prstGeom prst="rect">
-            <a:avLst/>
-          </a:prstGeom>
-          <a:noFill/>
-        </p:spPr>
-        <p:txBody>
-          <a:bodyPr wrap="square">
-            <a:spAutoFit/>
-          </a:bodyPr>
-          <a:lstStyle/>
-          <a:p>
-            <a:pPr>
-              <a:spcAft>
-                <a:spcPts val="500"/>
-              </a:spcAft>
-              <a:defRPr sz="1000">
-                <a:solidFill>
-                  <a:srgbClr val="1A2332"/>
-                </a:solidFill>
-              </a:defRPr>
-            </a:pPr>
-            <a:r>
-              <a:t>• IDP × 7 plans</a:t>
-            </a:r>
-          </a:p>
-          <a:p>
-            <a:pPr>
-              <a:spcAft>
-                <a:spcPts val="500"/>
-              </a:spcAft>
-              <a:defRPr sz="1000">
-                <a:solidFill>
-                  <a:srgbClr val="1A2332"/>
-                </a:solidFill>
-              </a:defRPr>
-            </a:pPr>
-            <a:r>
-              <a:t>• Legacy × 5</a:t>
-            </a:r>
-          </a:p>
-          <a:p>
-            <a:pPr>
-              <a:spcAft>
-                <a:spcPts val="500"/>
-              </a:spcAft>
-              <a:defRPr sz="1000">
-                <a:solidFill>
-                  <a:srgbClr val="1A2332"/>
-                </a:solidFill>
-              </a:defRPr>
-            </a:pPr>
-            <a:r>
-              <a:t>• MSC × 2 brandings</a:t>
-            </a:r>
-          </a:p>
-          <a:p>
-            <a:pPr>
-              <a:spcAft>
-                <a:spcPts val="500"/>
-              </a:spcAft>
-              <a:defRPr sz="1000">
-                <a:solidFill>
-                  <a:srgbClr val="1A2332"/>
-                </a:solidFill>
-              </a:defRPr>
-            </a:pPr>
-            <a:r>
-              <a:t>• 4 Jenkins scenarios</a:t>
-            </a:r>
-          </a:p>
-        </p:txBody>
-      </p:sp>
-      <p:sp>
-        <p:nvSpPr>
-          <p:cNvPr id="12" name="Rectangle 11"/>
-          <p:cNvSpPr/>
-          <p:nvPr/>
-        </p:nvSpPr>
-        <p:spPr>
-          <a:xfrm>
-            <a:off x="0" y="6510528"/>
-            <a:ext cx="9144000" cy="347472"/>
-          </a:xfrm>
-          <a:prstGeom prst="rect">
-            <a:avLst/>
-          </a:prstGeom>
-          <a:solidFill>
-            <a:srgbClr val="FFFFFF"/>
-          </a:solidFill>
-          <a:ln>
-            <a:noFill/>
-          </a:ln>
-        </p:spPr>
-        <p:style>
-          <a:lnRef idx="1">
-            <a:schemeClr val="accent1"/>
-          </a:lnRef>
-          <a:fillRef idx="3">
-            <a:schemeClr val="accent1"/>
-          </a:fillRef>
-          <a:effectRef idx="2">
-            <a:schemeClr val="accent1"/>
-          </a:effectRef>
-          <a:fontRef idx="minor">
-            <a:schemeClr val="lt1"/>
-          </a:fontRef>
-        </p:style>
-        <p:txBody>
-          <a:bodyPr rtlCol="0" anchor="ctr"/>
-          <a:lstStyle/>
-          <a:p>
-            <a:pPr algn="ctr"/>
-          </a:p>
-        </p:txBody>
-      </p:sp>
-      <p:sp>
-        <p:nvSpPr>
-          <p:cNvPr id="13" name="Rectangle 12"/>
-          <p:cNvSpPr/>
-          <p:nvPr/>
-        </p:nvSpPr>
-        <p:spPr>
-          <a:xfrm>
-            <a:off x="0" y="6510528"/>
-            <a:ext cx="9144000" cy="18288"/>
-          </a:xfrm>
-          <a:prstGeom prst="rect">
-            <a:avLst/>
-          </a:prstGeom>
-          <a:solidFill>
-            <a:srgbClr val="E8EEF6"/>
-          </a:solidFill>
-          <a:ln>
-            <a:noFill/>
-          </a:ln>
-        </p:spPr>
-        <p:style>
-          <a:lnRef idx="1">
-            <a:schemeClr val="accent1"/>
-          </a:lnRef>
-          <a:fillRef idx="3">
-            <a:schemeClr val="accent1"/>
-          </a:fillRef>
-          <a:effectRef idx="2">
-            <a:schemeClr val="accent1"/>
-          </a:effectRef>
-          <a:fontRef idx="minor">
-            <a:schemeClr val="lt1"/>
-          </a:fontRef>
-        </p:style>
-        <p:txBody>
-          <a:bodyPr rtlCol="0" anchor="ctr"/>
-          <a:lstStyle/>
-          <a:p>
-            <a:pPr algn="ctr"/>
-          </a:p>
-        </p:txBody>
-      </p:sp>
-      <p:sp>
-        <p:nvSpPr>
-          <p:cNvPr id="14" name="TextBox 13"/>
-          <p:cNvSpPr txBox="1"/>
-          <p:nvPr/>
-        </p:nvSpPr>
-        <p:spPr>
-          <a:xfrm>
-            <a:off x="384048" y="6583680"/>
-            <a:ext cx="7772400" cy="228600"/>
-          </a:xfrm>
-          <a:prstGeom prst="rect">
-            <a:avLst/>
-          </a:prstGeom>
-          <a:noFill/>
-        </p:spPr>
-        <p:txBody>
-          <a:bodyPr wrap="none">
-            <a:spAutoFit/>
-          </a:bodyPr>
-          <a:lstStyle/>
-          <a:p>
-            <a:pPr>
-              <a:defRPr sz="800">
-                <a:solidFill>
-                  <a:srgbClr val="64748B"/>
-                </a:solidFill>
-              </a:defRPr>
-            </a:pPr>
-            <a:r>
-              <a:t>Perf inventory</a:t>
-            </a:r>
-          </a:p>
-        </p:txBody>
-      </p:sp>
-      <p:sp>
-        <p:nvSpPr>
-          <p:cNvPr id="15" name="TextBox 14"/>
-          <p:cNvSpPr txBox="1"/>
-          <p:nvPr/>
-        </p:nvSpPr>
-        <p:spPr>
-          <a:xfrm>
-            <a:off x="8412480" y="6583680"/>
-            <a:ext cx="548640" cy="228600"/>
-          </a:xfrm>
-          <a:prstGeom prst="rect">
-            <a:avLst/>
-          </a:prstGeom>
-          <a:noFill/>
-        </p:spPr>
-        <p:txBody>
-          <a:bodyPr wrap="none">
-            <a:spAutoFit/>
-          </a:bodyPr>
-          <a:lstStyle/>
-          <a:p>
-            <a:pPr algn="r">
-              <a:defRPr sz="900">
-                <a:solidFill>
-                  <a:srgbClr val="64748B"/>
-                </a:solidFill>
-              </a:defRPr>
-            </a:pPr>
-            <a:r>
-              <a:t>11</a:t>
+              <a:defRPr sz="1400">
+                <a:solidFill>
+                  <a:srgbClr val="00B388"/>
+                </a:solidFill>
+              </a:defRPr>
+            </a:pPr>
+            <a:r>
+              <a:t>Rescued · accelerated</a:t>
             </a:r>
           </a:p>
         </p:txBody>
@@ -6576,7 +6663,7 @@
               </a:defRPr>
             </a:pPr>
             <a:r>
-              <a:t>Investment Allocation</a:t>
+              <a:t>MSC Endpoint Coverage</a:t>
             </a:r>
           </a:p>
         </p:txBody>
@@ -6628,14 +6715,14 @@
               </a:defRPr>
             </a:pPr>
             <a:r>
-              <a:t>Portfolio</a:t>
+              <a:t>MSC</a:t>
             </a:r>
           </a:p>
         </p:txBody>
       </p:sp>
       <p:pic>
         <p:nvPicPr>
-          <p:cNvPr id="7" name="Picture 6" descr="06-work-allocation-index.png"/>
+          <p:cNvPr id="7" name="Picture 6" descr="05-unite-msc-coverage.png"/>
           <p:cNvPicPr>
             <a:picLocks noChangeAspect="1"/>
           </p:cNvPicPr>
@@ -6650,7 +6737,7 @@
         <p:spPr>
           <a:xfrm>
             <a:off x="320040" y="868680"/>
-            <a:ext cx="4892040" cy="3054366"/>
+            <a:ext cx="4892040" cy="3284972"/>
           </a:xfrm>
           <a:prstGeom prst="rect">
             <a:avLst/>
@@ -6666,7 +6753,7 @@
         <p:spPr>
           <a:xfrm>
             <a:off x="5349240" y="868680"/>
-            <a:ext cx="3474720" cy="5349240"/>
+            <a:ext cx="3474720" cy="5074920"/>
           </a:xfrm>
           <a:prstGeom prst="roundRect">
             <a:avLst/>
@@ -6709,7 +6796,7 @@
         <p:spPr>
           <a:xfrm>
             <a:off x="5349240" y="868680"/>
-            <a:ext cx="54864" cy="5349240"/>
+            <a:ext cx="54864" cy="5074920"/>
           </a:xfrm>
           <a:prstGeom prst="rect">
             <a:avLst/>
@@ -6773,7 +6860,7 @@
               </a:defRPr>
             </a:pPr>
             <a:r>
-              <a:t>Where effort went</a:t>
+              <a:t>MSC status</a:t>
             </a:r>
           </a:p>
         </p:txBody>
@@ -6787,7 +6874,7 @@
         <p:spPr>
           <a:xfrm>
             <a:off x="5532120" y="1307592"/>
-            <a:ext cx="3200400" cy="4846320"/>
+            <a:ext cx="3200400" cy="4572000"/>
           </a:xfrm>
           <a:prstGeom prst="rect">
             <a:avLst/>
@@ -6811,7 +6898,7 @@
               </a:defRPr>
             </a:pPr>
             <a:r>
-              <a:t>• MSC API 35%</a:t>
+              <a:t>• M2 25/25</a:t>
             </a:r>
           </a:p>
           <a:p>
@@ -6826,7 +6913,7 @@
               </a:defRPr>
             </a:pPr>
             <a:r>
-              <a:t>• V2 UI 20%</a:t>
+              <a:t>• M1 ~25/29</a:t>
             </a:r>
           </a:p>
           <a:p>
@@ -6841,7 +6928,7 @@
               </a:defRPr>
             </a:pPr>
             <a:r>
-              <a:t>• V3 UP 15%</a:t>
+              <a:t>• ~50% ETA savings</a:t>
             </a:r>
           </a:p>
           <a:p>
@@ -6856,7 +6943,7 @@
               </a:defRPr>
             </a:pPr>
             <a:r>
-              <a:t>• Perf 12%</a:t>
+              <a:t>• P0: GitLab nightly (QA-1405)</a:t>
             </a:r>
           </a:p>
         </p:txBody>
@@ -6869,8 +6956,8 @@
         </p:nvSpPr>
         <p:spPr>
           <a:xfrm>
-            <a:off x="0" y="6510528"/>
-            <a:ext cx="9144000" cy="347472"/>
+            <a:off x="0" y="6291072"/>
+            <a:ext cx="9144000" cy="566928"/>
           </a:xfrm>
           <a:prstGeom prst="rect">
             <a:avLst/>
@@ -6912,7 +6999,7 @@
         </p:nvSpPr>
         <p:spPr>
           <a:xfrm>
-            <a:off x="0" y="6510528"/>
+            <a:off x="0" y="6291072"/>
             <a:ext cx="9144000" cy="18288"/>
           </a:xfrm>
           <a:prstGeom prst="rect">
@@ -6955,8 +7042,8 @@
         </p:nvSpPr>
         <p:spPr>
           <a:xfrm>
-            <a:off x="384048" y="6583680"/>
-            <a:ext cx="7772400" cy="228600"/>
+            <a:off x="384048" y="6355080"/>
+            <a:ext cx="8046720" cy="256032"/>
           </a:xfrm>
           <a:prstGeom prst="rect">
             <a:avLst/>
@@ -6970,14 +7057,14 @@
           <a:lstStyle/>
           <a:p>
             <a:pPr>
-              <a:defRPr sz="800">
+              <a:defRPr sz="750" i="1">
                 <a:solidFill>
                   <a:srgbClr val="64748B"/>
                 </a:solidFill>
               </a:defRPr>
             </a:pPr>
             <a:r>
-              <a:t>Squad estimate Apr–Jul</a:t>
+              <a:t>Note: M2 = full mobile endpoint catalog. M1 ~86% of 29 core categories — master suite in progress.</a:t>
             </a:r>
           </a:p>
         </p:txBody>
@@ -6990,8 +7077,8 @@
         </p:nvSpPr>
         <p:spPr>
           <a:xfrm>
-            <a:off x="8412480" y="6583680"/>
-            <a:ext cx="548640" cy="228600"/>
+            <a:off x="384048" y="6592824"/>
+            <a:ext cx="7772400" cy="201168"/>
           </a:xfrm>
           <a:prstGeom prst="rect">
             <a:avLst/>
@@ -7004,15 +7091,50 @@
           </a:bodyPr>
           <a:lstStyle/>
           <a:p>
+            <a:pPr>
+              <a:defRPr sz="750">
+                <a:solidFill>
+                  <a:srgbClr val="64748B"/>
+                </a:solidFill>
+              </a:defRPr>
+            </a:pPr>
+            <a:r>
+              <a:t>api-test-automation</a:t>
+            </a:r>
+          </a:p>
+        </p:txBody>
+      </p:sp>
+      <p:sp>
+        <p:nvSpPr>
+          <p:cNvPr id="16" name="TextBox 15"/>
+          <p:cNvSpPr txBox="1"/>
+          <p:nvPr/>
+        </p:nvSpPr>
+        <p:spPr>
+          <a:xfrm>
+            <a:off x="8412480" y="6592824"/>
+            <a:ext cx="548640" cy="201168"/>
+          </a:xfrm>
+          <a:prstGeom prst="rect">
+            <a:avLst/>
+          </a:prstGeom>
+          <a:noFill/>
+        </p:spPr>
+        <p:txBody>
+          <a:bodyPr wrap="none">
+            <a:spAutoFit/>
+          </a:bodyPr>
+          <a:lstStyle/>
+          <a:p>
             <a:pPr algn="r">
-              <a:defRPr sz="900">
+              <a:defRPr sz="800">
                 <a:solidFill>
                   <a:srgbClr val="64748B"/>
                 </a:solidFill>
               </a:defRPr>
             </a:pPr>
             <a:r>
-              <a:t>12</a:t>
+              <a:t>13</a:t>
             </a:r>
           </a:p>
         </p:txBody>
@@ -7194,7 +7316,7 @@
               </a:defRPr>
             </a:pPr>
             <a:r>
-              <a:t>Release Automation Impact</a:t>
+              <a:t>API Module Breakdown</a:t>
             </a:r>
           </a:p>
         </p:txBody>
@@ -7246,14 +7368,14 @@
               </a:defRPr>
             </a:pPr>
             <a:r>
-              <a:t>Value</a:t>
+              <a:t>API</a:t>
             </a:r>
           </a:p>
         </p:txBody>
       </p:sp>
       <p:pic>
         <p:nvPicPr>
-          <p:cNvPr id="7" name="Picture 6" descr="07-release-automation-impact.png"/>
+          <p:cNvPr id="7" name="Picture 6" descr="13-api-regression-by-module.png"/>
           <p:cNvPicPr>
             <a:picLocks noChangeAspect="1"/>
           </p:cNvPicPr>
@@ -7268,7 +7390,7 @@
         <p:spPr>
           <a:xfrm>
             <a:off x="320040" y="868680"/>
-            <a:ext cx="4892040" cy="5415468"/>
+            <a:ext cx="4892040" cy="2712859"/>
           </a:xfrm>
           <a:prstGeom prst="rect">
             <a:avLst/>
@@ -7284,7 +7406,7 @@
         <p:spPr>
           <a:xfrm>
             <a:off x="5349240" y="868680"/>
-            <a:ext cx="3474720" cy="5349240"/>
+            <a:ext cx="3474720" cy="5074920"/>
           </a:xfrm>
           <a:prstGeom prst="roundRect">
             <a:avLst/>
@@ -7327,7 +7449,7 @@
         <p:spPr>
           <a:xfrm>
             <a:off x="5349240" y="868680"/>
-            <a:ext cx="54864" cy="5349240"/>
+            <a:ext cx="54864" cy="5074920"/>
           </a:xfrm>
           <a:prstGeom prst="rect">
             <a:avLst/>
@@ -7391,7 +7513,7 @@
               </a:defRPr>
             </a:pPr>
             <a:r>
-              <a:t>Business value</a:t>
+              <a:t>M1 categories</a:t>
             </a:r>
           </a:p>
         </p:txBody>
@@ -7405,7 +7527,7 @@
         <p:spPr>
           <a:xfrm>
             <a:off x="5532120" y="1307592"/>
-            <a:ext cx="3200400" cy="4846320"/>
+            <a:ext cx="3200400" cy="4572000"/>
           </a:xfrm>
           <a:prstGeom prst="rect">
             <a:avLst/>
@@ -7429,7 +7551,7 @@
               </a:defRPr>
             </a:pPr>
             <a:r>
-              <a:t>• ~80% automated</a:t>
+              <a:t>• Auth, profile, biometric, device, bank</a:t>
             </a:r>
           </a:p>
           <a:p>
@@ -7444,7 +7566,7 @@
               </a:defRPr>
             </a:pPr>
             <a:r>
-              <a:t>• 17 FTE → 2 FTE equivalent</a:t>
+              <a:t>• Master suite in progress</a:t>
             </a:r>
           </a:p>
           <a:p>
@@ -7459,7 +7581,7 @@
               </a:defRPr>
             </a:pPr>
             <a:r>
-              <a:t>• Team focuses on triage + net-new</a:t>
+              <a:t>• Endpoints × branding plans</a:t>
             </a:r>
           </a:p>
         </p:txBody>
@@ -7472,8 +7594,8 @@
         </p:nvSpPr>
         <p:spPr>
           <a:xfrm>
-            <a:off x="0" y="6510528"/>
-            <a:ext cx="9144000" cy="347472"/>
+            <a:off x="0" y="6291072"/>
+            <a:ext cx="9144000" cy="566928"/>
           </a:xfrm>
           <a:prstGeom prst="rect">
             <a:avLst/>
@@ -7515,7 +7637,7 @@
         </p:nvSpPr>
         <p:spPr>
           <a:xfrm>
-            <a:off x="0" y="6510528"/>
+            <a:off x="0" y="6291072"/>
             <a:ext cx="9144000" cy="18288"/>
           </a:xfrm>
           <a:prstGeom prst="rect">
@@ -7558,8 +7680,8 @@
         </p:nvSpPr>
         <p:spPr>
           <a:xfrm>
-            <a:off x="384048" y="6583680"/>
-            <a:ext cx="7772400" cy="228600"/>
+            <a:off x="384048" y="6355080"/>
+            <a:ext cx="8046720" cy="256032"/>
           </a:xfrm>
           <a:prstGeom prst="rect">
             <a:avLst/>
@@ -7573,14 +7695,14 @@
           <a:lstStyle/>
           <a:p>
             <a:pPr>
-              <a:defRPr sz="800">
+              <a:defRPr sz="750" i="1">
                 <a:solidFill>
                   <a:srgbClr val="64748B"/>
                 </a:solidFill>
               </a:defRPr>
             </a:pPr>
             <a:r>
-              <a:t>Release validation model</a:t>
+              <a:t>Note: OKD non-IDP + NYD/NMD IDP brandings expand endpoint permutations beyond raw count.</a:t>
             </a:r>
           </a:p>
         </p:txBody>
@@ -7593,8 +7715,8 @@
         </p:nvSpPr>
         <p:spPr>
           <a:xfrm>
-            <a:off x="8412480" y="6583680"/>
-            <a:ext cx="548640" cy="228600"/>
+            <a:off x="384048" y="6592824"/>
+            <a:ext cx="7772400" cy="201168"/>
           </a:xfrm>
           <a:prstGeom prst="rect">
             <a:avLst/>
@@ -7607,15 +7729,50 @@
           </a:bodyPr>
           <a:lstStyle/>
           <a:p>
+            <a:pPr>
+              <a:defRPr sz="750">
+                <a:solidFill>
+                  <a:srgbClr val="64748B"/>
+                </a:solidFill>
+              </a:defRPr>
+            </a:pPr>
+            <a:r>
+              <a:t>api-test-automation</a:t>
+            </a:r>
+          </a:p>
+        </p:txBody>
+      </p:sp>
+      <p:sp>
+        <p:nvSpPr>
+          <p:cNvPr id="16" name="TextBox 15"/>
+          <p:cNvSpPr txBox="1"/>
+          <p:nvPr/>
+        </p:nvSpPr>
+        <p:spPr>
+          <a:xfrm>
+            <a:off x="8412480" y="6592824"/>
+            <a:ext cx="548640" cy="201168"/>
+          </a:xfrm>
+          <a:prstGeom prst="rect">
+            <a:avLst/>
+          </a:prstGeom>
+          <a:noFill/>
+        </p:spPr>
+        <p:txBody>
+          <a:bodyPr wrap="none">
+            <a:spAutoFit/>
+          </a:bodyPr>
+          <a:lstStyle/>
+          <a:p>
             <a:pPr algn="r">
-              <a:defRPr sz="900">
+              <a:defRPr sz="800">
                 <a:solidFill>
                   <a:srgbClr val="64748B"/>
                 </a:solidFill>
               </a:defRPr>
             </a:pPr>
             <a:r>
-              <a:t>13</a:t>
+              <a:t>14</a:t>
             </a:r>
           </a:p>
         </p:txBody>
@@ -7647,13 +7804,13 @@
         <p:spPr>
           <a:xfrm>
             <a:off x="0" y="0"/>
-            <a:ext cx="9144000" cy="6858000"/>
-          </a:xfrm>
-          <a:prstGeom prst="rect">
-            <a:avLst/>
-          </a:prstGeom>
-          <a:solidFill>
-            <a:srgbClr val="F0F4F8"/>
+            <a:ext cx="411480" cy="6858000"/>
+          </a:xfrm>
+          <a:prstGeom prst="rect">
+            <a:avLst/>
+          </a:prstGeom>
+          <a:solidFill>
+            <a:srgbClr val="00A3E0"/>
           </a:solidFill>
           <a:ln>
             <a:noFill/>
@@ -7689,8 +7846,8 @@
         </p:nvSpPr>
         <p:spPr>
           <a:xfrm>
-            <a:off x="0" y="0"/>
-            <a:ext cx="9144000" cy="658368"/>
+            <a:off x="411480" y="0"/>
+            <a:ext cx="8732520" cy="6858000"/>
           </a:xfrm>
           <a:prstGeom prst="rect">
             <a:avLst/>
@@ -7726,57 +7883,14 @@
       </p:sp>
       <p:sp>
         <p:nvSpPr>
-          <p:cNvPr id="4" name="Rectangle 3"/>
-          <p:cNvSpPr/>
-          <p:nvPr/>
-        </p:nvSpPr>
-        <p:spPr>
-          <a:xfrm>
-            <a:off x="0" y="658368"/>
-            <a:ext cx="9144000" cy="36576"/>
-          </a:xfrm>
-          <a:prstGeom prst="rect">
-            <a:avLst/>
-          </a:prstGeom>
-          <a:solidFill>
-            <a:srgbClr val="00A3E0"/>
-          </a:solidFill>
-          <a:ln>
-            <a:noFill/>
-          </a:ln>
-        </p:spPr>
-        <p:style>
-          <a:lnRef idx="1">
-            <a:schemeClr val="accent1"/>
-          </a:lnRef>
-          <a:fillRef idx="3">
-            <a:schemeClr val="accent1"/>
-          </a:fillRef>
-          <a:effectRef idx="2">
-            <a:schemeClr val="accent1"/>
-          </a:effectRef>
-          <a:fontRef idx="minor">
-            <a:schemeClr val="lt1"/>
-          </a:fontRef>
-        </p:style>
-        <p:txBody>
-          <a:bodyPr rtlCol="0" anchor="ctr"/>
-          <a:lstStyle/>
-          <a:p>
-            <a:pPr algn="ctr"/>
-          </a:p>
-        </p:txBody>
-      </p:sp>
-      <p:sp>
-        <p:nvSpPr>
-          <p:cNvPr id="5" name="TextBox 4"/>
+          <p:cNvPr id="4" name="TextBox 3"/>
           <p:cNvSpPr txBox="1"/>
           <p:nvPr/>
         </p:nvSpPr>
         <p:spPr>
           <a:xfrm>
-            <a:off x="384048" y="128016"/>
-            <a:ext cx="6858000" cy="457200"/>
+            <a:off x="777240" y="2560320"/>
+            <a:ext cx="7772400" cy="1097280"/>
           </a:xfrm>
           <a:prstGeom prst="rect">
             <a:avLst/>
@@ -7790,166 +7904,28 @@
           <a:lstStyle/>
           <a:p>
             <a:pPr>
-              <a:defRPr sz="2000" b="1">
+              <a:defRPr sz="3400" b="1">
                 <a:solidFill>
                   <a:srgbClr val="FFFFFF"/>
                 </a:solidFill>
               </a:defRPr>
             </a:pPr>
             <a:r>
-              <a:t>AI Acceleration</a:t>
-            </a:r>
-          </a:p>
-        </p:txBody>
-      </p:sp>
-      <p:sp>
-        <p:nvSpPr>
-          <p:cNvPr id="6" name="Rounded Rectangle 5"/>
-          <p:cNvSpPr/>
-          <p:nvPr/>
-        </p:nvSpPr>
-        <p:spPr>
-          <a:xfrm>
-            <a:off x="7452360" y="164592"/>
-            <a:ext cx="1417320" cy="347472"/>
-          </a:xfrm>
-          <a:prstGeom prst="roundRect">
-            <a:avLst/>
-          </a:prstGeom>
-          <a:solidFill>
-            <a:srgbClr val="00A3E0"/>
-          </a:solidFill>
-          <a:ln>
-            <a:noFill/>
-          </a:ln>
-        </p:spPr>
-        <p:style>
-          <a:lnRef idx="1">
-            <a:schemeClr val="accent1"/>
-          </a:lnRef>
-          <a:fillRef idx="3">
-            <a:schemeClr val="accent1"/>
-          </a:fillRef>
-          <a:effectRef idx="2">
-            <a:schemeClr val="accent1"/>
-          </a:effectRef>
-          <a:fontRef idx="minor">
-            <a:schemeClr val="lt1"/>
-          </a:fontRef>
-        </p:style>
-        <p:txBody>
-          <a:bodyPr rtlCol="0" anchor="ctr"/>
-          <a:lstStyle/>
-          <a:p>
-            <a:pPr algn="ctr">
-              <a:defRPr sz="900" b="1">
-                <a:solidFill>
-                  <a:srgbClr val="FFFFFF"/>
-                </a:solidFill>
-              </a:defRPr>
-            </a:pPr>
-            <a:r>
-              <a:t>AI</a:t>
-            </a:r>
-          </a:p>
-        </p:txBody>
-      </p:sp>
-      <p:sp>
-        <p:nvSpPr>
-          <p:cNvPr id="7" name="Rounded Rectangle 6"/>
-          <p:cNvSpPr/>
-          <p:nvPr/>
-        </p:nvSpPr>
-        <p:spPr>
-          <a:xfrm>
-            <a:off x="320040" y="868680"/>
-            <a:ext cx="8503920" cy="5029200"/>
-          </a:xfrm>
-          <a:prstGeom prst="roundRect">
-            <a:avLst/>
-          </a:prstGeom>
-          <a:solidFill>
-            <a:srgbClr val="E8EEF6"/>
-          </a:solidFill>
-          <a:ln>
-            <a:noFill/>
-          </a:ln>
-        </p:spPr>
-        <p:style>
-          <a:lnRef idx="1">
-            <a:schemeClr val="accent1"/>
-          </a:lnRef>
-          <a:fillRef idx="3">
-            <a:schemeClr val="accent1"/>
-          </a:fillRef>
-          <a:effectRef idx="2">
-            <a:schemeClr val="accent1"/>
-          </a:effectRef>
-          <a:fontRef idx="minor">
-            <a:schemeClr val="lt1"/>
-          </a:fontRef>
-        </p:style>
-        <p:txBody>
-          <a:bodyPr rtlCol="0" anchor="ctr"/>
-          <a:lstStyle/>
-          <a:p>
-            <a:pPr algn="ctr"/>
-          </a:p>
-        </p:txBody>
-      </p:sp>
-      <p:sp>
-        <p:nvSpPr>
-          <p:cNvPr id="8" name="Rectangle 7"/>
-          <p:cNvSpPr/>
-          <p:nvPr/>
-        </p:nvSpPr>
-        <p:spPr>
-          <a:xfrm>
-            <a:off x="320040" y="868680"/>
-            <a:ext cx="54864" cy="5029200"/>
-          </a:xfrm>
-          <a:prstGeom prst="rect">
-            <a:avLst/>
-          </a:prstGeom>
-          <a:solidFill>
-            <a:srgbClr val="00B388"/>
-          </a:solidFill>
-          <a:ln>
-            <a:noFill/>
-          </a:ln>
-        </p:spPr>
-        <p:style>
-          <a:lnRef idx="1">
-            <a:schemeClr val="accent1"/>
-          </a:lnRef>
-          <a:fillRef idx="3">
-            <a:schemeClr val="accent1"/>
-          </a:fillRef>
-          <a:effectRef idx="2">
-            <a:schemeClr val="accent1"/>
-          </a:effectRef>
-          <a:fontRef idx="minor">
-            <a:schemeClr val="lt1"/>
-          </a:fontRef>
-        </p:style>
-        <p:txBody>
-          <a:bodyPr rtlCol="0" anchor="ctr"/>
-          <a:lstStyle/>
-          <a:p>
-            <a:pPr algn="ctr"/>
-          </a:p>
-        </p:txBody>
-      </p:sp>
-      <p:sp>
-        <p:nvSpPr>
-          <p:cNvPr id="9" name="TextBox 8"/>
+              <a:t>Performance Testing</a:t>
+            </a:r>
+          </a:p>
+        </p:txBody>
+      </p:sp>
+      <p:sp>
+        <p:nvSpPr>
+          <p:cNvPr id="5" name="TextBox 4"/>
           <p:cNvSpPr txBox="1"/>
           <p:nvPr/>
         </p:nvSpPr>
         <p:spPr>
           <a:xfrm>
-            <a:off x="502920" y="978408"/>
-            <a:ext cx="8229600" cy="320040"/>
+            <a:off x="777240" y="3657600"/>
+            <a:ext cx="7315200" cy="548640"/>
           </a:xfrm>
           <a:prstGeom prst="rect">
             <a:avLst/>
@@ -7963,253 +7939,14 @@
           <a:lstStyle/>
           <a:p>
             <a:pPr>
-              <a:defRPr sz="1100" b="1">
-                <a:solidFill>
-                  <a:srgbClr val="003241"/>
-                </a:solidFill>
-              </a:defRPr>
-            </a:pPr>
-            <a:r>
-              <a:t>Key points</a:t>
-            </a:r>
-          </a:p>
-        </p:txBody>
-      </p:sp>
-      <p:sp>
-        <p:nvSpPr>
-          <p:cNvPr id="10" name="TextBox 9"/>
-          <p:cNvSpPr txBox="1"/>
-          <p:nvPr/>
-        </p:nvSpPr>
-        <p:spPr>
-          <a:xfrm>
-            <a:off x="502920" y="1307592"/>
-            <a:ext cx="8229600" cy="4526280"/>
-          </a:xfrm>
-          <a:prstGeom prst="rect">
-            <a:avLst/>
-          </a:prstGeom>
-          <a:noFill/>
-        </p:spPr>
-        <p:txBody>
-          <a:bodyPr wrap="square">
-            <a:spAutoFit/>
-          </a:bodyPr>
-          <a:lstStyle/>
-          <a:p>
-            <a:pPr>
-              <a:spcAft>
-                <a:spcPts val="500"/>
-              </a:spcAft>
-              <a:defRPr sz="1000">
-                <a:solidFill>
-                  <a:srgbClr val="1A2332"/>
-                </a:solidFill>
-              </a:defRPr>
-            </a:pPr>
-            <a:r>
-              <a:t>• MSC migration agents — Postman, docs, TestNG</a:t>
-            </a:r>
-          </a:p>
-          <a:p>
-            <a:pPr>
-              <a:spcAft>
-                <a:spcPts val="500"/>
-              </a:spcAft>
-              <a:defRPr sz="1000">
-                <a:solidFill>
-                  <a:srgbClr val="1A2332"/>
-                </a:solidFill>
-              </a:defRPr>
-            </a:pPr>
-            <a:r>
-              <a:t>• Automation bug lifecycle skill</a:t>
-            </a:r>
-          </a:p>
-          <a:p>
-            <a:pPr>
-              <a:spcAft>
-                <a:spcPts val="500"/>
-              </a:spcAft>
-              <a:defRPr sz="1000">
-                <a:solidFill>
-                  <a:srgbClr val="1A2332"/>
-                </a:solidFill>
-              </a:defRPr>
-            </a:pPr>
-            <a:r>
-              <a:t>• Reproducible leadership metrics pipeline</a:t>
-            </a:r>
-          </a:p>
-          <a:p>
-            <a:pPr>
-              <a:spcAft>
-                <a:spcPts val="500"/>
-              </a:spcAft>
-              <a:defRPr sz="1000">
-                <a:solidFill>
-                  <a:srgbClr val="1A2332"/>
-                </a:solidFill>
-              </a:defRPr>
-            </a:pPr>
-            <a:r>
-              <a:t>• Coverage intelligence for monthly dashboard</a:t>
-            </a:r>
-          </a:p>
-        </p:txBody>
-      </p:sp>
-      <p:sp>
-        <p:nvSpPr>
-          <p:cNvPr id="11" name="Rectangle 10"/>
-          <p:cNvSpPr/>
-          <p:nvPr/>
-        </p:nvSpPr>
-        <p:spPr>
-          <a:xfrm>
-            <a:off x="0" y="6510528"/>
-            <a:ext cx="9144000" cy="347472"/>
-          </a:xfrm>
-          <a:prstGeom prst="rect">
-            <a:avLst/>
-          </a:prstGeom>
-          <a:solidFill>
-            <a:srgbClr val="FFFFFF"/>
-          </a:solidFill>
-          <a:ln>
-            <a:noFill/>
-          </a:ln>
-        </p:spPr>
-        <p:style>
-          <a:lnRef idx="1">
-            <a:schemeClr val="accent1"/>
-          </a:lnRef>
-          <a:fillRef idx="3">
-            <a:schemeClr val="accent1"/>
-          </a:fillRef>
-          <a:effectRef idx="2">
-            <a:schemeClr val="accent1"/>
-          </a:effectRef>
-          <a:fontRef idx="minor">
-            <a:schemeClr val="lt1"/>
-          </a:fontRef>
-        </p:style>
-        <p:txBody>
-          <a:bodyPr rtlCol="0" anchor="ctr"/>
-          <a:lstStyle/>
-          <a:p>
-            <a:pPr algn="ctr"/>
-          </a:p>
-        </p:txBody>
-      </p:sp>
-      <p:sp>
-        <p:nvSpPr>
-          <p:cNvPr id="12" name="Rectangle 11"/>
-          <p:cNvSpPr/>
-          <p:nvPr/>
-        </p:nvSpPr>
-        <p:spPr>
-          <a:xfrm>
-            <a:off x="0" y="6510528"/>
-            <a:ext cx="9144000" cy="18288"/>
-          </a:xfrm>
-          <a:prstGeom prst="rect">
-            <a:avLst/>
-          </a:prstGeom>
-          <a:solidFill>
-            <a:srgbClr val="E8EEF6"/>
-          </a:solidFill>
-          <a:ln>
-            <a:noFill/>
-          </a:ln>
-        </p:spPr>
-        <p:style>
-          <a:lnRef idx="1">
-            <a:schemeClr val="accent1"/>
-          </a:lnRef>
-          <a:fillRef idx="3">
-            <a:schemeClr val="accent1"/>
-          </a:fillRef>
-          <a:effectRef idx="2">
-            <a:schemeClr val="accent1"/>
-          </a:effectRef>
-          <a:fontRef idx="minor">
-            <a:schemeClr val="lt1"/>
-          </a:fontRef>
-        </p:style>
-        <p:txBody>
-          <a:bodyPr rtlCol="0" anchor="ctr"/>
-          <a:lstStyle/>
-          <a:p>
-            <a:pPr algn="ctr"/>
-          </a:p>
-        </p:txBody>
-      </p:sp>
-      <p:sp>
-        <p:nvSpPr>
-          <p:cNvPr id="13" name="TextBox 12"/>
-          <p:cNvSpPr txBox="1"/>
-          <p:nvPr/>
-        </p:nvSpPr>
-        <p:spPr>
-          <a:xfrm>
-            <a:off x="384048" y="6583680"/>
-            <a:ext cx="7772400" cy="228600"/>
-          </a:xfrm>
-          <a:prstGeom prst="rect">
-            <a:avLst/>
-          </a:prstGeom>
-          <a:noFill/>
-        </p:spPr>
-        <p:txBody>
-          <a:bodyPr wrap="none">
-            <a:spAutoFit/>
-          </a:bodyPr>
-          <a:lstStyle/>
-          <a:p>
-            <a:pPr>
-              <a:defRPr sz="800">
-                <a:solidFill>
-                  <a:srgbClr val="64748B"/>
-                </a:solidFill>
-              </a:defRPr>
-            </a:pPr>
-            <a:r>
-              <a:t>AI tooling portfolio</a:t>
-            </a:r>
-          </a:p>
-        </p:txBody>
-      </p:sp>
-      <p:sp>
-        <p:nvSpPr>
-          <p:cNvPr id="14" name="TextBox 13"/>
-          <p:cNvSpPr txBox="1"/>
-          <p:nvPr/>
-        </p:nvSpPr>
-        <p:spPr>
-          <a:xfrm>
-            <a:off x="8412480" y="6583680"/>
-            <a:ext cx="548640" cy="228600"/>
-          </a:xfrm>
-          <a:prstGeom prst="rect">
-            <a:avLst/>
-          </a:prstGeom>
-          <a:noFill/>
-        </p:spPr>
-        <p:txBody>
-          <a:bodyPr wrap="none">
-            <a:spAutoFit/>
-          </a:bodyPr>
-          <a:lstStyle/>
-          <a:p>
-            <a:pPr algn="r">
-              <a:defRPr sz="900">
-                <a:solidFill>
-                  <a:srgbClr val="64748B"/>
-                </a:solidFill>
-              </a:defRPr>
-            </a:pPr>
-            <a:r>
-              <a:t>14</a:t>
+              <a:defRPr sz="1400">
+                <a:solidFill>
+                  <a:srgbClr val="00B388"/>
+                </a:solidFill>
+              </a:defRPr>
+            </a:pPr>
+            <a:r>
+              <a:t>Labels × plans model</a:t>
             </a:r>
           </a:p>
         </p:txBody>
@@ -8391,7 +8128,7 @@
               </a:defRPr>
             </a:pPr>
             <a:r>
-              <a:t>Roadmap Q3–Q4 2026</a:t>
+              <a:t>Perf Test Case Inventory</a:t>
             </a:r>
           </a:p>
         </p:txBody>
@@ -8443,21 +8180,45 @@
               </a:defRPr>
             </a:pPr>
             <a:r>
-              <a:t>Roadmap</a:t>
-            </a:r>
-          </a:p>
-        </p:txBody>
-      </p:sp>
-      <p:sp>
-        <p:nvSpPr>
-          <p:cNvPr id="7" name="Rounded Rectangle 6"/>
-          <p:cNvSpPr/>
-          <p:nvPr/>
-        </p:nvSpPr>
+              <a:t>Perf</a:t>
+            </a:r>
+          </a:p>
+        </p:txBody>
+      </p:sp>
+      <p:pic>
+        <p:nvPicPr>
+          <p:cNvPr id="7" name="Picture 6" descr="12-perf-test-case-inventory.png"/>
+          <p:cNvPicPr>
+            <a:picLocks noChangeAspect="1"/>
+          </p:cNvPicPr>
+          <p:nvPr/>
+        </p:nvPicPr>
+        <p:blipFill>
+          <a:blip r:embed="rId2"/>
+          <a:stretch>
+            <a:fillRect/>
+          </a:stretch>
+        </p:blipFill>
         <p:spPr>
           <a:xfrm>
             <a:off x="320040" y="868680"/>
-            <a:ext cx="8503920" cy="5029200"/>
+            <a:ext cx="4892040" cy="2723375"/>
+          </a:xfrm>
+          <a:prstGeom prst="rect">
+            <a:avLst/>
+          </a:prstGeom>
+        </p:spPr>
+      </p:pic>
+      <p:sp>
+        <p:nvSpPr>
+          <p:cNvPr id="8" name="Rounded Rectangle 7"/>
+          <p:cNvSpPr/>
+          <p:nvPr/>
+        </p:nvSpPr>
+        <p:spPr>
+          <a:xfrm>
+            <a:off x="5349240" y="868680"/>
+            <a:ext cx="3474720" cy="5074920"/>
           </a:xfrm>
           <a:prstGeom prst="roundRect">
             <a:avLst/>
@@ -8493,14 +8254,14 @@
       </p:sp>
       <p:sp>
         <p:nvSpPr>
-          <p:cNvPr id="8" name="Rectangle 7"/>
-          <p:cNvSpPr/>
-          <p:nvPr/>
-        </p:nvSpPr>
-        <p:spPr>
-          <a:xfrm>
-            <a:off x="320040" y="868680"/>
-            <a:ext cx="54864" cy="5029200"/>
+          <p:cNvPr id="9" name="Rectangle 8"/>
+          <p:cNvSpPr/>
+          <p:nvPr/>
+        </p:nvSpPr>
+        <p:spPr>
+          <a:xfrm>
+            <a:off x="5349240" y="868680"/>
+            <a:ext cx="54864" cy="5074920"/>
           </a:xfrm>
           <a:prstGeom prst="rect">
             <a:avLst/>
@@ -8536,14 +8297,14 @@
       </p:sp>
       <p:sp>
         <p:nvSpPr>
-          <p:cNvPr id="9" name="TextBox 8"/>
+          <p:cNvPr id="10" name="TextBox 9"/>
           <p:cNvSpPr txBox="1"/>
           <p:nvPr/>
         </p:nvSpPr>
         <p:spPr>
           <a:xfrm>
-            <a:off x="502920" y="978408"/>
-            <a:ext cx="8229600" cy="320040"/>
+            <a:off x="5532120" y="978408"/>
+            <a:ext cx="3200400" cy="320040"/>
           </a:xfrm>
           <a:prstGeom prst="rect">
             <a:avLst/>
@@ -8564,21 +8325,21 @@
               </a:defRPr>
             </a:pPr>
             <a:r>
-              <a:t>Key points</a:t>
-            </a:r>
-          </a:p>
-        </p:txBody>
-      </p:sp>
-      <p:sp>
-        <p:nvSpPr>
-          <p:cNvPr id="10" name="TextBox 9"/>
+              <a:t>Why the numbers look large</a:t>
+            </a:r>
+          </a:p>
+        </p:txBody>
+      </p:sp>
+      <p:sp>
+        <p:nvSpPr>
+          <p:cNvPr id="11" name="TextBox 10"/>
           <p:cNvSpPr txBox="1"/>
           <p:nvPr/>
         </p:nvSpPr>
         <p:spPr>
           <a:xfrm>
-            <a:off x="502920" y="1307592"/>
-            <a:ext cx="8229600" cy="4526280"/>
+            <a:off x="5532120" y="1307592"/>
+            <a:ext cx="3200400" cy="4572000"/>
           </a:xfrm>
           <a:prstGeom prst="rect">
             <a:avLst/>
@@ -8602,7 +8363,7 @@
               </a:defRPr>
             </a:pPr>
             <a:r>
-              <a:t>• P0: MSC GitLab nightly · M1 master suite</a:t>
+              <a:t>• 83 base transaction flows → 323 plan-expanded cases</a:t>
             </a:r>
           </a:p>
           <a:p>
@@ -8617,7 +8378,7 @@
               </a:defRPr>
             </a:pPr>
             <a:r>
-              <a:t>• P1: MSC enrollment API · CSR Actions expansion</a:t>
+              <a:t>• Bars = flows; line = cases after × plan matrix</a:t>
             </a:r>
           </a:p>
           <a:p>
@@ -8632,7 +8393,7 @@
               </a:defRPr>
             </a:pPr>
             <a:r>
-              <a:t>• P2: Entity V3 nightly · automated dashboard</a:t>
+              <a:t>• 4 Jenkins scenarios schedule these permutations</a:t>
             </a:r>
           </a:p>
           <a:p>
@@ -8647,21 +8408,21 @@
               </a:defRPr>
             </a:pPr>
             <a:r>
-              <a:t>• Engage at SDLC start</a:t>
-            </a:r>
-          </a:p>
-        </p:txBody>
-      </p:sp>
-      <p:sp>
-        <p:nvSpPr>
-          <p:cNvPr id="11" name="Rectangle 10"/>
-          <p:cNvSpPr/>
-          <p:nvPr/>
-        </p:nvSpPr>
-        <p:spPr>
-          <a:xfrm>
-            <a:off x="0" y="6510528"/>
-            <a:ext cx="9144000" cy="347472"/>
+              <a:t>• IDP alone: 15 labels × 7 plans = 105 cases</a:t>
+            </a:r>
+          </a:p>
+        </p:txBody>
+      </p:sp>
+      <p:sp>
+        <p:nvSpPr>
+          <p:cNvPr id="12" name="Rectangle 11"/>
+          <p:cNvSpPr/>
+          <p:nvPr/>
+        </p:nvSpPr>
+        <p:spPr>
+          <a:xfrm>
+            <a:off x="0" y="6291072"/>
+            <a:ext cx="9144000" cy="566928"/>
           </a:xfrm>
           <a:prstGeom prst="rect">
             <a:avLst/>
@@ -8697,13 +8458,13 @@
       </p:sp>
       <p:sp>
         <p:nvSpPr>
-          <p:cNvPr id="12" name="Rectangle 11"/>
-          <p:cNvSpPr/>
-          <p:nvPr/>
-        </p:nvSpPr>
-        <p:spPr>
-          <a:xfrm>
-            <a:off x="0" y="6510528"/>
+          <p:cNvPr id="13" name="Rectangle 12"/>
+          <p:cNvSpPr/>
+          <p:nvPr/>
+        </p:nvSpPr>
+        <p:spPr>
+          <a:xfrm>
+            <a:off x="0" y="6291072"/>
             <a:ext cx="9144000" cy="18288"/>
           </a:xfrm>
           <a:prstGeom prst="rect">
@@ -8740,14 +8501,14 @@
       </p:sp>
       <p:sp>
         <p:nvSpPr>
-          <p:cNvPr id="13" name="TextBox 12"/>
+          <p:cNvPr id="14" name="TextBox 13"/>
           <p:cNvSpPr txBox="1"/>
           <p:nvPr/>
         </p:nvSpPr>
         <p:spPr>
           <a:xfrm>
-            <a:off x="384048" y="6583680"/>
-            <a:ext cx="7772400" cy="228600"/>
+            <a:off x="384048" y="6355080"/>
+            <a:ext cx="8046720" cy="256032"/>
           </a:xfrm>
           <a:prstGeom prst="rect">
             <a:avLst/>
@@ -8761,28 +8522,28 @@
           <a:lstStyle/>
           <a:p>
             <a:pPr>
-              <a:defRPr sz="800">
+              <a:defRPr sz="750" i="1">
                 <a:solidFill>
                   <a:srgbClr val="64748B"/>
                 </a:solidFill>
               </a:defRPr>
             </a:pPr>
             <a:r>
-              <a:t>Roadmap</a:t>
-            </a:r>
-          </a:p>
-        </p:txBody>
-      </p:sp>
-      <p:sp>
-        <p:nvSpPr>
-          <p:cNvPr id="14" name="TextBox 13"/>
+              <a:t>Note: 4 Jenkins jobs schedule runs — not 323 separate jobs. Barcode SYN-443 delivered in ~1 week.</a:t>
+            </a:r>
+          </a:p>
+        </p:txBody>
+      </p:sp>
+      <p:sp>
+        <p:nvSpPr>
+          <p:cNvPr id="15" name="TextBox 14"/>
           <p:cNvSpPr txBox="1"/>
           <p:nvPr/>
         </p:nvSpPr>
         <p:spPr>
           <a:xfrm>
-            <a:off x="8412480" y="6583680"/>
-            <a:ext cx="548640" cy="228600"/>
+            <a:off x="384048" y="6592824"/>
+            <a:ext cx="7772400" cy="201168"/>
           </a:xfrm>
           <a:prstGeom prst="rect">
             <a:avLst/>
@@ -8795,8 +8556,43 @@
           </a:bodyPr>
           <a:lstStyle/>
           <a:p>
+            <a:pPr>
+              <a:defRPr sz="750">
+                <a:solidFill>
+                  <a:srgbClr val="64748B"/>
+                </a:solidFill>
+              </a:defRPr>
+            </a:pPr>
+            <a:r>
+              <a:t>Perf inventory</a:t>
+            </a:r>
+          </a:p>
+        </p:txBody>
+      </p:sp>
+      <p:sp>
+        <p:nvSpPr>
+          <p:cNvPr id="16" name="TextBox 15"/>
+          <p:cNvSpPr txBox="1"/>
+          <p:nvPr/>
+        </p:nvSpPr>
+        <p:spPr>
+          <a:xfrm>
+            <a:off x="8412480" y="6592824"/>
+            <a:ext cx="548640" cy="201168"/>
+          </a:xfrm>
+          <a:prstGeom prst="rect">
+            <a:avLst/>
+          </a:prstGeom>
+          <a:noFill/>
+        </p:spPr>
+        <p:txBody>
+          <a:bodyPr wrap="none">
+            <a:spAutoFit/>
+          </a:bodyPr>
+          <a:lstStyle/>
+          <a:p>
             <a:pPr algn="r">
-              <a:defRPr sz="900">
+              <a:defRPr sz="800">
                 <a:solidFill>
                   <a:srgbClr val="64748B"/>
                 </a:solidFill>
@@ -9193,7 +8989,7 @@
               </a:defRPr>
             </a:pPr>
             <a:r>
-              <a:t>116</a:t>
+              <a:t>121</a:t>
             </a:r>
           </a:p>
         </p:txBody>
@@ -9540,7 +9336,7 @@
               </a:defRPr>
             </a:pPr>
             <a:r>
-              <a:t>V2 nightly</a:t>
+              <a:t>V2 Stage1 nightly</a:t>
             </a:r>
           </a:p>
         </p:txBody>
@@ -9610,7 +9406,7 @@
               </a:defRPr>
             </a:pPr>
             <a:r>
-              <a:t>Test methods · Stage1</a:t>
+              <a:t>Aug 4 · ~12 mo build</a:t>
             </a:r>
           </a:p>
         </p:txBody>
@@ -9731,7 +9527,7 @@
               </a:defRPr>
             </a:pPr>
             <a:r>
-              <a:t>V3 nightly</a:t>
+              <a:t>V3 Stage1 nightly</a:t>
             </a:r>
           </a:p>
         </p:txBody>
@@ -9801,7 +9597,7 @@
               </a:defRPr>
             </a:pPr>
             <a:r>
-              <a:t>Test methods · GitLab</a:t>
+              <a:t>GitLab · Aug 4</a:t>
             </a:r>
           </a:p>
         </p:txBody>
@@ -10578,8 +10374,8 @@
         </p:nvSpPr>
         <p:spPr>
           <a:xfrm>
-            <a:off x="320040" y="3657600"/>
-            <a:ext cx="8503920" cy="457200"/>
+            <a:off x="320040" y="3611880"/>
+            <a:ext cx="8503920" cy="502920"/>
           </a:xfrm>
           <a:prstGeom prst="rect">
             <a:avLst/>
@@ -10593,14 +10389,14 @@
           <a:lstStyle/>
           <a:p>
             <a:pPr>
-              <a:defRPr sz="900" i="1">
+              <a:defRPr sz="850" i="1">
                 <a:solidFill>
                   <a:srgbClr val="64748B"/>
                 </a:solidFill>
               </a:defRPr>
             </a:pPr>
             <a:r>
-              <a:t>Monthly delivery chart = period velocity. Scorecard = cumulative nightly inventory (~12 mo since Q2 2025).</a:t>
+              <a:t>V2/V3 = Stage1 nightly snapshots only (built since Q2 2025). Excludes smoke, Stage 2/5, integrations, +33 CSR Actions.</a:t>
             </a:r>
           </a:p>
         </p:txBody>
@@ -10613,8 +10409,8 @@
         </p:nvSpPr>
         <p:spPr>
           <a:xfrm>
-            <a:off x="320040" y="4160520"/>
-            <a:ext cx="8503920" cy="2057400"/>
+            <a:off x="320040" y="4114800"/>
+            <a:ext cx="8503920" cy="1874519"/>
           </a:xfrm>
           <a:prstGeom prst="roundRect">
             <a:avLst/>
@@ -10656,8 +10452,8 @@
         </p:nvSpPr>
         <p:spPr>
           <a:xfrm>
-            <a:off x="320040" y="4160520"/>
-            <a:ext cx="54864" cy="2057400"/>
+            <a:off x="320040" y="4114800"/>
+            <a:ext cx="54864" cy="1874519"/>
           </a:xfrm>
           <a:prstGeom prst="rect">
             <a:avLst/>
@@ -10699,7 +10495,7 @@
         </p:nvSpPr>
         <p:spPr>
           <a:xfrm>
-            <a:off x="502920" y="4270248"/>
+            <a:off x="502920" y="4224528"/>
             <a:ext cx="8229600" cy="320040"/>
           </a:xfrm>
           <a:prstGeom prst="rect">
@@ -10734,8 +10530,8 @@
         </p:nvSpPr>
         <p:spPr>
           <a:xfrm>
-            <a:off x="502920" y="4599432"/>
-            <a:ext cx="8229600" cy="1554480"/>
+            <a:off x="502920" y="4553712"/>
+            <a:ext cx="8229600" cy="1371599"/>
           </a:xfrm>
           <a:prstGeom prst="rect">
             <a:avLst/>
@@ -10759,7 +10555,7 @@
               </a:defRPr>
             </a:pPr>
             <a:r>
-              <a:t>• We are NOT claiming 1,212 + 592 + 442 test cases — different metrics (period delivery vs inventory).</a:t>
+              <a:t>• 592 V2 + 442 V3 = Stage1 nightly snapshots (Aug 4) — built since Q2 2025, not in Apr–Aug alone.</a:t>
             </a:r>
           </a:p>
           <a:p>
@@ -10774,7 +10570,7 @@
               </a:defRPr>
             </a:pPr>
             <a:r>
-              <a:t>• ~1,212 is estimated new coverage closed in Apr–Aug from 225 Jira stories.</a:t>
+              <a:t>• Excludes smoke (Stage 2/5), integration suites, and +33 CSR Actions pending wire — more coverage exists.</a:t>
             </a:r>
           </a:p>
           <a:p>
@@ -10789,7 +10585,7 @@
               </a:defRPr>
             </a:pPr>
             <a:r>
-              <a:t>• 592 V2 + 442 V3 + 323 perf = what runs in nightly regression today, built over ~1 year.</a:t>
+              <a:t>• We are NOT claiming 1,212 + 592 + 442 — period delivery vs inventory are different metrics.</a:t>
             </a:r>
           </a:p>
           <a:p>
@@ -10804,6 +10600,21 @@
               </a:defRPr>
             </a:pPr>
             <a:r>
+              <a:t>• ~1,212 estimated new coverage in Apr–Aug from 225 Jira stories; nightly totals include pre-April foundation.</a:t>
+            </a:r>
+          </a:p>
+          <a:p>
+            <a:pPr>
+              <a:spcAft>
+                <a:spcPts val="500"/>
+              </a:spcAft>
+              <a:defRPr sz="1000">
+                <a:solidFill>
+                  <a:srgbClr val="1A2332"/>
+                </a:solidFill>
+              </a:defRPr>
+            </a:pPr>
+            <a:r>
               <a:t>• Apr–Aug shows acceleration (MSC API sprint Jun–Jul), not greenfield from zero.</a:t>
             </a:r>
           </a:p>
@@ -10817,8 +10628,8 @@
         </p:nvSpPr>
         <p:spPr>
           <a:xfrm>
-            <a:off x="0" y="6510528"/>
-            <a:ext cx="9144000" cy="347472"/>
+            <a:off x="0" y="6291072"/>
+            <a:ext cx="9144000" cy="566928"/>
           </a:xfrm>
           <a:prstGeom prst="rect">
             <a:avLst/>
@@ -10860,7 +10671,7 @@
         </p:nvSpPr>
         <p:spPr>
           <a:xfrm>
-            <a:off x="0" y="6510528"/>
+            <a:off x="0" y="6291072"/>
             <a:ext cx="9144000" cy="18288"/>
           </a:xfrm>
           <a:prstGeom prst="rect">
@@ -10903,8 +10714,8 @@
         </p:nvSpPr>
         <p:spPr>
           <a:xfrm>
-            <a:off x="384048" y="6583680"/>
-            <a:ext cx="7772400" cy="228600"/>
+            <a:off x="384048" y="6355080"/>
+            <a:ext cx="8046720" cy="256032"/>
           </a:xfrm>
           <a:prstGeom prst="rect">
             <a:avLst/>
@@ -10918,14 +10729,14 @@
           <a:lstStyle/>
           <a:p>
             <a:pPr>
-              <a:defRPr sz="800">
+              <a:defRPr sz="750" i="1">
                 <a:solidFill>
                   <a:srgbClr val="64748B"/>
                 </a:solidFill>
               </a:defRPr>
             </a:pPr>
             <a:r>
-              <a:t>Sources: GitLab MR export · Jira AMSQUAD · Jenkins/GitLab nightly logs</a:t>
+              <a:t>Note: 592 V2 and 442 V3 are Stage1 nightly snapshots only — accumulated since Q2 2025, not built in Apr–Aug alone. Smoke (Stage 2/5), integrations, and +33 CSR Actions are additional coverage and are not added to these totals.</a:t>
             </a:r>
           </a:p>
         </p:txBody>
@@ -10938,8 +10749,8 @@
         </p:nvSpPr>
         <p:spPr>
           <a:xfrm>
-            <a:off x="8412480" y="6583680"/>
-            <a:ext cx="548640" cy="228600"/>
+            <a:off x="384048" y="6592824"/>
+            <a:ext cx="7772400" cy="201168"/>
           </a:xfrm>
           <a:prstGeom prst="rect">
             <a:avLst/>
@@ -10952,8 +10763,43 @@
           </a:bodyPr>
           <a:lstStyle/>
           <a:p>
+            <a:pPr>
+              <a:defRPr sz="750">
+                <a:solidFill>
+                  <a:srgbClr val="64748B"/>
+                </a:solidFill>
+              </a:defRPr>
+            </a:pPr>
+            <a:r>
+              <a:t>Sources: GitLab MR export · Jira AMSQUAD · Jenkins/GitLab nightly logs</a:t>
+            </a:r>
+          </a:p>
+        </p:txBody>
+      </p:sp>
+      <p:sp>
+        <p:nvSpPr>
+          <p:cNvPr id="56" name="TextBox 55"/>
+          <p:cNvSpPr txBox="1"/>
+          <p:nvPr/>
+        </p:nvSpPr>
+        <p:spPr>
+          <a:xfrm>
+            <a:off x="8412480" y="6592824"/>
+            <a:ext cx="548640" cy="201168"/>
+          </a:xfrm>
+          <a:prstGeom prst="rect">
+            <a:avLst/>
+          </a:prstGeom>
+          <a:noFill/>
+        </p:spPr>
+        <p:txBody>
+          <a:bodyPr wrap="none">
+            <a:spAutoFit/>
+          </a:bodyPr>
+          <a:lstStyle/>
+          <a:p>
             <a:pPr algn="r">
-              <a:defRPr sz="900">
+              <a:defRPr sz="800">
                 <a:solidFill>
                   <a:srgbClr val="64748B"/>
                 </a:solidFill>
@@ -11142,7 +10988,7 @@
               </a:defRPr>
             </a:pPr>
             <a:r>
-              <a:t>Leadership Asks</a:t>
+              <a:t>Performance Value</a:t>
             </a:r>
           </a:p>
         </p:txBody>
@@ -11194,7 +11040,7 @@
               </a:defRPr>
             </a:pPr>
             <a:r>
-              <a:t>Asks</a:t>
+              <a:t>Perf</a:t>
             </a:r>
           </a:p>
         </p:txBody>
@@ -11208,7 +11054,7 @@
         <p:spPr>
           <a:xfrm>
             <a:off x="320040" y="868680"/>
-            <a:ext cx="8503920" cy="5029200"/>
+            <a:ext cx="8503920" cy="4892040"/>
           </a:xfrm>
           <a:prstGeom prst="roundRect">
             <a:avLst/>
@@ -11251,7 +11097,7 @@
         <p:spPr>
           <a:xfrm>
             <a:off x="320040" y="868680"/>
-            <a:ext cx="54864" cy="5029200"/>
+            <a:ext cx="54864" cy="4892040"/>
           </a:xfrm>
           <a:prstGeom prst="rect">
             <a:avLst/>
@@ -11329,7 +11175,7 @@
         <p:spPr>
           <a:xfrm>
             <a:off x="502920" y="1307592"/>
-            <a:ext cx="8229600" cy="4526280"/>
+            <a:ext cx="8229600" cy="4389120"/>
           </a:xfrm>
           <a:prstGeom prst="rect">
             <a:avLst/>
@@ -11353,7 +11199,7 @@
               </a:defRPr>
             </a:pPr>
             <a:r>
-              <a:t>• Roadmap visibility at SDLC start</a:t>
+              <a:t>• Repeatable baselines — no manual re-run each release</a:t>
             </a:r>
           </a:p>
           <a:p>
@@ -11368,7 +11214,7 @@
               </a:defRPr>
             </a:pPr>
             <a:r>
-              <a:t>• Admin capacity for architecture lead</a:t>
+              <a:t>• Evidence for platform team pre/post patch comparison</a:t>
             </a:r>
           </a:p>
           <a:p>
@@ -11383,7 +11229,7 @@
               </a:defRPr>
             </a:pPr>
             <a:r>
-              <a:t>• 30-min live walkthrough recommended</a:t>
+              <a:t>• Department perf DoD and BlazeMeter reporting standard</a:t>
             </a:r>
           </a:p>
         </p:txBody>
@@ -11482,8 +11328,8 @@
         </p:nvSpPr>
         <p:spPr>
           <a:xfrm>
-            <a:off x="384048" y="6583680"/>
-            <a:ext cx="7772400" cy="228600"/>
+            <a:off x="384048" y="6574536"/>
+            <a:ext cx="7772400" cy="201168"/>
           </a:xfrm>
           <a:prstGeom prst="rect">
             <a:avLst/>
@@ -11497,14 +11343,14 @@
           <a:lstStyle/>
           <a:p>
             <a:pPr>
-              <a:defRPr sz="800">
+              <a:defRPr sz="750">
                 <a:solidFill>
                   <a:srgbClr val="64748B"/>
                 </a:solidFill>
               </a:defRPr>
             </a:pPr>
             <a:r>
-              <a:t>Asks</a:t>
+              <a:t>Perf value</a:t>
             </a:r>
           </a:p>
         </p:txBody>
@@ -11517,8 +11363,8 @@
         </p:nvSpPr>
         <p:spPr>
           <a:xfrm>
-            <a:off x="8412480" y="6583680"/>
-            <a:ext cx="548640" cy="228600"/>
+            <a:off x="8412480" y="6574536"/>
+            <a:ext cx="548640" cy="201168"/>
           </a:xfrm>
           <a:prstGeom prst="rect">
             <a:avLst/>
@@ -11532,7 +11378,7 @@
           <a:lstStyle/>
           <a:p>
             <a:pPr algn="r">
-              <a:defRPr sz="900">
+              <a:defRPr sz="800">
                 <a:solidFill>
                   <a:srgbClr val="64748B"/>
                 </a:solidFill>
@@ -11577,6 +11423,3114 @@
             <a:avLst/>
           </a:prstGeom>
           <a:solidFill>
+            <a:srgbClr val="F0F4F8"/>
+          </a:solidFill>
+          <a:ln>
+            <a:noFill/>
+          </a:ln>
+        </p:spPr>
+        <p:style>
+          <a:lnRef idx="1">
+            <a:schemeClr val="accent1"/>
+          </a:lnRef>
+          <a:fillRef idx="3">
+            <a:schemeClr val="accent1"/>
+          </a:fillRef>
+          <a:effectRef idx="2">
+            <a:schemeClr val="accent1"/>
+          </a:effectRef>
+          <a:fontRef idx="minor">
+            <a:schemeClr val="lt1"/>
+          </a:fontRef>
+        </p:style>
+        <p:txBody>
+          <a:bodyPr rtlCol="0" anchor="ctr"/>
+          <a:lstStyle/>
+          <a:p>
+            <a:pPr algn="ctr"/>
+          </a:p>
+        </p:txBody>
+      </p:sp>
+      <p:sp>
+        <p:nvSpPr>
+          <p:cNvPr id="3" name="Rectangle 2"/>
+          <p:cNvSpPr/>
+          <p:nvPr/>
+        </p:nvSpPr>
+        <p:spPr>
+          <a:xfrm>
+            <a:off x="0" y="0"/>
+            <a:ext cx="9144000" cy="658368"/>
+          </a:xfrm>
+          <a:prstGeom prst="rect">
+            <a:avLst/>
+          </a:prstGeom>
+          <a:solidFill>
+            <a:srgbClr val="0A1628"/>
+          </a:solidFill>
+          <a:ln>
+            <a:noFill/>
+          </a:ln>
+        </p:spPr>
+        <p:style>
+          <a:lnRef idx="1">
+            <a:schemeClr val="accent1"/>
+          </a:lnRef>
+          <a:fillRef idx="3">
+            <a:schemeClr val="accent1"/>
+          </a:fillRef>
+          <a:effectRef idx="2">
+            <a:schemeClr val="accent1"/>
+          </a:effectRef>
+          <a:fontRef idx="minor">
+            <a:schemeClr val="lt1"/>
+          </a:fontRef>
+        </p:style>
+        <p:txBody>
+          <a:bodyPr rtlCol="0" anchor="ctr"/>
+          <a:lstStyle/>
+          <a:p>
+            <a:pPr algn="ctr"/>
+          </a:p>
+        </p:txBody>
+      </p:sp>
+      <p:sp>
+        <p:nvSpPr>
+          <p:cNvPr id="4" name="Rectangle 3"/>
+          <p:cNvSpPr/>
+          <p:nvPr/>
+        </p:nvSpPr>
+        <p:spPr>
+          <a:xfrm>
+            <a:off x="0" y="658368"/>
+            <a:ext cx="9144000" cy="36576"/>
+          </a:xfrm>
+          <a:prstGeom prst="rect">
+            <a:avLst/>
+          </a:prstGeom>
+          <a:solidFill>
+            <a:srgbClr val="00A3E0"/>
+          </a:solidFill>
+          <a:ln>
+            <a:noFill/>
+          </a:ln>
+        </p:spPr>
+        <p:style>
+          <a:lnRef idx="1">
+            <a:schemeClr val="accent1"/>
+          </a:lnRef>
+          <a:fillRef idx="3">
+            <a:schemeClr val="accent1"/>
+          </a:fillRef>
+          <a:effectRef idx="2">
+            <a:schemeClr val="accent1"/>
+          </a:effectRef>
+          <a:fontRef idx="minor">
+            <a:schemeClr val="lt1"/>
+          </a:fontRef>
+        </p:style>
+        <p:txBody>
+          <a:bodyPr rtlCol="0" anchor="ctr"/>
+          <a:lstStyle/>
+          <a:p>
+            <a:pPr algn="ctr"/>
+          </a:p>
+        </p:txBody>
+      </p:sp>
+      <p:sp>
+        <p:nvSpPr>
+          <p:cNvPr id="5" name="TextBox 4"/>
+          <p:cNvSpPr txBox="1"/>
+          <p:nvPr/>
+        </p:nvSpPr>
+        <p:spPr>
+          <a:xfrm>
+            <a:off x="384048" y="128016"/>
+            <a:ext cx="6858000" cy="457200"/>
+          </a:xfrm>
+          <a:prstGeom prst="rect">
+            <a:avLst/>
+          </a:prstGeom>
+          <a:noFill/>
+        </p:spPr>
+        <p:txBody>
+          <a:bodyPr wrap="none">
+            <a:spAutoFit/>
+          </a:bodyPr>
+          <a:lstStyle/>
+          <a:p>
+            <a:pPr>
+              <a:defRPr sz="2000" b="1">
+                <a:solidFill>
+                  <a:srgbClr val="FFFFFF"/>
+                </a:solidFill>
+              </a:defRPr>
+            </a:pPr>
+            <a:r>
+              <a:t>Investment Allocation</a:t>
+            </a:r>
+          </a:p>
+        </p:txBody>
+      </p:sp>
+      <p:sp>
+        <p:nvSpPr>
+          <p:cNvPr id="6" name="Rounded Rectangle 5"/>
+          <p:cNvSpPr/>
+          <p:nvPr/>
+        </p:nvSpPr>
+        <p:spPr>
+          <a:xfrm>
+            <a:off x="7452360" y="164592"/>
+            <a:ext cx="1417320" cy="347472"/>
+          </a:xfrm>
+          <a:prstGeom prst="roundRect">
+            <a:avLst/>
+          </a:prstGeom>
+          <a:solidFill>
+            <a:srgbClr val="00A3E0"/>
+          </a:solidFill>
+          <a:ln>
+            <a:noFill/>
+          </a:ln>
+        </p:spPr>
+        <p:style>
+          <a:lnRef idx="1">
+            <a:schemeClr val="accent1"/>
+          </a:lnRef>
+          <a:fillRef idx="3">
+            <a:schemeClr val="accent1"/>
+          </a:fillRef>
+          <a:effectRef idx="2">
+            <a:schemeClr val="accent1"/>
+          </a:effectRef>
+          <a:fontRef idx="minor">
+            <a:schemeClr val="lt1"/>
+          </a:fontRef>
+        </p:style>
+        <p:txBody>
+          <a:bodyPr rtlCol="0" anchor="ctr"/>
+          <a:lstStyle/>
+          <a:p>
+            <a:pPr algn="ctr">
+              <a:defRPr sz="900" b="1">
+                <a:solidFill>
+                  <a:srgbClr val="FFFFFF"/>
+                </a:solidFill>
+              </a:defRPr>
+            </a:pPr>
+            <a:r>
+              <a:t>Portfolio</a:t>
+            </a:r>
+          </a:p>
+        </p:txBody>
+      </p:sp>
+      <p:pic>
+        <p:nvPicPr>
+          <p:cNvPr id="7" name="Picture 6" descr="06-work-allocation-index.png"/>
+          <p:cNvPicPr>
+            <a:picLocks noChangeAspect="1"/>
+          </p:cNvPicPr>
+          <p:nvPr/>
+        </p:nvPicPr>
+        <p:blipFill>
+          <a:blip r:embed="rId2"/>
+          <a:stretch>
+            <a:fillRect/>
+          </a:stretch>
+        </p:blipFill>
+        <p:spPr>
+          <a:xfrm>
+            <a:off x="320040" y="868680"/>
+            <a:ext cx="4892040" cy="3054366"/>
+          </a:xfrm>
+          <a:prstGeom prst="rect">
+            <a:avLst/>
+          </a:prstGeom>
+        </p:spPr>
+      </p:pic>
+      <p:sp>
+        <p:nvSpPr>
+          <p:cNvPr id="8" name="Rounded Rectangle 7"/>
+          <p:cNvSpPr/>
+          <p:nvPr/>
+        </p:nvSpPr>
+        <p:spPr>
+          <a:xfrm>
+            <a:off x="5349240" y="868680"/>
+            <a:ext cx="3474720" cy="5074920"/>
+          </a:xfrm>
+          <a:prstGeom prst="roundRect">
+            <a:avLst/>
+          </a:prstGeom>
+          <a:solidFill>
+            <a:srgbClr val="E8EEF6"/>
+          </a:solidFill>
+          <a:ln>
+            <a:noFill/>
+          </a:ln>
+        </p:spPr>
+        <p:style>
+          <a:lnRef idx="1">
+            <a:schemeClr val="accent1"/>
+          </a:lnRef>
+          <a:fillRef idx="3">
+            <a:schemeClr val="accent1"/>
+          </a:fillRef>
+          <a:effectRef idx="2">
+            <a:schemeClr val="accent1"/>
+          </a:effectRef>
+          <a:fontRef idx="minor">
+            <a:schemeClr val="lt1"/>
+          </a:fontRef>
+        </p:style>
+        <p:txBody>
+          <a:bodyPr rtlCol="0" anchor="ctr"/>
+          <a:lstStyle/>
+          <a:p>
+            <a:pPr algn="ctr"/>
+          </a:p>
+        </p:txBody>
+      </p:sp>
+      <p:sp>
+        <p:nvSpPr>
+          <p:cNvPr id="9" name="Rectangle 8"/>
+          <p:cNvSpPr/>
+          <p:nvPr/>
+        </p:nvSpPr>
+        <p:spPr>
+          <a:xfrm>
+            <a:off x="5349240" y="868680"/>
+            <a:ext cx="54864" cy="5074920"/>
+          </a:xfrm>
+          <a:prstGeom prst="rect">
+            <a:avLst/>
+          </a:prstGeom>
+          <a:solidFill>
+            <a:srgbClr val="00B388"/>
+          </a:solidFill>
+          <a:ln>
+            <a:noFill/>
+          </a:ln>
+        </p:spPr>
+        <p:style>
+          <a:lnRef idx="1">
+            <a:schemeClr val="accent1"/>
+          </a:lnRef>
+          <a:fillRef idx="3">
+            <a:schemeClr val="accent1"/>
+          </a:fillRef>
+          <a:effectRef idx="2">
+            <a:schemeClr val="accent1"/>
+          </a:effectRef>
+          <a:fontRef idx="minor">
+            <a:schemeClr val="lt1"/>
+          </a:fontRef>
+        </p:style>
+        <p:txBody>
+          <a:bodyPr rtlCol="0" anchor="ctr"/>
+          <a:lstStyle/>
+          <a:p>
+            <a:pPr algn="ctr"/>
+          </a:p>
+        </p:txBody>
+      </p:sp>
+      <p:sp>
+        <p:nvSpPr>
+          <p:cNvPr id="10" name="TextBox 9"/>
+          <p:cNvSpPr txBox="1"/>
+          <p:nvPr/>
+        </p:nvSpPr>
+        <p:spPr>
+          <a:xfrm>
+            <a:off x="5532120" y="978408"/>
+            <a:ext cx="3200400" cy="320040"/>
+          </a:xfrm>
+          <a:prstGeom prst="rect">
+            <a:avLst/>
+          </a:prstGeom>
+          <a:noFill/>
+        </p:spPr>
+        <p:txBody>
+          <a:bodyPr wrap="none">
+            <a:spAutoFit/>
+          </a:bodyPr>
+          <a:lstStyle/>
+          <a:p>
+            <a:pPr>
+              <a:defRPr sz="1100" b="1">
+                <a:solidFill>
+                  <a:srgbClr val="003241"/>
+                </a:solidFill>
+              </a:defRPr>
+            </a:pPr>
+            <a:r>
+              <a:t>Effort mix</a:t>
+            </a:r>
+          </a:p>
+        </p:txBody>
+      </p:sp>
+      <p:sp>
+        <p:nvSpPr>
+          <p:cNvPr id="11" name="TextBox 10"/>
+          <p:cNvSpPr txBox="1"/>
+          <p:nvPr/>
+        </p:nvSpPr>
+        <p:spPr>
+          <a:xfrm>
+            <a:off x="5532120" y="1307592"/>
+            <a:ext cx="3200400" cy="4572000"/>
+          </a:xfrm>
+          <a:prstGeom prst="rect">
+            <a:avLst/>
+          </a:prstGeom>
+          <a:noFill/>
+        </p:spPr>
+        <p:txBody>
+          <a:bodyPr wrap="square">
+            <a:spAutoFit/>
+          </a:bodyPr>
+          <a:lstStyle/>
+          <a:p>
+            <a:pPr>
+              <a:spcAft>
+                <a:spcPts val="500"/>
+              </a:spcAft>
+              <a:defRPr sz="1000">
+                <a:solidFill>
+                  <a:srgbClr val="1A2332"/>
+                </a:solidFill>
+              </a:defRPr>
+            </a:pPr>
+            <a:r>
+              <a:t>• MSC API 35%</a:t>
+            </a:r>
+          </a:p>
+          <a:p>
+            <a:pPr>
+              <a:spcAft>
+                <a:spcPts val="500"/>
+              </a:spcAft>
+              <a:defRPr sz="1000">
+                <a:solidFill>
+                  <a:srgbClr val="1A2332"/>
+                </a:solidFill>
+              </a:defRPr>
+            </a:pPr>
+            <a:r>
+              <a:t>• V2 UI 20%</a:t>
+            </a:r>
+          </a:p>
+          <a:p>
+            <a:pPr>
+              <a:spcAft>
+                <a:spcPts val="500"/>
+              </a:spcAft>
+              <a:defRPr sz="1000">
+                <a:solidFill>
+                  <a:srgbClr val="1A2332"/>
+                </a:solidFill>
+              </a:defRPr>
+            </a:pPr>
+            <a:r>
+              <a:t>• V3 UP 15%</a:t>
+            </a:r>
+          </a:p>
+          <a:p>
+            <a:pPr>
+              <a:spcAft>
+                <a:spcPts val="500"/>
+              </a:spcAft>
+              <a:defRPr sz="1000">
+                <a:solidFill>
+                  <a:srgbClr val="1A2332"/>
+                </a:solidFill>
+              </a:defRPr>
+            </a:pPr>
+            <a:r>
+              <a:t>• Perf 12%</a:t>
+            </a:r>
+          </a:p>
+          <a:p>
+            <a:pPr>
+              <a:spcAft>
+                <a:spcPts val="500"/>
+              </a:spcAft>
+              <a:defRPr sz="1000">
+                <a:solidFill>
+                  <a:srgbClr val="1A2332"/>
+                </a:solidFill>
+              </a:defRPr>
+            </a:pPr>
+            <a:r>
+              <a:t>• Pipeline/Standards remainder</a:t>
+            </a:r>
+          </a:p>
+        </p:txBody>
+      </p:sp>
+      <p:sp>
+        <p:nvSpPr>
+          <p:cNvPr id="12" name="Rectangle 11"/>
+          <p:cNvSpPr/>
+          <p:nvPr/>
+        </p:nvSpPr>
+        <p:spPr>
+          <a:xfrm>
+            <a:off x="0" y="6291072"/>
+            <a:ext cx="9144000" cy="566928"/>
+          </a:xfrm>
+          <a:prstGeom prst="rect">
+            <a:avLst/>
+          </a:prstGeom>
+          <a:solidFill>
+            <a:srgbClr val="FFFFFF"/>
+          </a:solidFill>
+          <a:ln>
+            <a:noFill/>
+          </a:ln>
+        </p:spPr>
+        <p:style>
+          <a:lnRef idx="1">
+            <a:schemeClr val="accent1"/>
+          </a:lnRef>
+          <a:fillRef idx="3">
+            <a:schemeClr val="accent1"/>
+          </a:fillRef>
+          <a:effectRef idx="2">
+            <a:schemeClr val="accent1"/>
+          </a:effectRef>
+          <a:fontRef idx="minor">
+            <a:schemeClr val="lt1"/>
+          </a:fontRef>
+        </p:style>
+        <p:txBody>
+          <a:bodyPr rtlCol="0" anchor="ctr"/>
+          <a:lstStyle/>
+          <a:p>
+            <a:pPr algn="ctr"/>
+          </a:p>
+        </p:txBody>
+      </p:sp>
+      <p:sp>
+        <p:nvSpPr>
+          <p:cNvPr id="13" name="Rectangle 12"/>
+          <p:cNvSpPr/>
+          <p:nvPr/>
+        </p:nvSpPr>
+        <p:spPr>
+          <a:xfrm>
+            <a:off x="0" y="6291072"/>
+            <a:ext cx="9144000" cy="18288"/>
+          </a:xfrm>
+          <a:prstGeom prst="rect">
+            <a:avLst/>
+          </a:prstGeom>
+          <a:solidFill>
+            <a:srgbClr val="E8EEF6"/>
+          </a:solidFill>
+          <a:ln>
+            <a:noFill/>
+          </a:ln>
+        </p:spPr>
+        <p:style>
+          <a:lnRef idx="1">
+            <a:schemeClr val="accent1"/>
+          </a:lnRef>
+          <a:fillRef idx="3">
+            <a:schemeClr val="accent1"/>
+          </a:fillRef>
+          <a:effectRef idx="2">
+            <a:schemeClr val="accent1"/>
+          </a:effectRef>
+          <a:fontRef idx="minor">
+            <a:schemeClr val="lt1"/>
+          </a:fontRef>
+        </p:style>
+        <p:txBody>
+          <a:bodyPr rtlCol="0" anchor="ctr"/>
+          <a:lstStyle/>
+          <a:p>
+            <a:pPr algn="ctr"/>
+          </a:p>
+        </p:txBody>
+      </p:sp>
+      <p:sp>
+        <p:nvSpPr>
+          <p:cNvPr id="14" name="TextBox 13"/>
+          <p:cNvSpPr txBox="1"/>
+          <p:nvPr/>
+        </p:nvSpPr>
+        <p:spPr>
+          <a:xfrm>
+            <a:off x="384048" y="6355080"/>
+            <a:ext cx="8046720" cy="256032"/>
+          </a:xfrm>
+          <a:prstGeom prst="rect">
+            <a:avLst/>
+          </a:prstGeom>
+          <a:noFill/>
+        </p:spPr>
+        <p:txBody>
+          <a:bodyPr wrap="none">
+            <a:spAutoFit/>
+          </a:bodyPr>
+          <a:lstStyle/>
+          <a:p>
+            <a:pPr>
+              <a:defRPr sz="750" i="1">
+                <a:solidFill>
+                  <a:srgbClr val="64748B"/>
+                </a:solidFill>
+              </a:defRPr>
+            </a:pPr>
+            <a:r>
+              <a:t>Note: Relative effort index — not headcount FTE. MSC sprint drove Jun–Jul concentration.</a:t>
+            </a:r>
+          </a:p>
+        </p:txBody>
+      </p:sp>
+      <p:sp>
+        <p:nvSpPr>
+          <p:cNvPr id="15" name="TextBox 14"/>
+          <p:cNvSpPr txBox="1"/>
+          <p:nvPr/>
+        </p:nvSpPr>
+        <p:spPr>
+          <a:xfrm>
+            <a:off x="384048" y="6592824"/>
+            <a:ext cx="7772400" cy="201168"/>
+          </a:xfrm>
+          <a:prstGeom prst="rect">
+            <a:avLst/>
+          </a:prstGeom>
+          <a:noFill/>
+        </p:spPr>
+        <p:txBody>
+          <a:bodyPr wrap="none">
+            <a:spAutoFit/>
+          </a:bodyPr>
+          <a:lstStyle/>
+          <a:p>
+            <a:pPr>
+              <a:defRPr sz="750">
+                <a:solidFill>
+                  <a:srgbClr val="64748B"/>
+                </a:solidFill>
+              </a:defRPr>
+            </a:pPr>
+            <a:r>
+              <a:t>Squad estimate Apr–Jul</a:t>
+            </a:r>
+          </a:p>
+        </p:txBody>
+      </p:sp>
+      <p:sp>
+        <p:nvSpPr>
+          <p:cNvPr id="16" name="TextBox 15"/>
+          <p:cNvSpPr txBox="1"/>
+          <p:nvPr/>
+        </p:nvSpPr>
+        <p:spPr>
+          <a:xfrm>
+            <a:off x="8412480" y="6592824"/>
+            <a:ext cx="548640" cy="201168"/>
+          </a:xfrm>
+          <a:prstGeom prst="rect">
+            <a:avLst/>
+          </a:prstGeom>
+          <a:noFill/>
+        </p:spPr>
+        <p:txBody>
+          <a:bodyPr wrap="none">
+            <a:spAutoFit/>
+          </a:bodyPr>
+          <a:lstStyle/>
+          <a:p>
+            <a:pPr algn="r">
+              <a:defRPr sz="800">
+                <a:solidFill>
+                  <a:srgbClr val="64748B"/>
+                </a:solidFill>
+              </a:defRPr>
+            </a:pPr>
+            <a:r>
+              <a:t>17</a:t>
+            </a:r>
+          </a:p>
+        </p:txBody>
+      </p:sp>
+    </p:spTree>
+  </p:cSld>
+  <p:clrMapOvr>
+    <a:masterClrMapping/>
+  </p:clrMapOvr>
+</p:sld>
+</file>
+
+<file path=ppt/slides/slide22.xml><?xml version="1.0" encoding="utf-8"?>
+<p:sld xmlns:a="http://schemas.openxmlformats.org/drawingml/2006/main" xmlns:p="http://schemas.openxmlformats.org/presentationml/2006/main" xmlns:r="http://schemas.openxmlformats.org/officeDocument/2006/relationships">
+  <p:cSld>
+    <p:spTree>
+      <p:nvGrpSpPr>
+        <p:cNvPr id="1" name=""/>
+        <p:cNvGrpSpPr/>
+        <p:nvPr/>
+      </p:nvGrpSpPr>
+      <p:grpSpPr/>
+      <p:sp>
+        <p:nvSpPr>
+          <p:cNvPr id="2" name="Rectangle 1"/>
+          <p:cNvSpPr/>
+          <p:nvPr/>
+        </p:nvSpPr>
+        <p:spPr>
+          <a:xfrm>
+            <a:off x="0" y="0"/>
+            <a:ext cx="9144000" cy="6858000"/>
+          </a:xfrm>
+          <a:prstGeom prst="rect">
+            <a:avLst/>
+          </a:prstGeom>
+          <a:solidFill>
+            <a:srgbClr val="F0F4F8"/>
+          </a:solidFill>
+          <a:ln>
+            <a:noFill/>
+          </a:ln>
+        </p:spPr>
+        <p:style>
+          <a:lnRef idx="1">
+            <a:schemeClr val="accent1"/>
+          </a:lnRef>
+          <a:fillRef idx="3">
+            <a:schemeClr val="accent1"/>
+          </a:fillRef>
+          <a:effectRef idx="2">
+            <a:schemeClr val="accent1"/>
+          </a:effectRef>
+          <a:fontRef idx="minor">
+            <a:schemeClr val="lt1"/>
+          </a:fontRef>
+        </p:style>
+        <p:txBody>
+          <a:bodyPr rtlCol="0" anchor="ctr"/>
+          <a:lstStyle/>
+          <a:p>
+            <a:pPr algn="ctr"/>
+          </a:p>
+        </p:txBody>
+      </p:sp>
+      <p:sp>
+        <p:nvSpPr>
+          <p:cNvPr id="3" name="Rectangle 2"/>
+          <p:cNvSpPr/>
+          <p:nvPr/>
+        </p:nvSpPr>
+        <p:spPr>
+          <a:xfrm>
+            <a:off x="0" y="0"/>
+            <a:ext cx="9144000" cy="658368"/>
+          </a:xfrm>
+          <a:prstGeom prst="rect">
+            <a:avLst/>
+          </a:prstGeom>
+          <a:solidFill>
+            <a:srgbClr val="0A1628"/>
+          </a:solidFill>
+          <a:ln>
+            <a:noFill/>
+          </a:ln>
+        </p:spPr>
+        <p:style>
+          <a:lnRef idx="1">
+            <a:schemeClr val="accent1"/>
+          </a:lnRef>
+          <a:fillRef idx="3">
+            <a:schemeClr val="accent1"/>
+          </a:fillRef>
+          <a:effectRef idx="2">
+            <a:schemeClr val="accent1"/>
+          </a:effectRef>
+          <a:fontRef idx="minor">
+            <a:schemeClr val="lt1"/>
+          </a:fontRef>
+        </p:style>
+        <p:txBody>
+          <a:bodyPr rtlCol="0" anchor="ctr"/>
+          <a:lstStyle/>
+          <a:p>
+            <a:pPr algn="ctr"/>
+          </a:p>
+        </p:txBody>
+      </p:sp>
+      <p:sp>
+        <p:nvSpPr>
+          <p:cNvPr id="4" name="Rectangle 3"/>
+          <p:cNvSpPr/>
+          <p:nvPr/>
+        </p:nvSpPr>
+        <p:spPr>
+          <a:xfrm>
+            <a:off x="0" y="658368"/>
+            <a:ext cx="9144000" cy="36576"/>
+          </a:xfrm>
+          <a:prstGeom prst="rect">
+            <a:avLst/>
+          </a:prstGeom>
+          <a:solidFill>
+            <a:srgbClr val="00A3E0"/>
+          </a:solidFill>
+          <a:ln>
+            <a:noFill/>
+          </a:ln>
+        </p:spPr>
+        <p:style>
+          <a:lnRef idx="1">
+            <a:schemeClr val="accent1"/>
+          </a:lnRef>
+          <a:fillRef idx="3">
+            <a:schemeClr val="accent1"/>
+          </a:fillRef>
+          <a:effectRef idx="2">
+            <a:schemeClr val="accent1"/>
+          </a:effectRef>
+          <a:fontRef idx="minor">
+            <a:schemeClr val="lt1"/>
+          </a:fontRef>
+        </p:style>
+        <p:txBody>
+          <a:bodyPr rtlCol="0" anchor="ctr"/>
+          <a:lstStyle/>
+          <a:p>
+            <a:pPr algn="ctr"/>
+          </a:p>
+        </p:txBody>
+      </p:sp>
+      <p:sp>
+        <p:nvSpPr>
+          <p:cNvPr id="5" name="TextBox 4"/>
+          <p:cNvSpPr txBox="1"/>
+          <p:nvPr/>
+        </p:nvSpPr>
+        <p:spPr>
+          <a:xfrm>
+            <a:off x="384048" y="128016"/>
+            <a:ext cx="6858000" cy="457200"/>
+          </a:xfrm>
+          <a:prstGeom prst="rect">
+            <a:avLst/>
+          </a:prstGeom>
+          <a:noFill/>
+        </p:spPr>
+        <p:txBody>
+          <a:bodyPr wrap="none">
+            <a:spAutoFit/>
+          </a:bodyPr>
+          <a:lstStyle/>
+          <a:p>
+            <a:pPr>
+              <a:defRPr sz="2000" b="1">
+                <a:solidFill>
+                  <a:srgbClr val="FFFFFF"/>
+                </a:solidFill>
+              </a:defRPr>
+            </a:pPr>
+            <a:r>
+              <a:t>Release Automation Impact</a:t>
+            </a:r>
+          </a:p>
+        </p:txBody>
+      </p:sp>
+      <p:sp>
+        <p:nvSpPr>
+          <p:cNvPr id="6" name="Rounded Rectangle 5"/>
+          <p:cNvSpPr/>
+          <p:nvPr/>
+        </p:nvSpPr>
+        <p:spPr>
+          <a:xfrm>
+            <a:off x="7452360" y="164592"/>
+            <a:ext cx="1417320" cy="347472"/>
+          </a:xfrm>
+          <a:prstGeom prst="roundRect">
+            <a:avLst/>
+          </a:prstGeom>
+          <a:solidFill>
+            <a:srgbClr val="00A3E0"/>
+          </a:solidFill>
+          <a:ln>
+            <a:noFill/>
+          </a:ln>
+        </p:spPr>
+        <p:style>
+          <a:lnRef idx="1">
+            <a:schemeClr val="accent1"/>
+          </a:lnRef>
+          <a:fillRef idx="3">
+            <a:schemeClr val="accent1"/>
+          </a:fillRef>
+          <a:effectRef idx="2">
+            <a:schemeClr val="accent1"/>
+          </a:effectRef>
+          <a:fontRef idx="minor">
+            <a:schemeClr val="lt1"/>
+          </a:fontRef>
+        </p:style>
+        <p:txBody>
+          <a:bodyPr rtlCol="0" anchor="ctr"/>
+          <a:lstStyle/>
+          <a:p>
+            <a:pPr algn="ctr">
+              <a:defRPr sz="900" b="1">
+                <a:solidFill>
+                  <a:srgbClr val="FFFFFF"/>
+                </a:solidFill>
+              </a:defRPr>
+            </a:pPr>
+            <a:r>
+              <a:t>Value</a:t>
+            </a:r>
+          </a:p>
+        </p:txBody>
+      </p:sp>
+      <p:pic>
+        <p:nvPicPr>
+          <p:cNvPr id="7" name="Picture 6" descr="07-release-automation-impact.png"/>
+          <p:cNvPicPr>
+            <a:picLocks noChangeAspect="1"/>
+          </p:cNvPicPr>
+          <p:nvPr/>
+        </p:nvPicPr>
+        <p:blipFill>
+          <a:blip r:embed="rId2"/>
+          <a:stretch>
+            <a:fillRect/>
+          </a:stretch>
+        </p:blipFill>
+        <p:spPr>
+          <a:xfrm>
+            <a:off x="320040" y="868680"/>
+            <a:ext cx="4892040" cy="5415468"/>
+          </a:xfrm>
+          <a:prstGeom prst="rect">
+            <a:avLst/>
+          </a:prstGeom>
+        </p:spPr>
+      </p:pic>
+      <p:sp>
+        <p:nvSpPr>
+          <p:cNvPr id="8" name="Rounded Rectangle 7"/>
+          <p:cNvSpPr/>
+          <p:nvPr/>
+        </p:nvSpPr>
+        <p:spPr>
+          <a:xfrm>
+            <a:off x="5349240" y="868680"/>
+            <a:ext cx="3474720" cy="5074920"/>
+          </a:xfrm>
+          <a:prstGeom prst="roundRect">
+            <a:avLst/>
+          </a:prstGeom>
+          <a:solidFill>
+            <a:srgbClr val="E8EEF6"/>
+          </a:solidFill>
+          <a:ln>
+            <a:noFill/>
+          </a:ln>
+        </p:spPr>
+        <p:style>
+          <a:lnRef idx="1">
+            <a:schemeClr val="accent1"/>
+          </a:lnRef>
+          <a:fillRef idx="3">
+            <a:schemeClr val="accent1"/>
+          </a:fillRef>
+          <a:effectRef idx="2">
+            <a:schemeClr val="accent1"/>
+          </a:effectRef>
+          <a:fontRef idx="minor">
+            <a:schemeClr val="lt1"/>
+          </a:fontRef>
+        </p:style>
+        <p:txBody>
+          <a:bodyPr rtlCol="0" anchor="ctr"/>
+          <a:lstStyle/>
+          <a:p>
+            <a:pPr algn="ctr"/>
+          </a:p>
+        </p:txBody>
+      </p:sp>
+      <p:sp>
+        <p:nvSpPr>
+          <p:cNvPr id="9" name="Rectangle 8"/>
+          <p:cNvSpPr/>
+          <p:nvPr/>
+        </p:nvSpPr>
+        <p:spPr>
+          <a:xfrm>
+            <a:off x="5349240" y="868680"/>
+            <a:ext cx="54864" cy="5074920"/>
+          </a:xfrm>
+          <a:prstGeom prst="rect">
+            <a:avLst/>
+          </a:prstGeom>
+          <a:solidFill>
+            <a:srgbClr val="00B388"/>
+          </a:solidFill>
+          <a:ln>
+            <a:noFill/>
+          </a:ln>
+        </p:spPr>
+        <p:style>
+          <a:lnRef idx="1">
+            <a:schemeClr val="accent1"/>
+          </a:lnRef>
+          <a:fillRef idx="3">
+            <a:schemeClr val="accent1"/>
+          </a:fillRef>
+          <a:effectRef idx="2">
+            <a:schemeClr val="accent1"/>
+          </a:effectRef>
+          <a:fontRef idx="minor">
+            <a:schemeClr val="lt1"/>
+          </a:fontRef>
+        </p:style>
+        <p:txBody>
+          <a:bodyPr rtlCol="0" anchor="ctr"/>
+          <a:lstStyle/>
+          <a:p>
+            <a:pPr algn="ctr"/>
+          </a:p>
+        </p:txBody>
+      </p:sp>
+      <p:sp>
+        <p:nvSpPr>
+          <p:cNvPr id="10" name="TextBox 9"/>
+          <p:cNvSpPr txBox="1"/>
+          <p:nvPr/>
+        </p:nvSpPr>
+        <p:spPr>
+          <a:xfrm>
+            <a:off x="5532120" y="978408"/>
+            <a:ext cx="3200400" cy="320040"/>
+          </a:xfrm>
+          <a:prstGeom prst="rect">
+            <a:avLst/>
+          </a:prstGeom>
+          <a:noFill/>
+        </p:spPr>
+        <p:txBody>
+          <a:bodyPr wrap="none">
+            <a:spAutoFit/>
+          </a:bodyPr>
+          <a:lstStyle/>
+          <a:p>
+            <a:pPr>
+              <a:defRPr sz="1100" b="1">
+                <a:solidFill>
+                  <a:srgbClr val="003241"/>
+                </a:solidFill>
+              </a:defRPr>
+            </a:pPr>
+            <a:r>
+              <a:t>Business value</a:t>
+            </a:r>
+          </a:p>
+        </p:txBody>
+      </p:sp>
+      <p:sp>
+        <p:nvSpPr>
+          <p:cNvPr id="11" name="TextBox 10"/>
+          <p:cNvSpPr txBox="1"/>
+          <p:nvPr/>
+        </p:nvSpPr>
+        <p:spPr>
+          <a:xfrm>
+            <a:off x="5532120" y="1307592"/>
+            <a:ext cx="3200400" cy="4572000"/>
+          </a:xfrm>
+          <a:prstGeom prst="rect">
+            <a:avLst/>
+          </a:prstGeom>
+          <a:noFill/>
+        </p:spPr>
+        <p:txBody>
+          <a:bodyPr wrap="square">
+            <a:spAutoFit/>
+          </a:bodyPr>
+          <a:lstStyle/>
+          <a:p>
+            <a:pPr>
+              <a:spcAft>
+                <a:spcPts val="500"/>
+              </a:spcAft>
+              <a:defRPr sz="1000">
+                <a:solidFill>
+                  <a:srgbClr val="1A2332"/>
+                </a:solidFill>
+              </a:defRPr>
+            </a:pPr>
+            <a:r>
+              <a:t>• ~80% automated</a:t>
+            </a:r>
+          </a:p>
+          <a:p>
+            <a:pPr>
+              <a:spcAft>
+                <a:spcPts val="500"/>
+              </a:spcAft>
+              <a:defRPr sz="1000">
+                <a:solidFill>
+                  <a:srgbClr val="1A2332"/>
+                </a:solidFill>
+              </a:defRPr>
+            </a:pPr>
+            <a:r>
+              <a:t>• 17 FTE → 2 FTE equivalent</a:t>
+            </a:r>
+          </a:p>
+          <a:p>
+            <a:pPr>
+              <a:spcAft>
+                <a:spcPts val="500"/>
+              </a:spcAft>
+              <a:defRPr sz="1000">
+                <a:solidFill>
+                  <a:srgbClr val="1A2332"/>
+                </a:solidFill>
+              </a:defRPr>
+            </a:pPr>
+            <a:r>
+              <a:t>• Team focuses on triage + net-new</a:t>
+            </a:r>
+          </a:p>
+        </p:txBody>
+      </p:sp>
+      <p:sp>
+        <p:nvSpPr>
+          <p:cNvPr id="12" name="Rectangle 11"/>
+          <p:cNvSpPr/>
+          <p:nvPr/>
+        </p:nvSpPr>
+        <p:spPr>
+          <a:xfrm>
+            <a:off x="0" y="6291072"/>
+            <a:ext cx="9144000" cy="566928"/>
+          </a:xfrm>
+          <a:prstGeom prst="rect">
+            <a:avLst/>
+          </a:prstGeom>
+          <a:solidFill>
+            <a:srgbClr val="FFFFFF"/>
+          </a:solidFill>
+          <a:ln>
+            <a:noFill/>
+          </a:ln>
+        </p:spPr>
+        <p:style>
+          <a:lnRef idx="1">
+            <a:schemeClr val="accent1"/>
+          </a:lnRef>
+          <a:fillRef idx="3">
+            <a:schemeClr val="accent1"/>
+          </a:fillRef>
+          <a:effectRef idx="2">
+            <a:schemeClr val="accent1"/>
+          </a:effectRef>
+          <a:fontRef idx="minor">
+            <a:schemeClr val="lt1"/>
+          </a:fontRef>
+        </p:style>
+        <p:txBody>
+          <a:bodyPr rtlCol="0" anchor="ctr"/>
+          <a:lstStyle/>
+          <a:p>
+            <a:pPr algn="ctr"/>
+          </a:p>
+        </p:txBody>
+      </p:sp>
+      <p:sp>
+        <p:nvSpPr>
+          <p:cNvPr id="13" name="Rectangle 12"/>
+          <p:cNvSpPr/>
+          <p:nvPr/>
+        </p:nvSpPr>
+        <p:spPr>
+          <a:xfrm>
+            <a:off x="0" y="6291072"/>
+            <a:ext cx="9144000" cy="18288"/>
+          </a:xfrm>
+          <a:prstGeom prst="rect">
+            <a:avLst/>
+          </a:prstGeom>
+          <a:solidFill>
+            <a:srgbClr val="E8EEF6"/>
+          </a:solidFill>
+          <a:ln>
+            <a:noFill/>
+          </a:ln>
+        </p:spPr>
+        <p:style>
+          <a:lnRef idx="1">
+            <a:schemeClr val="accent1"/>
+          </a:lnRef>
+          <a:fillRef idx="3">
+            <a:schemeClr val="accent1"/>
+          </a:fillRef>
+          <a:effectRef idx="2">
+            <a:schemeClr val="accent1"/>
+          </a:effectRef>
+          <a:fontRef idx="minor">
+            <a:schemeClr val="lt1"/>
+          </a:fontRef>
+        </p:style>
+        <p:txBody>
+          <a:bodyPr rtlCol="0" anchor="ctr"/>
+          <a:lstStyle/>
+          <a:p>
+            <a:pPr algn="ctr"/>
+          </a:p>
+        </p:txBody>
+      </p:sp>
+      <p:sp>
+        <p:nvSpPr>
+          <p:cNvPr id="14" name="TextBox 13"/>
+          <p:cNvSpPr txBox="1"/>
+          <p:nvPr/>
+        </p:nvSpPr>
+        <p:spPr>
+          <a:xfrm>
+            <a:off x="384048" y="6355080"/>
+            <a:ext cx="8046720" cy="256032"/>
+          </a:xfrm>
+          <a:prstGeom prst="rect">
+            <a:avLst/>
+          </a:prstGeom>
+          <a:noFill/>
+        </p:spPr>
+        <p:txBody>
+          <a:bodyPr wrap="none">
+            <a:spAutoFit/>
+          </a:bodyPr>
+          <a:lstStyle/>
+          <a:p>
+            <a:pPr>
+              <a:defRPr sz="750" i="1">
+                <a:solidFill>
+                  <a:srgbClr val="64748B"/>
+                </a:solidFill>
+              </a:defRPr>
+            </a:pPr>
+            <a:r>
+              <a:t>Note: FTE equivalent = manual validation hours replaced by nightly regression, not headcount reduction.</a:t>
+            </a:r>
+          </a:p>
+        </p:txBody>
+      </p:sp>
+      <p:sp>
+        <p:nvSpPr>
+          <p:cNvPr id="15" name="TextBox 14"/>
+          <p:cNvSpPr txBox="1"/>
+          <p:nvPr/>
+        </p:nvSpPr>
+        <p:spPr>
+          <a:xfrm>
+            <a:off x="384048" y="6592824"/>
+            <a:ext cx="7772400" cy="201168"/>
+          </a:xfrm>
+          <a:prstGeom prst="rect">
+            <a:avLst/>
+          </a:prstGeom>
+          <a:noFill/>
+        </p:spPr>
+        <p:txBody>
+          <a:bodyPr wrap="none">
+            <a:spAutoFit/>
+          </a:bodyPr>
+          <a:lstStyle/>
+          <a:p>
+            <a:pPr>
+              <a:defRPr sz="750">
+                <a:solidFill>
+                  <a:srgbClr val="64748B"/>
+                </a:solidFill>
+              </a:defRPr>
+            </a:pPr>
+            <a:r>
+              <a:t>Release validation model</a:t>
+            </a:r>
+          </a:p>
+        </p:txBody>
+      </p:sp>
+      <p:sp>
+        <p:nvSpPr>
+          <p:cNvPr id="16" name="TextBox 15"/>
+          <p:cNvSpPr txBox="1"/>
+          <p:nvPr/>
+        </p:nvSpPr>
+        <p:spPr>
+          <a:xfrm>
+            <a:off x="8412480" y="6592824"/>
+            <a:ext cx="548640" cy="201168"/>
+          </a:xfrm>
+          <a:prstGeom prst="rect">
+            <a:avLst/>
+          </a:prstGeom>
+          <a:noFill/>
+        </p:spPr>
+        <p:txBody>
+          <a:bodyPr wrap="none">
+            <a:spAutoFit/>
+          </a:bodyPr>
+          <a:lstStyle/>
+          <a:p>
+            <a:pPr algn="r">
+              <a:defRPr sz="800">
+                <a:solidFill>
+                  <a:srgbClr val="64748B"/>
+                </a:solidFill>
+              </a:defRPr>
+            </a:pPr>
+            <a:r>
+              <a:t>18</a:t>
+            </a:r>
+          </a:p>
+        </p:txBody>
+      </p:sp>
+    </p:spTree>
+  </p:cSld>
+  <p:clrMapOvr>
+    <a:masterClrMapping/>
+  </p:clrMapOvr>
+</p:sld>
+</file>
+
+<file path=ppt/slides/slide23.xml><?xml version="1.0" encoding="utf-8"?>
+<p:sld xmlns:a="http://schemas.openxmlformats.org/drawingml/2006/main" xmlns:p="http://schemas.openxmlformats.org/presentationml/2006/main" xmlns:r="http://schemas.openxmlformats.org/officeDocument/2006/relationships">
+  <p:cSld>
+    <p:spTree>
+      <p:nvGrpSpPr>
+        <p:cNvPr id="1" name=""/>
+        <p:cNvGrpSpPr/>
+        <p:nvPr/>
+      </p:nvGrpSpPr>
+      <p:grpSpPr/>
+      <p:sp>
+        <p:nvSpPr>
+          <p:cNvPr id="2" name="Rectangle 1"/>
+          <p:cNvSpPr/>
+          <p:nvPr/>
+        </p:nvSpPr>
+        <p:spPr>
+          <a:xfrm>
+            <a:off x="0" y="0"/>
+            <a:ext cx="9144000" cy="6858000"/>
+          </a:xfrm>
+          <a:prstGeom prst="rect">
+            <a:avLst/>
+          </a:prstGeom>
+          <a:solidFill>
+            <a:srgbClr val="F0F4F8"/>
+          </a:solidFill>
+          <a:ln>
+            <a:noFill/>
+          </a:ln>
+        </p:spPr>
+        <p:style>
+          <a:lnRef idx="1">
+            <a:schemeClr val="accent1"/>
+          </a:lnRef>
+          <a:fillRef idx="3">
+            <a:schemeClr val="accent1"/>
+          </a:fillRef>
+          <a:effectRef idx="2">
+            <a:schemeClr val="accent1"/>
+          </a:effectRef>
+          <a:fontRef idx="minor">
+            <a:schemeClr val="lt1"/>
+          </a:fontRef>
+        </p:style>
+        <p:txBody>
+          <a:bodyPr rtlCol="0" anchor="ctr"/>
+          <a:lstStyle/>
+          <a:p>
+            <a:pPr algn="ctr"/>
+          </a:p>
+        </p:txBody>
+      </p:sp>
+      <p:sp>
+        <p:nvSpPr>
+          <p:cNvPr id="3" name="Rectangle 2"/>
+          <p:cNvSpPr/>
+          <p:nvPr/>
+        </p:nvSpPr>
+        <p:spPr>
+          <a:xfrm>
+            <a:off x="0" y="0"/>
+            <a:ext cx="9144000" cy="658368"/>
+          </a:xfrm>
+          <a:prstGeom prst="rect">
+            <a:avLst/>
+          </a:prstGeom>
+          <a:solidFill>
+            <a:srgbClr val="0A1628"/>
+          </a:solidFill>
+          <a:ln>
+            <a:noFill/>
+          </a:ln>
+        </p:spPr>
+        <p:style>
+          <a:lnRef idx="1">
+            <a:schemeClr val="accent1"/>
+          </a:lnRef>
+          <a:fillRef idx="3">
+            <a:schemeClr val="accent1"/>
+          </a:fillRef>
+          <a:effectRef idx="2">
+            <a:schemeClr val="accent1"/>
+          </a:effectRef>
+          <a:fontRef idx="minor">
+            <a:schemeClr val="lt1"/>
+          </a:fontRef>
+        </p:style>
+        <p:txBody>
+          <a:bodyPr rtlCol="0" anchor="ctr"/>
+          <a:lstStyle/>
+          <a:p>
+            <a:pPr algn="ctr"/>
+          </a:p>
+        </p:txBody>
+      </p:sp>
+      <p:sp>
+        <p:nvSpPr>
+          <p:cNvPr id="4" name="Rectangle 3"/>
+          <p:cNvSpPr/>
+          <p:nvPr/>
+        </p:nvSpPr>
+        <p:spPr>
+          <a:xfrm>
+            <a:off x="0" y="658368"/>
+            <a:ext cx="9144000" cy="36576"/>
+          </a:xfrm>
+          <a:prstGeom prst="rect">
+            <a:avLst/>
+          </a:prstGeom>
+          <a:solidFill>
+            <a:srgbClr val="00A3E0"/>
+          </a:solidFill>
+          <a:ln>
+            <a:noFill/>
+          </a:ln>
+        </p:spPr>
+        <p:style>
+          <a:lnRef idx="1">
+            <a:schemeClr val="accent1"/>
+          </a:lnRef>
+          <a:fillRef idx="3">
+            <a:schemeClr val="accent1"/>
+          </a:fillRef>
+          <a:effectRef idx="2">
+            <a:schemeClr val="accent1"/>
+          </a:effectRef>
+          <a:fontRef idx="minor">
+            <a:schemeClr val="lt1"/>
+          </a:fontRef>
+        </p:style>
+        <p:txBody>
+          <a:bodyPr rtlCol="0" anchor="ctr"/>
+          <a:lstStyle/>
+          <a:p>
+            <a:pPr algn="ctr"/>
+          </a:p>
+        </p:txBody>
+      </p:sp>
+      <p:sp>
+        <p:nvSpPr>
+          <p:cNvPr id="5" name="TextBox 4"/>
+          <p:cNvSpPr txBox="1"/>
+          <p:nvPr/>
+        </p:nvSpPr>
+        <p:spPr>
+          <a:xfrm>
+            <a:off x="384048" y="128016"/>
+            <a:ext cx="6858000" cy="457200"/>
+          </a:xfrm>
+          <a:prstGeom prst="rect">
+            <a:avLst/>
+          </a:prstGeom>
+          <a:noFill/>
+        </p:spPr>
+        <p:txBody>
+          <a:bodyPr wrap="none">
+            <a:spAutoFit/>
+          </a:bodyPr>
+          <a:lstStyle/>
+          <a:p>
+            <a:pPr>
+              <a:defRPr sz="2000" b="1">
+                <a:solidFill>
+                  <a:srgbClr val="FFFFFF"/>
+                </a:solidFill>
+              </a:defRPr>
+            </a:pPr>
+            <a:r>
+              <a:t>AI Acceleration</a:t>
+            </a:r>
+          </a:p>
+        </p:txBody>
+      </p:sp>
+      <p:sp>
+        <p:nvSpPr>
+          <p:cNvPr id="6" name="Rounded Rectangle 5"/>
+          <p:cNvSpPr/>
+          <p:nvPr/>
+        </p:nvSpPr>
+        <p:spPr>
+          <a:xfrm>
+            <a:off x="7452360" y="164592"/>
+            <a:ext cx="1417320" cy="347472"/>
+          </a:xfrm>
+          <a:prstGeom prst="roundRect">
+            <a:avLst/>
+          </a:prstGeom>
+          <a:solidFill>
+            <a:srgbClr val="00A3E0"/>
+          </a:solidFill>
+          <a:ln>
+            <a:noFill/>
+          </a:ln>
+        </p:spPr>
+        <p:style>
+          <a:lnRef idx="1">
+            <a:schemeClr val="accent1"/>
+          </a:lnRef>
+          <a:fillRef idx="3">
+            <a:schemeClr val="accent1"/>
+          </a:fillRef>
+          <a:effectRef idx="2">
+            <a:schemeClr val="accent1"/>
+          </a:effectRef>
+          <a:fontRef idx="minor">
+            <a:schemeClr val="lt1"/>
+          </a:fontRef>
+        </p:style>
+        <p:txBody>
+          <a:bodyPr rtlCol="0" anchor="ctr"/>
+          <a:lstStyle/>
+          <a:p>
+            <a:pPr algn="ctr">
+              <a:defRPr sz="900" b="1">
+                <a:solidFill>
+                  <a:srgbClr val="FFFFFF"/>
+                </a:solidFill>
+              </a:defRPr>
+            </a:pPr>
+            <a:r>
+              <a:t>AI</a:t>
+            </a:r>
+          </a:p>
+        </p:txBody>
+      </p:sp>
+      <p:sp>
+        <p:nvSpPr>
+          <p:cNvPr id="7" name="Rounded Rectangle 6"/>
+          <p:cNvSpPr/>
+          <p:nvPr/>
+        </p:nvSpPr>
+        <p:spPr>
+          <a:xfrm>
+            <a:off x="320040" y="868680"/>
+            <a:ext cx="8503920" cy="4892040"/>
+          </a:xfrm>
+          <a:prstGeom prst="roundRect">
+            <a:avLst/>
+          </a:prstGeom>
+          <a:solidFill>
+            <a:srgbClr val="E8EEF6"/>
+          </a:solidFill>
+          <a:ln>
+            <a:noFill/>
+          </a:ln>
+        </p:spPr>
+        <p:style>
+          <a:lnRef idx="1">
+            <a:schemeClr val="accent1"/>
+          </a:lnRef>
+          <a:fillRef idx="3">
+            <a:schemeClr val="accent1"/>
+          </a:fillRef>
+          <a:effectRef idx="2">
+            <a:schemeClr val="accent1"/>
+          </a:effectRef>
+          <a:fontRef idx="minor">
+            <a:schemeClr val="lt1"/>
+          </a:fontRef>
+        </p:style>
+        <p:txBody>
+          <a:bodyPr rtlCol="0" anchor="ctr"/>
+          <a:lstStyle/>
+          <a:p>
+            <a:pPr algn="ctr"/>
+          </a:p>
+        </p:txBody>
+      </p:sp>
+      <p:sp>
+        <p:nvSpPr>
+          <p:cNvPr id="8" name="Rectangle 7"/>
+          <p:cNvSpPr/>
+          <p:nvPr/>
+        </p:nvSpPr>
+        <p:spPr>
+          <a:xfrm>
+            <a:off x="320040" y="868680"/>
+            <a:ext cx="54864" cy="4892040"/>
+          </a:xfrm>
+          <a:prstGeom prst="rect">
+            <a:avLst/>
+          </a:prstGeom>
+          <a:solidFill>
+            <a:srgbClr val="00B388"/>
+          </a:solidFill>
+          <a:ln>
+            <a:noFill/>
+          </a:ln>
+        </p:spPr>
+        <p:style>
+          <a:lnRef idx="1">
+            <a:schemeClr val="accent1"/>
+          </a:lnRef>
+          <a:fillRef idx="3">
+            <a:schemeClr val="accent1"/>
+          </a:fillRef>
+          <a:effectRef idx="2">
+            <a:schemeClr val="accent1"/>
+          </a:effectRef>
+          <a:fontRef idx="minor">
+            <a:schemeClr val="lt1"/>
+          </a:fontRef>
+        </p:style>
+        <p:txBody>
+          <a:bodyPr rtlCol="0" anchor="ctr"/>
+          <a:lstStyle/>
+          <a:p>
+            <a:pPr algn="ctr"/>
+          </a:p>
+        </p:txBody>
+      </p:sp>
+      <p:sp>
+        <p:nvSpPr>
+          <p:cNvPr id="9" name="TextBox 8"/>
+          <p:cNvSpPr txBox="1"/>
+          <p:nvPr/>
+        </p:nvSpPr>
+        <p:spPr>
+          <a:xfrm>
+            <a:off x="502920" y="978408"/>
+            <a:ext cx="8229600" cy="320040"/>
+          </a:xfrm>
+          <a:prstGeom prst="rect">
+            <a:avLst/>
+          </a:prstGeom>
+          <a:noFill/>
+        </p:spPr>
+        <p:txBody>
+          <a:bodyPr wrap="none">
+            <a:spAutoFit/>
+          </a:bodyPr>
+          <a:lstStyle/>
+          <a:p>
+            <a:pPr>
+              <a:defRPr sz="1100" b="1">
+                <a:solidFill>
+                  <a:srgbClr val="003241"/>
+                </a:solidFill>
+              </a:defRPr>
+            </a:pPr>
+            <a:r>
+              <a:t>Key points</a:t>
+            </a:r>
+          </a:p>
+        </p:txBody>
+      </p:sp>
+      <p:sp>
+        <p:nvSpPr>
+          <p:cNvPr id="10" name="TextBox 9"/>
+          <p:cNvSpPr txBox="1"/>
+          <p:nvPr/>
+        </p:nvSpPr>
+        <p:spPr>
+          <a:xfrm>
+            <a:off x="502920" y="1307592"/>
+            <a:ext cx="8229600" cy="4389120"/>
+          </a:xfrm>
+          <a:prstGeom prst="rect">
+            <a:avLst/>
+          </a:prstGeom>
+          <a:noFill/>
+        </p:spPr>
+        <p:txBody>
+          <a:bodyPr wrap="square">
+            <a:spAutoFit/>
+          </a:bodyPr>
+          <a:lstStyle/>
+          <a:p>
+            <a:pPr>
+              <a:spcAft>
+                <a:spcPts val="500"/>
+              </a:spcAft>
+              <a:defRPr sz="1000">
+                <a:solidFill>
+                  <a:srgbClr val="1A2332"/>
+                </a:solidFill>
+              </a:defRPr>
+            </a:pPr>
+            <a:r>
+              <a:t>• MSC migration agents — Postman, docs, TestNG boilerplate</a:t>
+            </a:r>
+          </a:p>
+          <a:p>
+            <a:pPr>
+              <a:spcAft>
+                <a:spcPts val="500"/>
+              </a:spcAft>
+              <a:defRPr sz="1000">
+                <a:solidFill>
+                  <a:srgbClr val="1A2332"/>
+                </a:solidFill>
+              </a:defRPr>
+            </a:pPr>
+            <a:r>
+              <a:t>• Automation bug lifecycle — Cursor skill + standardized reporting</a:t>
+            </a:r>
+          </a:p>
+          <a:p>
+            <a:pPr>
+              <a:spcAft>
+                <a:spcPts val="500"/>
+              </a:spcAft>
+              <a:defRPr sz="1000">
+                <a:solidFill>
+                  <a:srgbClr val="1A2332"/>
+                </a:solidFill>
+              </a:defRPr>
+            </a:pPr>
+            <a:r>
+              <a:t>• Chart &amp; metrics generators — reproducible leadership packs</a:t>
+            </a:r>
+          </a:p>
+          <a:p>
+            <a:pPr>
+              <a:spcAft>
+                <a:spcPts val="500"/>
+              </a:spcAft>
+              <a:defRPr sz="1000">
+                <a:solidFill>
+                  <a:srgbClr val="1A2332"/>
+                </a:solidFill>
+              </a:defRPr>
+            </a:pPr>
+            <a:r>
+              <a:t>• Coverage intelligence foundation for monthly dashboard</a:t>
+            </a:r>
+          </a:p>
+        </p:txBody>
+      </p:sp>
+      <p:sp>
+        <p:nvSpPr>
+          <p:cNvPr id="11" name="Rectangle 10"/>
+          <p:cNvSpPr/>
+          <p:nvPr/>
+        </p:nvSpPr>
+        <p:spPr>
+          <a:xfrm>
+            <a:off x="0" y="6510528"/>
+            <a:ext cx="9144000" cy="347472"/>
+          </a:xfrm>
+          <a:prstGeom prst="rect">
+            <a:avLst/>
+          </a:prstGeom>
+          <a:solidFill>
+            <a:srgbClr val="FFFFFF"/>
+          </a:solidFill>
+          <a:ln>
+            <a:noFill/>
+          </a:ln>
+        </p:spPr>
+        <p:style>
+          <a:lnRef idx="1">
+            <a:schemeClr val="accent1"/>
+          </a:lnRef>
+          <a:fillRef idx="3">
+            <a:schemeClr val="accent1"/>
+          </a:fillRef>
+          <a:effectRef idx="2">
+            <a:schemeClr val="accent1"/>
+          </a:effectRef>
+          <a:fontRef idx="minor">
+            <a:schemeClr val="lt1"/>
+          </a:fontRef>
+        </p:style>
+        <p:txBody>
+          <a:bodyPr rtlCol="0" anchor="ctr"/>
+          <a:lstStyle/>
+          <a:p>
+            <a:pPr algn="ctr"/>
+          </a:p>
+        </p:txBody>
+      </p:sp>
+      <p:sp>
+        <p:nvSpPr>
+          <p:cNvPr id="12" name="Rectangle 11"/>
+          <p:cNvSpPr/>
+          <p:nvPr/>
+        </p:nvSpPr>
+        <p:spPr>
+          <a:xfrm>
+            <a:off x="0" y="6510528"/>
+            <a:ext cx="9144000" cy="18288"/>
+          </a:xfrm>
+          <a:prstGeom prst="rect">
+            <a:avLst/>
+          </a:prstGeom>
+          <a:solidFill>
+            <a:srgbClr val="E8EEF6"/>
+          </a:solidFill>
+          <a:ln>
+            <a:noFill/>
+          </a:ln>
+        </p:spPr>
+        <p:style>
+          <a:lnRef idx="1">
+            <a:schemeClr val="accent1"/>
+          </a:lnRef>
+          <a:fillRef idx="3">
+            <a:schemeClr val="accent1"/>
+          </a:fillRef>
+          <a:effectRef idx="2">
+            <a:schemeClr val="accent1"/>
+          </a:effectRef>
+          <a:fontRef idx="minor">
+            <a:schemeClr val="lt1"/>
+          </a:fontRef>
+        </p:style>
+        <p:txBody>
+          <a:bodyPr rtlCol="0" anchor="ctr"/>
+          <a:lstStyle/>
+          <a:p>
+            <a:pPr algn="ctr"/>
+          </a:p>
+        </p:txBody>
+      </p:sp>
+      <p:sp>
+        <p:nvSpPr>
+          <p:cNvPr id="13" name="TextBox 12"/>
+          <p:cNvSpPr txBox="1"/>
+          <p:nvPr/>
+        </p:nvSpPr>
+        <p:spPr>
+          <a:xfrm>
+            <a:off x="384048" y="6574536"/>
+            <a:ext cx="7772400" cy="201168"/>
+          </a:xfrm>
+          <a:prstGeom prst="rect">
+            <a:avLst/>
+          </a:prstGeom>
+          <a:noFill/>
+        </p:spPr>
+        <p:txBody>
+          <a:bodyPr wrap="none">
+            <a:spAutoFit/>
+          </a:bodyPr>
+          <a:lstStyle/>
+          <a:p>
+            <a:pPr>
+              <a:defRPr sz="750">
+                <a:solidFill>
+                  <a:srgbClr val="64748B"/>
+                </a:solidFill>
+              </a:defRPr>
+            </a:pPr>
+            <a:r>
+              <a:t>AI tooling portfolio</a:t>
+            </a:r>
+          </a:p>
+        </p:txBody>
+      </p:sp>
+      <p:sp>
+        <p:nvSpPr>
+          <p:cNvPr id="14" name="TextBox 13"/>
+          <p:cNvSpPr txBox="1"/>
+          <p:nvPr/>
+        </p:nvSpPr>
+        <p:spPr>
+          <a:xfrm>
+            <a:off x="8412480" y="6574536"/>
+            <a:ext cx="548640" cy="201168"/>
+          </a:xfrm>
+          <a:prstGeom prst="rect">
+            <a:avLst/>
+          </a:prstGeom>
+          <a:noFill/>
+        </p:spPr>
+        <p:txBody>
+          <a:bodyPr wrap="none">
+            <a:spAutoFit/>
+          </a:bodyPr>
+          <a:lstStyle/>
+          <a:p>
+            <a:pPr algn="r">
+              <a:defRPr sz="800">
+                <a:solidFill>
+                  <a:srgbClr val="64748B"/>
+                </a:solidFill>
+              </a:defRPr>
+            </a:pPr>
+            <a:r>
+              <a:t>19</a:t>
+            </a:r>
+          </a:p>
+        </p:txBody>
+      </p:sp>
+    </p:spTree>
+  </p:cSld>
+  <p:clrMapOvr>
+    <a:masterClrMapping/>
+  </p:clrMapOvr>
+</p:sld>
+</file>
+
+<file path=ppt/slides/slide24.xml><?xml version="1.0" encoding="utf-8"?>
+<p:sld xmlns:a="http://schemas.openxmlformats.org/drawingml/2006/main" xmlns:p="http://schemas.openxmlformats.org/presentationml/2006/main" xmlns:r="http://schemas.openxmlformats.org/officeDocument/2006/relationships">
+  <p:cSld>
+    <p:spTree>
+      <p:nvGrpSpPr>
+        <p:cNvPr id="1" name=""/>
+        <p:cNvGrpSpPr/>
+        <p:nvPr/>
+      </p:nvGrpSpPr>
+      <p:grpSpPr/>
+      <p:sp>
+        <p:nvSpPr>
+          <p:cNvPr id="2" name="Rectangle 1"/>
+          <p:cNvSpPr/>
+          <p:nvPr/>
+        </p:nvSpPr>
+        <p:spPr>
+          <a:xfrm>
+            <a:off x="0" y="0"/>
+            <a:ext cx="9144000" cy="6858000"/>
+          </a:xfrm>
+          <a:prstGeom prst="rect">
+            <a:avLst/>
+          </a:prstGeom>
+          <a:solidFill>
+            <a:srgbClr val="F0F4F8"/>
+          </a:solidFill>
+          <a:ln>
+            <a:noFill/>
+          </a:ln>
+        </p:spPr>
+        <p:style>
+          <a:lnRef idx="1">
+            <a:schemeClr val="accent1"/>
+          </a:lnRef>
+          <a:fillRef idx="3">
+            <a:schemeClr val="accent1"/>
+          </a:fillRef>
+          <a:effectRef idx="2">
+            <a:schemeClr val="accent1"/>
+          </a:effectRef>
+          <a:fontRef idx="minor">
+            <a:schemeClr val="lt1"/>
+          </a:fontRef>
+        </p:style>
+        <p:txBody>
+          <a:bodyPr rtlCol="0" anchor="ctr"/>
+          <a:lstStyle/>
+          <a:p>
+            <a:pPr algn="ctr"/>
+          </a:p>
+        </p:txBody>
+      </p:sp>
+      <p:sp>
+        <p:nvSpPr>
+          <p:cNvPr id="3" name="Rectangle 2"/>
+          <p:cNvSpPr/>
+          <p:nvPr/>
+        </p:nvSpPr>
+        <p:spPr>
+          <a:xfrm>
+            <a:off x="0" y="0"/>
+            <a:ext cx="9144000" cy="658368"/>
+          </a:xfrm>
+          <a:prstGeom prst="rect">
+            <a:avLst/>
+          </a:prstGeom>
+          <a:solidFill>
+            <a:srgbClr val="0A1628"/>
+          </a:solidFill>
+          <a:ln>
+            <a:noFill/>
+          </a:ln>
+        </p:spPr>
+        <p:style>
+          <a:lnRef idx="1">
+            <a:schemeClr val="accent1"/>
+          </a:lnRef>
+          <a:fillRef idx="3">
+            <a:schemeClr val="accent1"/>
+          </a:fillRef>
+          <a:effectRef idx="2">
+            <a:schemeClr val="accent1"/>
+          </a:effectRef>
+          <a:fontRef idx="minor">
+            <a:schemeClr val="lt1"/>
+          </a:fontRef>
+        </p:style>
+        <p:txBody>
+          <a:bodyPr rtlCol="0" anchor="ctr"/>
+          <a:lstStyle/>
+          <a:p>
+            <a:pPr algn="ctr"/>
+          </a:p>
+        </p:txBody>
+      </p:sp>
+      <p:sp>
+        <p:nvSpPr>
+          <p:cNvPr id="4" name="Rectangle 3"/>
+          <p:cNvSpPr/>
+          <p:nvPr/>
+        </p:nvSpPr>
+        <p:spPr>
+          <a:xfrm>
+            <a:off x="0" y="658368"/>
+            <a:ext cx="9144000" cy="36576"/>
+          </a:xfrm>
+          <a:prstGeom prst="rect">
+            <a:avLst/>
+          </a:prstGeom>
+          <a:solidFill>
+            <a:srgbClr val="00A3E0"/>
+          </a:solidFill>
+          <a:ln>
+            <a:noFill/>
+          </a:ln>
+        </p:spPr>
+        <p:style>
+          <a:lnRef idx="1">
+            <a:schemeClr val="accent1"/>
+          </a:lnRef>
+          <a:fillRef idx="3">
+            <a:schemeClr val="accent1"/>
+          </a:fillRef>
+          <a:effectRef idx="2">
+            <a:schemeClr val="accent1"/>
+          </a:effectRef>
+          <a:fontRef idx="minor">
+            <a:schemeClr val="lt1"/>
+          </a:fontRef>
+        </p:style>
+        <p:txBody>
+          <a:bodyPr rtlCol="0" anchor="ctr"/>
+          <a:lstStyle/>
+          <a:p>
+            <a:pPr algn="ctr"/>
+          </a:p>
+        </p:txBody>
+      </p:sp>
+      <p:sp>
+        <p:nvSpPr>
+          <p:cNvPr id="5" name="TextBox 4"/>
+          <p:cNvSpPr txBox="1"/>
+          <p:nvPr/>
+        </p:nvSpPr>
+        <p:spPr>
+          <a:xfrm>
+            <a:off x="384048" y="128016"/>
+            <a:ext cx="6858000" cy="457200"/>
+          </a:xfrm>
+          <a:prstGeom prst="rect">
+            <a:avLst/>
+          </a:prstGeom>
+          <a:noFill/>
+        </p:spPr>
+        <p:txBody>
+          <a:bodyPr wrap="none">
+            <a:spAutoFit/>
+          </a:bodyPr>
+          <a:lstStyle/>
+          <a:p>
+            <a:pPr>
+              <a:defRPr sz="2000" b="1">
+                <a:solidFill>
+                  <a:srgbClr val="FFFFFF"/>
+                </a:solidFill>
+              </a:defRPr>
+            </a:pPr>
+            <a:r>
+              <a:t>Roadmap Q3–Q4 2026</a:t>
+            </a:r>
+          </a:p>
+        </p:txBody>
+      </p:sp>
+      <p:sp>
+        <p:nvSpPr>
+          <p:cNvPr id="6" name="Rounded Rectangle 5"/>
+          <p:cNvSpPr/>
+          <p:nvPr/>
+        </p:nvSpPr>
+        <p:spPr>
+          <a:xfrm>
+            <a:off x="7452360" y="164592"/>
+            <a:ext cx="1417320" cy="347472"/>
+          </a:xfrm>
+          <a:prstGeom prst="roundRect">
+            <a:avLst/>
+          </a:prstGeom>
+          <a:solidFill>
+            <a:srgbClr val="00A3E0"/>
+          </a:solidFill>
+          <a:ln>
+            <a:noFill/>
+          </a:ln>
+        </p:spPr>
+        <p:style>
+          <a:lnRef idx="1">
+            <a:schemeClr val="accent1"/>
+          </a:lnRef>
+          <a:fillRef idx="3">
+            <a:schemeClr val="accent1"/>
+          </a:fillRef>
+          <a:effectRef idx="2">
+            <a:schemeClr val="accent1"/>
+          </a:effectRef>
+          <a:fontRef idx="minor">
+            <a:schemeClr val="lt1"/>
+          </a:fontRef>
+        </p:style>
+        <p:txBody>
+          <a:bodyPr rtlCol="0" anchor="ctr"/>
+          <a:lstStyle/>
+          <a:p>
+            <a:pPr algn="ctr">
+              <a:defRPr sz="900" b="1">
+                <a:solidFill>
+                  <a:srgbClr val="FFFFFF"/>
+                </a:solidFill>
+              </a:defRPr>
+            </a:pPr>
+            <a:r>
+              <a:t>Roadmap</a:t>
+            </a:r>
+          </a:p>
+        </p:txBody>
+      </p:sp>
+      <p:sp>
+        <p:nvSpPr>
+          <p:cNvPr id="7" name="Rounded Rectangle 6"/>
+          <p:cNvSpPr/>
+          <p:nvPr/>
+        </p:nvSpPr>
+        <p:spPr>
+          <a:xfrm>
+            <a:off x="320040" y="868680"/>
+            <a:ext cx="8503920" cy="4892040"/>
+          </a:xfrm>
+          <a:prstGeom prst="roundRect">
+            <a:avLst/>
+          </a:prstGeom>
+          <a:solidFill>
+            <a:srgbClr val="E8EEF6"/>
+          </a:solidFill>
+          <a:ln>
+            <a:noFill/>
+          </a:ln>
+        </p:spPr>
+        <p:style>
+          <a:lnRef idx="1">
+            <a:schemeClr val="accent1"/>
+          </a:lnRef>
+          <a:fillRef idx="3">
+            <a:schemeClr val="accent1"/>
+          </a:fillRef>
+          <a:effectRef idx="2">
+            <a:schemeClr val="accent1"/>
+          </a:effectRef>
+          <a:fontRef idx="minor">
+            <a:schemeClr val="lt1"/>
+          </a:fontRef>
+        </p:style>
+        <p:txBody>
+          <a:bodyPr rtlCol="0" anchor="ctr"/>
+          <a:lstStyle/>
+          <a:p>
+            <a:pPr algn="ctr"/>
+          </a:p>
+        </p:txBody>
+      </p:sp>
+      <p:sp>
+        <p:nvSpPr>
+          <p:cNvPr id="8" name="Rectangle 7"/>
+          <p:cNvSpPr/>
+          <p:nvPr/>
+        </p:nvSpPr>
+        <p:spPr>
+          <a:xfrm>
+            <a:off x="320040" y="868680"/>
+            <a:ext cx="54864" cy="4892040"/>
+          </a:xfrm>
+          <a:prstGeom prst="rect">
+            <a:avLst/>
+          </a:prstGeom>
+          <a:solidFill>
+            <a:srgbClr val="00B388"/>
+          </a:solidFill>
+          <a:ln>
+            <a:noFill/>
+          </a:ln>
+        </p:spPr>
+        <p:style>
+          <a:lnRef idx="1">
+            <a:schemeClr val="accent1"/>
+          </a:lnRef>
+          <a:fillRef idx="3">
+            <a:schemeClr val="accent1"/>
+          </a:fillRef>
+          <a:effectRef idx="2">
+            <a:schemeClr val="accent1"/>
+          </a:effectRef>
+          <a:fontRef idx="minor">
+            <a:schemeClr val="lt1"/>
+          </a:fontRef>
+        </p:style>
+        <p:txBody>
+          <a:bodyPr rtlCol="0" anchor="ctr"/>
+          <a:lstStyle/>
+          <a:p>
+            <a:pPr algn="ctr"/>
+          </a:p>
+        </p:txBody>
+      </p:sp>
+      <p:sp>
+        <p:nvSpPr>
+          <p:cNvPr id="9" name="TextBox 8"/>
+          <p:cNvSpPr txBox="1"/>
+          <p:nvPr/>
+        </p:nvSpPr>
+        <p:spPr>
+          <a:xfrm>
+            <a:off x="502920" y="978408"/>
+            <a:ext cx="8229600" cy="320040"/>
+          </a:xfrm>
+          <a:prstGeom prst="rect">
+            <a:avLst/>
+          </a:prstGeom>
+          <a:noFill/>
+        </p:spPr>
+        <p:txBody>
+          <a:bodyPr wrap="none">
+            <a:spAutoFit/>
+          </a:bodyPr>
+          <a:lstStyle/>
+          <a:p>
+            <a:pPr>
+              <a:defRPr sz="1100" b="1">
+                <a:solidFill>
+                  <a:srgbClr val="003241"/>
+                </a:solidFill>
+              </a:defRPr>
+            </a:pPr>
+            <a:r>
+              <a:t>Key points</a:t>
+            </a:r>
+          </a:p>
+        </p:txBody>
+      </p:sp>
+      <p:sp>
+        <p:nvSpPr>
+          <p:cNvPr id="10" name="TextBox 9"/>
+          <p:cNvSpPr txBox="1"/>
+          <p:nvPr/>
+        </p:nvSpPr>
+        <p:spPr>
+          <a:xfrm>
+            <a:off x="502920" y="1307592"/>
+            <a:ext cx="8229600" cy="4389120"/>
+          </a:xfrm>
+          <a:prstGeom prst="rect">
+            <a:avLst/>
+          </a:prstGeom>
+          <a:noFill/>
+        </p:spPr>
+        <p:txBody>
+          <a:bodyPr wrap="square">
+            <a:spAutoFit/>
+          </a:bodyPr>
+          <a:lstStyle/>
+          <a:p>
+            <a:pPr>
+              <a:spcAft>
+                <a:spcPts val="500"/>
+              </a:spcAft>
+              <a:defRPr sz="1000">
+                <a:solidFill>
+                  <a:srgbClr val="1A2332"/>
+                </a:solidFill>
+              </a:defRPr>
+            </a:pPr>
+            <a:r>
+              <a:t>• P0: MSC GitLab nightly · M1 master suite</a:t>
+            </a:r>
+          </a:p>
+          <a:p>
+            <a:pPr>
+              <a:spcAft>
+                <a:spcPts val="500"/>
+              </a:spcAft>
+              <a:defRPr sz="1000">
+                <a:solidFill>
+                  <a:srgbClr val="1A2332"/>
+                </a:solidFill>
+              </a:defRPr>
+            </a:pPr>
+            <a:r>
+              <a:t>• P1: MSC enrollment API · CSR Actions expansion (+33 scenarios)</a:t>
+            </a:r>
+          </a:p>
+          <a:p>
+            <a:pPr>
+              <a:spcAft>
+                <a:spcPts val="500"/>
+              </a:spcAft>
+              <a:defRPr sz="1000">
+                <a:solidFill>
+                  <a:srgbClr val="1A2332"/>
+                </a:solidFill>
+              </a:defRPr>
+            </a:pPr>
+            <a:r>
+              <a:t>• P2: Entity V3 nightly · automated dashboard</a:t>
+            </a:r>
+          </a:p>
+          <a:p>
+            <a:pPr>
+              <a:spcAft>
+                <a:spcPts val="500"/>
+              </a:spcAft>
+              <a:defRPr sz="1000">
+                <a:solidFill>
+                  <a:srgbClr val="1A2332"/>
+                </a:solidFill>
+              </a:defRPr>
+            </a:pPr>
+            <a:r>
+              <a:t>• Engage AM Squad at SDLC start, not sign-off deadline</a:t>
+            </a:r>
+          </a:p>
+        </p:txBody>
+      </p:sp>
+      <p:sp>
+        <p:nvSpPr>
+          <p:cNvPr id="11" name="Rectangle 10"/>
+          <p:cNvSpPr/>
+          <p:nvPr/>
+        </p:nvSpPr>
+        <p:spPr>
+          <a:xfrm>
+            <a:off x="0" y="6510528"/>
+            <a:ext cx="9144000" cy="347472"/>
+          </a:xfrm>
+          <a:prstGeom prst="rect">
+            <a:avLst/>
+          </a:prstGeom>
+          <a:solidFill>
+            <a:srgbClr val="FFFFFF"/>
+          </a:solidFill>
+          <a:ln>
+            <a:noFill/>
+          </a:ln>
+        </p:spPr>
+        <p:style>
+          <a:lnRef idx="1">
+            <a:schemeClr val="accent1"/>
+          </a:lnRef>
+          <a:fillRef idx="3">
+            <a:schemeClr val="accent1"/>
+          </a:fillRef>
+          <a:effectRef idx="2">
+            <a:schemeClr val="accent1"/>
+          </a:effectRef>
+          <a:fontRef idx="minor">
+            <a:schemeClr val="lt1"/>
+          </a:fontRef>
+        </p:style>
+        <p:txBody>
+          <a:bodyPr rtlCol="0" anchor="ctr"/>
+          <a:lstStyle/>
+          <a:p>
+            <a:pPr algn="ctr"/>
+          </a:p>
+        </p:txBody>
+      </p:sp>
+      <p:sp>
+        <p:nvSpPr>
+          <p:cNvPr id="12" name="Rectangle 11"/>
+          <p:cNvSpPr/>
+          <p:nvPr/>
+        </p:nvSpPr>
+        <p:spPr>
+          <a:xfrm>
+            <a:off x="0" y="6510528"/>
+            <a:ext cx="9144000" cy="18288"/>
+          </a:xfrm>
+          <a:prstGeom prst="rect">
+            <a:avLst/>
+          </a:prstGeom>
+          <a:solidFill>
+            <a:srgbClr val="E8EEF6"/>
+          </a:solidFill>
+          <a:ln>
+            <a:noFill/>
+          </a:ln>
+        </p:spPr>
+        <p:style>
+          <a:lnRef idx="1">
+            <a:schemeClr val="accent1"/>
+          </a:lnRef>
+          <a:fillRef idx="3">
+            <a:schemeClr val="accent1"/>
+          </a:fillRef>
+          <a:effectRef idx="2">
+            <a:schemeClr val="accent1"/>
+          </a:effectRef>
+          <a:fontRef idx="minor">
+            <a:schemeClr val="lt1"/>
+          </a:fontRef>
+        </p:style>
+        <p:txBody>
+          <a:bodyPr rtlCol="0" anchor="ctr"/>
+          <a:lstStyle/>
+          <a:p>
+            <a:pPr algn="ctr"/>
+          </a:p>
+        </p:txBody>
+      </p:sp>
+      <p:sp>
+        <p:nvSpPr>
+          <p:cNvPr id="13" name="TextBox 12"/>
+          <p:cNvSpPr txBox="1"/>
+          <p:nvPr/>
+        </p:nvSpPr>
+        <p:spPr>
+          <a:xfrm>
+            <a:off x="384048" y="6574536"/>
+            <a:ext cx="7772400" cy="201168"/>
+          </a:xfrm>
+          <a:prstGeom prst="rect">
+            <a:avLst/>
+          </a:prstGeom>
+          <a:noFill/>
+        </p:spPr>
+        <p:txBody>
+          <a:bodyPr wrap="none">
+            <a:spAutoFit/>
+          </a:bodyPr>
+          <a:lstStyle/>
+          <a:p>
+            <a:pPr>
+              <a:defRPr sz="750">
+                <a:solidFill>
+                  <a:srgbClr val="64748B"/>
+                </a:solidFill>
+              </a:defRPr>
+            </a:pPr>
+            <a:r>
+              <a:t>Roadmap</a:t>
+            </a:r>
+          </a:p>
+        </p:txBody>
+      </p:sp>
+      <p:sp>
+        <p:nvSpPr>
+          <p:cNvPr id="14" name="TextBox 13"/>
+          <p:cNvSpPr txBox="1"/>
+          <p:nvPr/>
+        </p:nvSpPr>
+        <p:spPr>
+          <a:xfrm>
+            <a:off x="8412480" y="6574536"/>
+            <a:ext cx="548640" cy="201168"/>
+          </a:xfrm>
+          <a:prstGeom prst="rect">
+            <a:avLst/>
+          </a:prstGeom>
+          <a:noFill/>
+        </p:spPr>
+        <p:txBody>
+          <a:bodyPr wrap="none">
+            <a:spAutoFit/>
+          </a:bodyPr>
+          <a:lstStyle/>
+          <a:p>
+            <a:pPr algn="r">
+              <a:defRPr sz="800">
+                <a:solidFill>
+                  <a:srgbClr val="64748B"/>
+                </a:solidFill>
+              </a:defRPr>
+            </a:pPr>
+            <a:r>
+              <a:t>20</a:t>
+            </a:r>
+          </a:p>
+        </p:txBody>
+      </p:sp>
+    </p:spTree>
+  </p:cSld>
+  <p:clrMapOvr>
+    <a:masterClrMapping/>
+  </p:clrMapOvr>
+</p:sld>
+</file>
+
+<file path=ppt/slides/slide25.xml><?xml version="1.0" encoding="utf-8"?>
+<p:sld xmlns:a="http://schemas.openxmlformats.org/drawingml/2006/main" xmlns:p="http://schemas.openxmlformats.org/presentationml/2006/main" xmlns:r="http://schemas.openxmlformats.org/officeDocument/2006/relationships">
+  <p:cSld>
+    <p:spTree>
+      <p:nvGrpSpPr>
+        <p:cNvPr id="1" name=""/>
+        <p:cNvGrpSpPr/>
+        <p:nvPr/>
+      </p:nvGrpSpPr>
+      <p:grpSpPr/>
+      <p:sp>
+        <p:nvSpPr>
+          <p:cNvPr id="2" name="Rectangle 1"/>
+          <p:cNvSpPr/>
+          <p:nvPr/>
+        </p:nvSpPr>
+        <p:spPr>
+          <a:xfrm>
+            <a:off x="0" y="0"/>
+            <a:ext cx="9144000" cy="6858000"/>
+          </a:xfrm>
+          <a:prstGeom prst="rect">
+            <a:avLst/>
+          </a:prstGeom>
+          <a:solidFill>
+            <a:srgbClr val="F0F4F8"/>
+          </a:solidFill>
+          <a:ln>
+            <a:noFill/>
+          </a:ln>
+        </p:spPr>
+        <p:style>
+          <a:lnRef idx="1">
+            <a:schemeClr val="accent1"/>
+          </a:lnRef>
+          <a:fillRef idx="3">
+            <a:schemeClr val="accent1"/>
+          </a:fillRef>
+          <a:effectRef idx="2">
+            <a:schemeClr val="accent1"/>
+          </a:effectRef>
+          <a:fontRef idx="minor">
+            <a:schemeClr val="lt1"/>
+          </a:fontRef>
+        </p:style>
+        <p:txBody>
+          <a:bodyPr rtlCol="0" anchor="ctr"/>
+          <a:lstStyle/>
+          <a:p>
+            <a:pPr algn="ctr"/>
+          </a:p>
+        </p:txBody>
+      </p:sp>
+      <p:sp>
+        <p:nvSpPr>
+          <p:cNvPr id="3" name="Rectangle 2"/>
+          <p:cNvSpPr/>
+          <p:nvPr/>
+        </p:nvSpPr>
+        <p:spPr>
+          <a:xfrm>
+            <a:off x="0" y="0"/>
+            <a:ext cx="9144000" cy="658368"/>
+          </a:xfrm>
+          <a:prstGeom prst="rect">
+            <a:avLst/>
+          </a:prstGeom>
+          <a:solidFill>
+            <a:srgbClr val="0A1628"/>
+          </a:solidFill>
+          <a:ln>
+            <a:noFill/>
+          </a:ln>
+        </p:spPr>
+        <p:style>
+          <a:lnRef idx="1">
+            <a:schemeClr val="accent1"/>
+          </a:lnRef>
+          <a:fillRef idx="3">
+            <a:schemeClr val="accent1"/>
+          </a:fillRef>
+          <a:effectRef idx="2">
+            <a:schemeClr val="accent1"/>
+          </a:effectRef>
+          <a:fontRef idx="minor">
+            <a:schemeClr val="lt1"/>
+          </a:fontRef>
+        </p:style>
+        <p:txBody>
+          <a:bodyPr rtlCol="0" anchor="ctr"/>
+          <a:lstStyle/>
+          <a:p>
+            <a:pPr algn="ctr"/>
+          </a:p>
+        </p:txBody>
+      </p:sp>
+      <p:sp>
+        <p:nvSpPr>
+          <p:cNvPr id="4" name="Rectangle 3"/>
+          <p:cNvSpPr/>
+          <p:nvPr/>
+        </p:nvSpPr>
+        <p:spPr>
+          <a:xfrm>
+            <a:off x="0" y="658368"/>
+            <a:ext cx="9144000" cy="36576"/>
+          </a:xfrm>
+          <a:prstGeom prst="rect">
+            <a:avLst/>
+          </a:prstGeom>
+          <a:solidFill>
+            <a:srgbClr val="00A3E0"/>
+          </a:solidFill>
+          <a:ln>
+            <a:noFill/>
+          </a:ln>
+        </p:spPr>
+        <p:style>
+          <a:lnRef idx="1">
+            <a:schemeClr val="accent1"/>
+          </a:lnRef>
+          <a:fillRef idx="3">
+            <a:schemeClr val="accent1"/>
+          </a:fillRef>
+          <a:effectRef idx="2">
+            <a:schemeClr val="accent1"/>
+          </a:effectRef>
+          <a:fontRef idx="minor">
+            <a:schemeClr val="lt1"/>
+          </a:fontRef>
+        </p:style>
+        <p:txBody>
+          <a:bodyPr rtlCol="0" anchor="ctr"/>
+          <a:lstStyle/>
+          <a:p>
+            <a:pPr algn="ctr"/>
+          </a:p>
+        </p:txBody>
+      </p:sp>
+      <p:sp>
+        <p:nvSpPr>
+          <p:cNvPr id="5" name="TextBox 4"/>
+          <p:cNvSpPr txBox="1"/>
+          <p:nvPr/>
+        </p:nvSpPr>
+        <p:spPr>
+          <a:xfrm>
+            <a:off x="384048" y="128016"/>
+            <a:ext cx="6858000" cy="457200"/>
+          </a:xfrm>
+          <a:prstGeom prst="rect">
+            <a:avLst/>
+          </a:prstGeom>
+          <a:noFill/>
+        </p:spPr>
+        <p:txBody>
+          <a:bodyPr wrap="none">
+            <a:spAutoFit/>
+          </a:bodyPr>
+          <a:lstStyle/>
+          <a:p>
+            <a:pPr>
+              <a:defRPr sz="2000" b="1">
+                <a:solidFill>
+                  <a:srgbClr val="FFFFFF"/>
+                </a:solidFill>
+              </a:defRPr>
+            </a:pPr>
+            <a:r>
+              <a:t>Leadership Asks</a:t>
+            </a:r>
+          </a:p>
+        </p:txBody>
+      </p:sp>
+      <p:sp>
+        <p:nvSpPr>
+          <p:cNvPr id="6" name="Rounded Rectangle 5"/>
+          <p:cNvSpPr/>
+          <p:nvPr/>
+        </p:nvSpPr>
+        <p:spPr>
+          <a:xfrm>
+            <a:off x="7452360" y="164592"/>
+            <a:ext cx="1417320" cy="347472"/>
+          </a:xfrm>
+          <a:prstGeom prst="roundRect">
+            <a:avLst/>
+          </a:prstGeom>
+          <a:solidFill>
+            <a:srgbClr val="00A3E0"/>
+          </a:solidFill>
+          <a:ln>
+            <a:noFill/>
+          </a:ln>
+        </p:spPr>
+        <p:style>
+          <a:lnRef idx="1">
+            <a:schemeClr val="accent1"/>
+          </a:lnRef>
+          <a:fillRef idx="3">
+            <a:schemeClr val="accent1"/>
+          </a:fillRef>
+          <a:effectRef idx="2">
+            <a:schemeClr val="accent1"/>
+          </a:effectRef>
+          <a:fontRef idx="minor">
+            <a:schemeClr val="lt1"/>
+          </a:fontRef>
+        </p:style>
+        <p:txBody>
+          <a:bodyPr rtlCol="0" anchor="ctr"/>
+          <a:lstStyle/>
+          <a:p>
+            <a:pPr algn="ctr">
+              <a:defRPr sz="900" b="1">
+                <a:solidFill>
+                  <a:srgbClr val="FFFFFF"/>
+                </a:solidFill>
+              </a:defRPr>
+            </a:pPr>
+            <a:r>
+              <a:t>Asks</a:t>
+            </a:r>
+          </a:p>
+        </p:txBody>
+      </p:sp>
+      <p:sp>
+        <p:nvSpPr>
+          <p:cNvPr id="7" name="Rounded Rectangle 6"/>
+          <p:cNvSpPr/>
+          <p:nvPr/>
+        </p:nvSpPr>
+        <p:spPr>
+          <a:xfrm>
+            <a:off x="320040" y="868680"/>
+            <a:ext cx="8503920" cy="4892040"/>
+          </a:xfrm>
+          <a:prstGeom prst="roundRect">
+            <a:avLst/>
+          </a:prstGeom>
+          <a:solidFill>
+            <a:srgbClr val="E8EEF6"/>
+          </a:solidFill>
+          <a:ln>
+            <a:noFill/>
+          </a:ln>
+        </p:spPr>
+        <p:style>
+          <a:lnRef idx="1">
+            <a:schemeClr val="accent1"/>
+          </a:lnRef>
+          <a:fillRef idx="3">
+            <a:schemeClr val="accent1"/>
+          </a:fillRef>
+          <a:effectRef idx="2">
+            <a:schemeClr val="accent1"/>
+          </a:effectRef>
+          <a:fontRef idx="minor">
+            <a:schemeClr val="lt1"/>
+          </a:fontRef>
+        </p:style>
+        <p:txBody>
+          <a:bodyPr rtlCol="0" anchor="ctr"/>
+          <a:lstStyle/>
+          <a:p>
+            <a:pPr algn="ctr"/>
+          </a:p>
+        </p:txBody>
+      </p:sp>
+      <p:sp>
+        <p:nvSpPr>
+          <p:cNvPr id="8" name="Rectangle 7"/>
+          <p:cNvSpPr/>
+          <p:nvPr/>
+        </p:nvSpPr>
+        <p:spPr>
+          <a:xfrm>
+            <a:off x="320040" y="868680"/>
+            <a:ext cx="54864" cy="4892040"/>
+          </a:xfrm>
+          <a:prstGeom prst="rect">
+            <a:avLst/>
+          </a:prstGeom>
+          <a:solidFill>
+            <a:srgbClr val="00B388"/>
+          </a:solidFill>
+          <a:ln>
+            <a:noFill/>
+          </a:ln>
+        </p:spPr>
+        <p:style>
+          <a:lnRef idx="1">
+            <a:schemeClr val="accent1"/>
+          </a:lnRef>
+          <a:fillRef idx="3">
+            <a:schemeClr val="accent1"/>
+          </a:fillRef>
+          <a:effectRef idx="2">
+            <a:schemeClr val="accent1"/>
+          </a:effectRef>
+          <a:fontRef idx="minor">
+            <a:schemeClr val="lt1"/>
+          </a:fontRef>
+        </p:style>
+        <p:txBody>
+          <a:bodyPr rtlCol="0" anchor="ctr"/>
+          <a:lstStyle/>
+          <a:p>
+            <a:pPr algn="ctr"/>
+          </a:p>
+        </p:txBody>
+      </p:sp>
+      <p:sp>
+        <p:nvSpPr>
+          <p:cNvPr id="9" name="TextBox 8"/>
+          <p:cNvSpPr txBox="1"/>
+          <p:nvPr/>
+        </p:nvSpPr>
+        <p:spPr>
+          <a:xfrm>
+            <a:off x="502920" y="978408"/>
+            <a:ext cx="8229600" cy="320040"/>
+          </a:xfrm>
+          <a:prstGeom prst="rect">
+            <a:avLst/>
+          </a:prstGeom>
+          <a:noFill/>
+        </p:spPr>
+        <p:txBody>
+          <a:bodyPr wrap="none">
+            <a:spAutoFit/>
+          </a:bodyPr>
+          <a:lstStyle/>
+          <a:p>
+            <a:pPr>
+              <a:defRPr sz="1100" b="1">
+                <a:solidFill>
+                  <a:srgbClr val="003241"/>
+                </a:solidFill>
+              </a:defRPr>
+            </a:pPr>
+            <a:r>
+              <a:t>Key points</a:t>
+            </a:r>
+          </a:p>
+        </p:txBody>
+      </p:sp>
+      <p:sp>
+        <p:nvSpPr>
+          <p:cNvPr id="10" name="TextBox 9"/>
+          <p:cNvSpPr txBox="1"/>
+          <p:nvPr/>
+        </p:nvSpPr>
+        <p:spPr>
+          <a:xfrm>
+            <a:off x="502920" y="1307592"/>
+            <a:ext cx="8229600" cy="4389120"/>
+          </a:xfrm>
+          <a:prstGeom prst="rect">
+            <a:avLst/>
+          </a:prstGeom>
+          <a:noFill/>
+        </p:spPr>
+        <p:txBody>
+          <a:bodyPr wrap="square">
+            <a:spAutoFit/>
+          </a:bodyPr>
+          <a:lstStyle/>
+          <a:p>
+            <a:pPr>
+              <a:spcAft>
+                <a:spcPts val="500"/>
+              </a:spcAft>
+              <a:defRPr sz="1000">
+                <a:solidFill>
+                  <a:srgbClr val="1A2332"/>
+                </a:solidFill>
+              </a:defRPr>
+            </a:pPr>
+            <a:r>
+              <a:t>• Roadmap visibility at SDLC start</a:t>
+            </a:r>
+          </a:p>
+          <a:p>
+            <a:pPr>
+              <a:spcAft>
+                <a:spcPts val="500"/>
+              </a:spcAft>
+              <a:defRPr sz="1000">
+                <a:solidFill>
+                  <a:srgbClr val="1A2332"/>
+                </a:solidFill>
+              </a:defRPr>
+            </a:pPr>
+            <a:r>
+              <a:t>• Admin capacity for architecture lead &amp; AI tooling</a:t>
+            </a:r>
+          </a:p>
+          <a:p>
+            <a:pPr>
+              <a:spcAft>
+                <a:spcPts val="500"/>
+              </a:spcAft>
+              <a:defRPr sz="1000">
+                <a:solidFill>
+                  <a:srgbClr val="1A2332"/>
+                </a:solidFill>
+              </a:defRPr>
+            </a:pPr>
+            <a:r>
+              <a:t>• 30-min live walkthrough recommended for Q&amp;A</a:t>
+            </a:r>
+          </a:p>
+        </p:txBody>
+      </p:sp>
+      <p:sp>
+        <p:nvSpPr>
+          <p:cNvPr id="11" name="Rectangle 10"/>
+          <p:cNvSpPr/>
+          <p:nvPr/>
+        </p:nvSpPr>
+        <p:spPr>
+          <a:xfrm>
+            <a:off x="0" y="6291072"/>
+            <a:ext cx="9144000" cy="566928"/>
+          </a:xfrm>
+          <a:prstGeom prst="rect">
+            <a:avLst/>
+          </a:prstGeom>
+          <a:solidFill>
+            <a:srgbClr val="FFFFFF"/>
+          </a:solidFill>
+          <a:ln>
+            <a:noFill/>
+          </a:ln>
+        </p:spPr>
+        <p:style>
+          <a:lnRef idx="1">
+            <a:schemeClr val="accent1"/>
+          </a:lnRef>
+          <a:fillRef idx="3">
+            <a:schemeClr val="accent1"/>
+          </a:fillRef>
+          <a:effectRef idx="2">
+            <a:schemeClr val="accent1"/>
+          </a:effectRef>
+          <a:fontRef idx="minor">
+            <a:schemeClr val="lt1"/>
+          </a:fontRef>
+        </p:style>
+        <p:txBody>
+          <a:bodyPr rtlCol="0" anchor="ctr"/>
+          <a:lstStyle/>
+          <a:p>
+            <a:pPr algn="ctr"/>
+          </a:p>
+        </p:txBody>
+      </p:sp>
+      <p:sp>
+        <p:nvSpPr>
+          <p:cNvPr id="12" name="Rectangle 11"/>
+          <p:cNvSpPr/>
+          <p:nvPr/>
+        </p:nvSpPr>
+        <p:spPr>
+          <a:xfrm>
+            <a:off x="0" y="6291072"/>
+            <a:ext cx="9144000" cy="18288"/>
+          </a:xfrm>
+          <a:prstGeom prst="rect">
+            <a:avLst/>
+          </a:prstGeom>
+          <a:solidFill>
+            <a:srgbClr val="E8EEF6"/>
+          </a:solidFill>
+          <a:ln>
+            <a:noFill/>
+          </a:ln>
+        </p:spPr>
+        <p:style>
+          <a:lnRef idx="1">
+            <a:schemeClr val="accent1"/>
+          </a:lnRef>
+          <a:fillRef idx="3">
+            <a:schemeClr val="accent1"/>
+          </a:fillRef>
+          <a:effectRef idx="2">
+            <a:schemeClr val="accent1"/>
+          </a:effectRef>
+          <a:fontRef idx="minor">
+            <a:schemeClr val="lt1"/>
+          </a:fontRef>
+        </p:style>
+        <p:txBody>
+          <a:bodyPr rtlCol="0" anchor="ctr"/>
+          <a:lstStyle/>
+          <a:p>
+            <a:pPr algn="ctr"/>
+          </a:p>
+        </p:txBody>
+      </p:sp>
+      <p:sp>
+        <p:nvSpPr>
+          <p:cNvPr id="13" name="TextBox 12"/>
+          <p:cNvSpPr txBox="1"/>
+          <p:nvPr/>
+        </p:nvSpPr>
+        <p:spPr>
+          <a:xfrm>
+            <a:off x="384048" y="6355080"/>
+            <a:ext cx="8046720" cy="256032"/>
+          </a:xfrm>
+          <a:prstGeom prst="rect">
+            <a:avLst/>
+          </a:prstGeom>
+          <a:noFill/>
+        </p:spPr>
+        <p:txBody>
+          <a:bodyPr wrap="none">
+            <a:spAutoFit/>
+          </a:bodyPr>
+          <a:lstStyle/>
+          <a:p>
+            <a:pPr>
+              <a:defRPr sz="750" i="1">
+                <a:solidFill>
+                  <a:srgbClr val="64748B"/>
+                </a:solidFill>
+              </a:defRPr>
+            </a:pPr>
+            <a:r>
+              <a:t>Note: Concise executive view: AM-Squad-Leadership-Executive-Glimpse-Aug2026.pptx</a:t>
+            </a:r>
+          </a:p>
+        </p:txBody>
+      </p:sp>
+      <p:sp>
+        <p:nvSpPr>
+          <p:cNvPr id="14" name="TextBox 13"/>
+          <p:cNvSpPr txBox="1"/>
+          <p:nvPr/>
+        </p:nvSpPr>
+        <p:spPr>
+          <a:xfrm>
+            <a:off x="384048" y="6592824"/>
+            <a:ext cx="7772400" cy="201168"/>
+          </a:xfrm>
+          <a:prstGeom prst="rect">
+            <a:avLst/>
+          </a:prstGeom>
+          <a:noFill/>
+        </p:spPr>
+        <p:txBody>
+          <a:bodyPr wrap="none">
+            <a:spAutoFit/>
+          </a:bodyPr>
+          <a:lstStyle/>
+          <a:p>
+            <a:pPr>
+              <a:defRPr sz="750">
+                <a:solidFill>
+                  <a:srgbClr val="64748B"/>
+                </a:solidFill>
+              </a:defRPr>
+            </a:pPr>
+            <a:r>
+              <a:t>Asks</a:t>
+            </a:r>
+          </a:p>
+        </p:txBody>
+      </p:sp>
+      <p:sp>
+        <p:nvSpPr>
+          <p:cNvPr id="15" name="TextBox 14"/>
+          <p:cNvSpPr txBox="1"/>
+          <p:nvPr/>
+        </p:nvSpPr>
+        <p:spPr>
+          <a:xfrm>
+            <a:off x="8412480" y="6592824"/>
+            <a:ext cx="548640" cy="201168"/>
+          </a:xfrm>
+          <a:prstGeom prst="rect">
+            <a:avLst/>
+          </a:prstGeom>
+          <a:noFill/>
+        </p:spPr>
+        <p:txBody>
+          <a:bodyPr wrap="none">
+            <a:spAutoFit/>
+          </a:bodyPr>
+          <a:lstStyle/>
+          <a:p>
+            <a:pPr algn="r">
+              <a:defRPr sz="800">
+                <a:solidFill>
+                  <a:srgbClr val="64748B"/>
+                </a:solidFill>
+              </a:defRPr>
+            </a:pPr>
+            <a:r>
+              <a:t>21</a:t>
+            </a:r>
+          </a:p>
+        </p:txBody>
+      </p:sp>
+    </p:spTree>
+  </p:cSld>
+  <p:clrMapOvr>
+    <a:masterClrMapping/>
+  </p:clrMapOvr>
+</p:sld>
+</file>
+
+<file path=ppt/slides/slide26.xml><?xml version="1.0" encoding="utf-8"?>
+<p:sld xmlns:a="http://schemas.openxmlformats.org/drawingml/2006/main" xmlns:p="http://schemas.openxmlformats.org/presentationml/2006/main" xmlns:r="http://schemas.openxmlformats.org/officeDocument/2006/relationships">
+  <p:cSld>
+    <p:spTree>
+      <p:nvGrpSpPr>
+        <p:cNvPr id="1" name=""/>
+        <p:cNvGrpSpPr/>
+        <p:nvPr/>
+      </p:nvGrpSpPr>
+      <p:grpSpPr/>
+      <p:sp>
+        <p:nvSpPr>
+          <p:cNvPr id="2" name="Rectangle 1"/>
+          <p:cNvSpPr/>
+          <p:nvPr/>
+        </p:nvSpPr>
+        <p:spPr>
+          <a:xfrm>
+            <a:off x="0" y="0"/>
+            <a:ext cx="9144000" cy="6858000"/>
+          </a:xfrm>
+          <a:prstGeom prst="rect">
+            <a:avLst/>
+          </a:prstGeom>
+          <a:solidFill>
             <a:srgbClr val="0A1628"/>
           </a:solidFill>
           <a:ln>
@@ -11817,7 +14771,7 @@
               </a:defRPr>
             </a:pPr>
             <a:r>
-              <a:t>GitLab Merges by Repository</a:t>
+              <a:t>Executive Headline</a:t>
             </a:r>
           </a:p>
         </p:txBody>
@@ -11869,45 +14823,21 @@
               </a:defRPr>
             </a:pPr>
             <a:r>
-              <a:t>GitLab</a:t>
-            </a:r>
-          </a:p>
-        </p:txBody>
-      </p:sp>
-      <p:pic>
-        <p:nvPicPr>
-          <p:cNvPr id="7" name="Picture 6" descr="01-gitlab-mrs-by-month.png"/>
-          <p:cNvPicPr>
-            <a:picLocks noChangeAspect="1"/>
-          </p:cNvPicPr>
-          <p:nvPr/>
-        </p:nvPicPr>
-        <p:blipFill>
-          <a:blip r:embed="rId2"/>
-          <a:stretch>
-            <a:fillRect/>
-          </a:stretch>
-        </p:blipFill>
+              <a:t>Overview</a:t>
+            </a:r>
+          </a:p>
+        </p:txBody>
+      </p:sp>
+      <p:sp>
+        <p:nvSpPr>
+          <p:cNvPr id="7" name="Rounded Rectangle 6"/>
+          <p:cNvSpPr/>
+          <p:nvPr/>
+        </p:nvSpPr>
         <p:spPr>
           <a:xfrm>
             <a:off x="320040" y="868680"/>
-            <a:ext cx="4892040" cy="2718160"/>
-          </a:xfrm>
-          <a:prstGeom prst="rect">
-            <a:avLst/>
-          </a:prstGeom>
-        </p:spPr>
-      </p:pic>
-      <p:sp>
-        <p:nvSpPr>
-          <p:cNvPr id="8" name="Rounded Rectangle 7"/>
-          <p:cNvSpPr/>
-          <p:nvPr/>
-        </p:nvSpPr>
-        <p:spPr>
-          <a:xfrm>
-            <a:off x="5349240" y="868680"/>
-            <a:ext cx="3474720" cy="5349240"/>
+            <a:ext cx="8503920" cy="4892040"/>
           </a:xfrm>
           <a:prstGeom prst="roundRect">
             <a:avLst/>
@@ -11943,14 +14873,14 @@
       </p:sp>
       <p:sp>
         <p:nvSpPr>
-          <p:cNvPr id="9" name="Rectangle 8"/>
-          <p:cNvSpPr/>
-          <p:nvPr/>
-        </p:nvSpPr>
-        <p:spPr>
-          <a:xfrm>
-            <a:off x="5349240" y="868680"/>
-            <a:ext cx="54864" cy="5349240"/>
+          <p:cNvPr id="8" name="Rectangle 7"/>
+          <p:cNvSpPr/>
+          <p:nvPr/>
+        </p:nvSpPr>
+        <p:spPr>
+          <a:xfrm>
+            <a:off x="320040" y="868680"/>
+            <a:ext cx="54864" cy="4892040"/>
           </a:xfrm>
           <a:prstGeom prst="rect">
             <a:avLst/>
@@ -11986,14 +14916,14 @@
       </p:sp>
       <p:sp>
         <p:nvSpPr>
-          <p:cNvPr id="10" name="TextBox 9"/>
+          <p:cNvPr id="9" name="TextBox 8"/>
           <p:cNvSpPr txBox="1"/>
           <p:nvPr/>
         </p:nvSpPr>
         <p:spPr>
           <a:xfrm>
-            <a:off x="5532120" y="978408"/>
-            <a:ext cx="3200400" cy="320040"/>
+            <a:off x="502920" y="978408"/>
+            <a:ext cx="8229600" cy="320040"/>
           </a:xfrm>
           <a:prstGeom prst="rect">
             <a:avLst/>
@@ -12014,21 +14944,21 @@
               </a:defRPr>
             </a:pPr>
             <a:r>
-              <a:t>Delivery velocity</a:t>
-            </a:r>
-          </a:p>
-        </p:txBody>
-      </p:sp>
-      <p:sp>
-        <p:nvSpPr>
-          <p:cNvPr id="11" name="TextBox 10"/>
+              <a:t>Key points</a:t>
+            </a:r>
+          </a:p>
+        </p:txBody>
+      </p:sp>
+      <p:sp>
+        <p:nvSpPr>
+          <p:cNvPr id="10" name="TextBox 9"/>
           <p:cNvSpPr txBox="1"/>
           <p:nvPr/>
         </p:nvSpPr>
         <p:spPr>
           <a:xfrm>
-            <a:off x="5532120" y="1307592"/>
-            <a:ext cx="3200400" cy="4846320"/>
+            <a:off x="502920" y="1307592"/>
+            <a:ext cx="8229600" cy="4389120"/>
           </a:xfrm>
           <a:prstGeom prst="rect">
             <a:avLst/>
@@ -12052,7 +14982,7 @@
               </a:defRPr>
             </a:pPr>
             <a:r>
-              <a:t>• 116 total merges</a:t>
+              <a:t>• 121 merged changes to main across 3 automation repositories</a:t>
             </a:r>
           </a:p>
           <a:p>
@@ -12067,7 +14997,7 @@
               </a:defRPr>
             </a:pPr>
             <a:r>
-              <a:t>• Peak Jun–Jul MSC sprint</a:t>
+              <a:t>• 545 Jira story points · 245 work items · 20 bugs found</a:t>
             </a:r>
           </a:p>
           <a:p>
@@ -12082,8 +15012,81 @@
               </a:defRPr>
             </a:pPr>
             <a:r>
-              <a:t>• V2 + V3 + API repos</a:t>
-            </a:r>
+              <a:t>• ~80% of monthly release validations automated (17 FTE → 2 FTE)</a:t>
+            </a:r>
+          </a:p>
+          <a:p>
+            <a:pPr>
+              <a:spcAft>
+                <a:spcPts val="500"/>
+              </a:spcAft>
+              <a:defRPr sz="1000">
+                <a:solidFill>
+                  <a:srgbClr val="1A2332"/>
+                </a:solidFill>
+              </a:defRPr>
+            </a:pPr>
+            <a:r>
+              <a:t>• Unite MSC rescued — Mobile 2 at 25/25 endpoints, ~50% ETA savings</a:t>
+            </a:r>
+          </a:p>
+          <a:p>
+            <a:pPr>
+              <a:spcAft>
+                <a:spcPts val="500"/>
+              </a:spcAft>
+              <a:defRPr sz="1000">
+                <a:solidFill>
+                  <a:srgbClr val="1A2332"/>
+                </a:solidFill>
+              </a:defRPr>
+            </a:pPr>
+            <a:r>
+              <a:t>• Six parallel tracks: V2 · V3 · API/MSC · Perf · Pipeline · Standards</a:t>
+            </a:r>
+          </a:p>
+        </p:txBody>
+      </p:sp>
+      <p:sp>
+        <p:nvSpPr>
+          <p:cNvPr id="11" name="Rectangle 10"/>
+          <p:cNvSpPr/>
+          <p:nvPr/>
+        </p:nvSpPr>
+        <p:spPr>
+          <a:xfrm>
+            <a:off x="0" y="6291072"/>
+            <a:ext cx="9144000" cy="566928"/>
+          </a:xfrm>
+          <a:prstGeom prst="rect">
+            <a:avLst/>
+          </a:prstGeom>
+          <a:solidFill>
+            <a:srgbClr val="FFFFFF"/>
+          </a:solidFill>
+          <a:ln>
+            <a:noFill/>
+          </a:ln>
+        </p:spPr>
+        <p:style>
+          <a:lnRef idx="1">
+            <a:schemeClr val="accent1"/>
+          </a:lnRef>
+          <a:fillRef idx="3">
+            <a:schemeClr val="accent1"/>
+          </a:fillRef>
+          <a:effectRef idx="2">
+            <a:schemeClr val="accent1"/>
+          </a:effectRef>
+          <a:fontRef idx="minor">
+            <a:schemeClr val="lt1"/>
+          </a:fontRef>
+        </p:style>
+        <p:txBody>
+          <a:bodyPr rtlCol="0" anchor="ctr"/>
+          <a:lstStyle/>
+          <a:p>
+            <a:pPr algn="ctr"/>
           </a:p>
         </p:txBody>
       </p:sp>
@@ -12095,14 +15098,14 @@
         </p:nvSpPr>
         <p:spPr>
           <a:xfrm>
-            <a:off x="0" y="6510528"/>
-            <a:ext cx="9144000" cy="347472"/>
-          </a:xfrm>
-          <a:prstGeom prst="rect">
-            <a:avLst/>
-          </a:prstGeom>
-          <a:solidFill>
-            <a:srgbClr val="FFFFFF"/>
+            <a:off x="0" y="6291072"/>
+            <a:ext cx="9144000" cy="18288"/>
+          </a:xfrm>
+          <a:prstGeom prst="rect">
+            <a:avLst/>
+          </a:prstGeom>
+          <a:solidFill>
+            <a:srgbClr val="E8EEF6"/>
           </a:solidFill>
           <a:ln>
             <a:noFill/>
@@ -12132,57 +15135,14 @@
       </p:sp>
       <p:sp>
         <p:nvSpPr>
-          <p:cNvPr id="13" name="Rectangle 12"/>
-          <p:cNvSpPr/>
-          <p:nvPr/>
-        </p:nvSpPr>
-        <p:spPr>
-          <a:xfrm>
-            <a:off x="0" y="6510528"/>
-            <a:ext cx="9144000" cy="18288"/>
-          </a:xfrm>
-          <a:prstGeom prst="rect">
-            <a:avLst/>
-          </a:prstGeom>
-          <a:solidFill>
-            <a:srgbClr val="E8EEF6"/>
-          </a:solidFill>
-          <a:ln>
-            <a:noFill/>
-          </a:ln>
-        </p:spPr>
-        <p:style>
-          <a:lnRef idx="1">
-            <a:schemeClr val="accent1"/>
-          </a:lnRef>
-          <a:fillRef idx="3">
-            <a:schemeClr val="accent1"/>
-          </a:fillRef>
-          <a:effectRef idx="2">
-            <a:schemeClr val="accent1"/>
-          </a:effectRef>
-          <a:fontRef idx="minor">
-            <a:schemeClr val="lt1"/>
-          </a:fontRef>
-        </p:style>
-        <p:txBody>
-          <a:bodyPr rtlCol="0" anchor="ctr"/>
-          <a:lstStyle/>
-          <a:p>
-            <a:pPr algn="ctr"/>
-          </a:p>
-        </p:txBody>
-      </p:sp>
-      <p:sp>
-        <p:nvSpPr>
-          <p:cNvPr id="14" name="TextBox 13"/>
+          <p:cNvPr id="13" name="TextBox 12"/>
           <p:cNvSpPr txBox="1"/>
           <p:nvPr/>
         </p:nvSpPr>
         <p:spPr>
           <a:xfrm>
-            <a:off x="384048" y="6583680"/>
-            <a:ext cx="7772400" cy="228600"/>
+            <a:off x="384048" y="6355080"/>
+            <a:ext cx="8046720" cy="256032"/>
           </a:xfrm>
           <a:prstGeom prst="rect">
             <a:avLst/>
@@ -12196,28 +15156,28 @@
           <a:lstStyle/>
           <a:p>
             <a:pPr>
-              <a:defRPr sz="800">
+              <a:defRPr sz="750" i="1">
                 <a:solidFill>
                   <a:srgbClr val="64748B"/>
                 </a:solidFill>
               </a:defRPr>
             </a:pPr>
             <a:r>
-              <a:t>GitLab MR export</a:t>
-            </a:r>
-          </a:p>
-        </p:txBody>
-      </p:sp>
-      <p:sp>
-        <p:nvSpPr>
-          <p:cNvPr id="15" name="TextBox 14"/>
+              <a:t>Note: Apr–Aug reporting window on a team formed Q2 2025 — acceleration phase, not greenfield.</a:t>
+            </a:r>
+          </a:p>
+        </p:txBody>
+      </p:sp>
+      <p:sp>
+        <p:nvSpPr>
+          <p:cNvPr id="14" name="TextBox 13"/>
           <p:cNvSpPr txBox="1"/>
           <p:nvPr/>
         </p:nvSpPr>
         <p:spPr>
           <a:xfrm>
-            <a:off x="8412480" y="6583680"/>
-            <a:ext cx="548640" cy="228600"/>
+            <a:off x="384048" y="6592824"/>
+            <a:ext cx="7772400" cy="201168"/>
           </a:xfrm>
           <a:prstGeom prst="rect">
             <a:avLst/>
@@ -12230,8 +15190,43 @@
           </a:bodyPr>
           <a:lstStyle/>
           <a:p>
+            <a:pPr>
+              <a:defRPr sz="750">
+                <a:solidFill>
+                  <a:srgbClr val="64748B"/>
+                </a:solidFill>
+              </a:defRPr>
+            </a:pPr>
+            <a:r>
+              <a:t>Executive summary</a:t>
+            </a:r>
+          </a:p>
+        </p:txBody>
+      </p:sp>
+      <p:sp>
+        <p:nvSpPr>
+          <p:cNvPr id="15" name="TextBox 14"/>
+          <p:cNvSpPr txBox="1"/>
+          <p:nvPr/>
+        </p:nvSpPr>
+        <p:spPr>
+          <a:xfrm>
+            <a:off x="8412480" y="6592824"/>
+            <a:ext cx="548640" cy="201168"/>
+          </a:xfrm>
+          <a:prstGeom prst="rect">
+            <a:avLst/>
+          </a:prstGeom>
+          <a:noFill/>
+        </p:spPr>
+        <p:txBody>
+          <a:bodyPr wrap="none">
+            <a:spAutoFit/>
+          </a:bodyPr>
+          <a:lstStyle/>
+          <a:p>
             <a:pPr algn="r">
-              <a:defRPr sz="900">
+              <a:defRPr sz="800">
                 <a:solidFill>
                   <a:srgbClr val="64748B"/>
                 </a:solidFill>
@@ -12420,7 +15415,7 @@
               </a:defRPr>
             </a:pPr>
             <a:r>
-              <a:t>Monthly Automation Delivery</a:t>
+              <a:t>GitLab Delivery Velocity</a:t>
             </a:r>
           </a:p>
         </p:txBody>
@@ -12472,14 +15467,14 @@
               </a:defRPr>
             </a:pPr>
             <a:r>
-              <a:t>Automation</a:t>
+              <a:t>GitLab</a:t>
             </a:r>
           </a:p>
         </p:txBody>
       </p:sp>
       <p:pic>
         <p:nvPicPr>
-          <p:cNvPr id="7" name="Picture 6" descr="08-monthly-automation-test-cases-added.png"/>
+          <p:cNvPr id="7" name="Picture 6" descr="01-gitlab-mrs-by-month.png"/>
           <p:cNvPicPr>
             <a:picLocks noChangeAspect="1"/>
           </p:cNvPicPr>
@@ -12494,7 +15489,7 @@
         <p:spPr>
           <a:xfrm>
             <a:off x="320040" y="868680"/>
-            <a:ext cx="4892040" cy="2625210"/>
+            <a:ext cx="4892040" cy="2718160"/>
           </a:xfrm>
           <a:prstGeom prst="rect">
             <a:avLst/>
@@ -12510,7 +15505,7 @@
         <p:spPr>
           <a:xfrm>
             <a:off x="5349240" y="868680"/>
-            <a:ext cx="3474720" cy="5349240"/>
+            <a:ext cx="3474720" cy="5074920"/>
           </a:xfrm>
           <a:prstGeom prst="roundRect">
             <a:avLst/>
@@ -12553,7 +15548,7 @@
         <p:spPr>
           <a:xfrm>
             <a:off x="5349240" y="868680"/>
-            <a:ext cx="54864" cy="5349240"/>
+            <a:ext cx="54864" cy="5074920"/>
           </a:xfrm>
           <a:prstGeom prst="rect">
             <a:avLst/>
@@ -12617,7 +15612,7 @@
               </a:defRPr>
             </a:pPr>
             <a:r>
-              <a:t>Period delivery (not inventory)</a:t>
+              <a:t>What this shows</a:t>
             </a:r>
           </a:p>
         </p:txBody>
@@ -12631,7 +15626,7 @@
         <p:spPr>
           <a:xfrm>
             <a:off x="5532120" y="1307592"/>
-            <a:ext cx="3200400" cy="4846320"/>
+            <a:ext cx="3200400" cy="4572000"/>
           </a:xfrm>
           <a:prstGeom prst="rect">
             <a:avLst/>
@@ -12655,7 +15650,7 @@
               </a:defRPr>
             </a:pPr>
             <a:r>
-              <a:t>• We are NOT claiming 1,212 + 592 + 442 test cases — different metrics (period delivery vs inventory).</a:t>
+              <a:t>• 121 total merges</a:t>
             </a:r>
           </a:p>
           <a:p>
@@ -12670,7 +15665,7 @@
               </a:defRPr>
             </a:pPr>
             <a:r>
-              <a:t>• ~1,212 is estimated new coverage closed in Apr–Aug from 225 Jira stories.</a:t>
+              <a:t>• July peak: 38 merges during MSC sprint</a:t>
             </a:r>
           </a:p>
           <a:p>
@@ -12685,37 +15680,7 @@
               </a:defRPr>
             </a:pPr>
             <a:r>
-              <a:t>• 592 V2 + 442 V3 + 323 perf = what runs in nightly regression today, built over ~1 year.</a:t>
-            </a:r>
-          </a:p>
-          <a:p>
-            <a:pPr>
-              <a:spcAft>
-                <a:spcPts val="500"/>
-              </a:spcAft>
-              <a:defRPr sz="1000">
-                <a:solidFill>
-                  <a:srgbClr val="1A2332"/>
-                </a:solidFill>
-              </a:defRPr>
-            </a:pPr>
-            <a:r>
-              <a:t>• Apr–Aug shows acceleration (MSC API sprint Jun–Jul), not greenfield from zero.</a:t>
-            </a:r>
-          </a:p>
-          <a:p>
-            <a:pPr>
-              <a:spcAft>
-                <a:spcPts val="500"/>
-              </a:spcAft>
-              <a:defRPr sz="1000">
-                <a:solidFill>
-                  <a:srgbClr val="1A2332"/>
-                </a:solidFill>
-              </a:defRPr>
-            </a:pPr>
-            <a:r>
-              <a:t>• Test case counts include multi-plan, multi-env, and pos/neg permutations — industry-standard perf/UI counting.</a:t>
+              <a:t>• Separate from test case counts</a:t>
             </a:r>
           </a:p>
         </p:txBody>
@@ -12728,8 +15693,8 @@
         </p:nvSpPr>
         <p:spPr>
           <a:xfrm>
-            <a:off x="0" y="6510528"/>
-            <a:ext cx="9144000" cy="347472"/>
+            <a:off x="0" y="6291072"/>
+            <a:ext cx="9144000" cy="566928"/>
           </a:xfrm>
           <a:prstGeom prst="rect">
             <a:avLst/>
@@ -12771,7 +15736,7 @@
         </p:nvSpPr>
         <p:spPr>
           <a:xfrm>
-            <a:off x="0" y="6510528"/>
+            <a:off x="0" y="6291072"/>
             <a:ext cx="9144000" cy="18288"/>
           </a:xfrm>
           <a:prstGeom prst="rect">
@@ -12814,8 +15779,8 @@
         </p:nvSpPr>
         <p:spPr>
           <a:xfrm>
-            <a:off x="384048" y="6583680"/>
-            <a:ext cx="7772400" cy="228600"/>
+            <a:off x="384048" y="6355080"/>
+            <a:ext cx="8046720" cy="256032"/>
           </a:xfrm>
           <a:prstGeom prst="rect">
             <a:avLst/>
@@ -12829,14 +15794,14 @@
           <a:lstStyle/>
           <a:p>
             <a:pPr>
-              <a:defRPr sz="800">
+              <a:defRPr sz="750" i="1">
                 <a:solidFill>
                   <a:srgbClr val="64748B"/>
                 </a:solidFill>
               </a:defRPr>
             </a:pPr>
             <a:r>
-              <a:t>Jira resolved stories · see 10-data-confidence-and-leadership-faq.md</a:t>
+              <a:t>Note: July = 38 merges (highest month). Merge count ≠ test cases or story points.</a:t>
             </a:r>
           </a:p>
         </p:txBody>
@@ -12849,8 +15814,8 @@
         </p:nvSpPr>
         <p:spPr>
           <a:xfrm>
-            <a:off x="8412480" y="6583680"/>
-            <a:ext cx="548640" cy="228600"/>
+            <a:off x="384048" y="6592824"/>
+            <a:ext cx="7772400" cy="201168"/>
           </a:xfrm>
           <a:prstGeom prst="rect">
             <a:avLst/>
@@ -12863,8 +15828,43 @@
           </a:bodyPr>
           <a:lstStyle/>
           <a:p>
+            <a:pPr>
+              <a:defRPr sz="750">
+                <a:solidFill>
+                  <a:srgbClr val="64748B"/>
+                </a:solidFill>
+              </a:defRPr>
+            </a:pPr>
+            <a:r>
+              <a:t>GitLab MR export · Apr 1 – Aug 4, 2026</a:t>
+            </a:r>
+          </a:p>
+        </p:txBody>
+      </p:sp>
+      <p:sp>
+        <p:nvSpPr>
+          <p:cNvPr id="16" name="TextBox 15"/>
+          <p:cNvSpPr txBox="1"/>
+          <p:nvPr/>
+        </p:nvSpPr>
+        <p:spPr>
+          <a:xfrm>
+            <a:off x="8412480" y="6592824"/>
+            <a:ext cx="548640" cy="201168"/>
+          </a:xfrm>
+          <a:prstGeom prst="rect">
+            <a:avLst/>
+          </a:prstGeom>
+          <a:noFill/>
+        </p:spPr>
+        <p:txBody>
+          <a:bodyPr wrap="none">
+            <a:spAutoFit/>
+          </a:bodyPr>
+          <a:lstStyle/>
+          <a:p>
             <a:pPr algn="r">
-              <a:defRPr sz="900">
+              <a:defRPr sz="800">
                 <a:solidFill>
                   <a:srgbClr val="64748B"/>
                 </a:solidFill>
@@ -13053,7 +16053,7 @@
               </a:defRPr>
             </a:pPr>
             <a:r>
-              <a:t>Jira Story Points</a:t>
+              <a:t>Monthly Automation Delivery</a:t>
             </a:r>
           </a:p>
         </p:txBody>
@@ -13105,14 +16105,14 @@
               </a:defRPr>
             </a:pPr>
             <a:r>
-              <a:t>Jira</a:t>
+              <a:t>Automation</a:t>
             </a:r>
           </a:p>
         </p:txBody>
       </p:sp>
       <p:pic>
         <p:nvPicPr>
-          <p:cNvPr id="7" name="Picture 6" descr="09-jira-story-points-by-sprint.png"/>
+          <p:cNvPr id="7" name="Picture 6" descr="08-monthly-automation-test-cases-added.png"/>
           <p:cNvPicPr>
             <a:picLocks noChangeAspect="1"/>
           </p:cNvPicPr>
@@ -13127,7 +16127,7 @@
         <p:spPr>
           <a:xfrm>
             <a:off x="320040" y="868680"/>
-            <a:ext cx="4892040" cy="2410615"/>
+            <a:ext cx="4892040" cy="2625210"/>
           </a:xfrm>
           <a:prstGeom prst="rect">
             <a:avLst/>
@@ -13143,7 +16143,7 @@
         <p:spPr>
           <a:xfrm>
             <a:off x="5349240" y="868680"/>
-            <a:ext cx="3474720" cy="5349240"/>
+            <a:ext cx="3474720" cy="5074920"/>
           </a:xfrm>
           <a:prstGeom prst="roundRect">
             <a:avLst/>
@@ -13186,7 +16186,7 @@
         <p:spPr>
           <a:xfrm>
             <a:off x="5349240" y="868680"/>
-            <a:ext cx="54864" cy="5349240"/>
+            <a:ext cx="54864" cy="5074920"/>
           </a:xfrm>
           <a:prstGeom prst="rect">
             <a:avLst/>
@@ -13250,7 +16250,7 @@
               </a:defRPr>
             </a:pPr>
             <a:r>
-              <a:t>Sprint delivery</a:t>
+              <a:t>Period delivery (not inventory)</a:t>
             </a:r>
           </a:p>
         </p:txBody>
@@ -13264,7 +16264,7 @@
         <p:spPr>
           <a:xfrm>
             <a:off x="5532120" y="1307592"/>
-            <a:ext cx="3200400" cy="4846320"/>
+            <a:ext cx="3200400" cy="4572000"/>
           </a:xfrm>
           <a:prstGeom prst="rect">
             <a:avLst/>
@@ -13288,7 +16288,7 @@
               </a:defRPr>
             </a:pPr>
             <a:r>
-              <a:t>• 545 SP · 245 items</a:t>
+              <a:t>• 592 V2 + 442 V3 = Stage1 nightly snapshots (Aug 4) — built since Q2 2025, not in Apr–Aug alone.</a:t>
             </a:r>
           </a:p>
           <a:p>
@@ -13303,7 +16303,37 @@
               </a:defRPr>
             </a:pPr>
             <a:r>
-              <a:t>• 20 bugs found</a:t>
+              <a:t>• Excludes smoke (Stage 2/5), integration suites, and +33 CSR Actions pending wire — more coverage exists.</a:t>
+            </a:r>
+          </a:p>
+          <a:p>
+            <a:pPr>
+              <a:spcAft>
+                <a:spcPts val="500"/>
+              </a:spcAft>
+              <a:defRPr sz="1000">
+                <a:solidFill>
+                  <a:srgbClr val="1A2332"/>
+                </a:solidFill>
+              </a:defRPr>
+            </a:pPr>
+            <a:r>
+              <a:t>• We are NOT claiming 1,212 + 592 + 442 — period delivery vs inventory are different metrics.</a:t>
+            </a:r>
+          </a:p>
+          <a:p>
+            <a:pPr>
+              <a:spcAft>
+                <a:spcPts val="500"/>
+              </a:spcAft>
+              <a:defRPr sz="1000">
+                <a:solidFill>
+                  <a:srgbClr val="1A2332"/>
+                </a:solidFill>
+              </a:defRPr>
+            </a:pPr>
+            <a:r>
+              <a:t>• ~1,212 estimated new coverage in Apr–Aug from 225 Jira stories; nightly totals include pre-April foundation.</a:t>
             </a:r>
           </a:p>
         </p:txBody>
@@ -13316,8 +16346,8 @@
         </p:nvSpPr>
         <p:spPr>
           <a:xfrm>
-            <a:off x="0" y="6510528"/>
-            <a:ext cx="9144000" cy="347472"/>
+            <a:off x="0" y="6291072"/>
+            <a:ext cx="9144000" cy="566928"/>
           </a:xfrm>
           <a:prstGeom prst="rect">
             <a:avLst/>
@@ -13359,7 +16389,7 @@
         </p:nvSpPr>
         <p:spPr>
           <a:xfrm>
-            <a:off x="0" y="6510528"/>
+            <a:off x="0" y="6291072"/>
             <a:ext cx="9144000" cy="18288"/>
           </a:xfrm>
           <a:prstGeom prst="rect">
@@ -13402,8 +16432,8 @@
         </p:nvSpPr>
         <p:spPr>
           <a:xfrm>
-            <a:off x="384048" y="6583680"/>
-            <a:ext cx="7772400" cy="228600"/>
+            <a:off x="384048" y="6355080"/>
+            <a:ext cx="8046720" cy="256032"/>
           </a:xfrm>
           <a:prstGeom prst="rect">
             <a:avLst/>
@@ -13417,14 +16447,14 @@
           <a:lstStyle/>
           <a:p>
             <a:pPr>
-              <a:defRPr sz="800">
+              <a:defRPr sz="750" i="1">
                 <a:solidFill>
                   <a:srgbClr val="64748B"/>
                 </a:solidFill>
               </a:defRPr>
             </a:pPr>
             <a:r>
-              <a:t>Jira AMSQUAD</a:t>
+              <a:t>Note: Estimated from 225 closed Jira stories — period velocity only, not added to nightly inventory.</a:t>
             </a:r>
           </a:p>
         </p:txBody>
@@ -13437,8 +16467,8 @@
         </p:nvSpPr>
         <p:spPr>
           <a:xfrm>
-            <a:off x="8412480" y="6583680"/>
-            <a:ext cx="548640" cy="228600"/>
+            <a:off x="384048" y="6592824"/>
+            <a:ext cx="7772400" cy="201168"/>
           </a:xfrm>
           <a:prstGeom prst="rect">
             <a:avLst/>
@@ -13451,8 +16481,43 @@
           </a:bodyPr>
           <a:lstStyle/>
           <a:p>
+            <a:pPr>
+              <a:defRPr sz="750">
+                <a:solidFill>
+                  <a:srgbClr val="64748B"/>
+                </a:solidFill>
+              </a:defRPr>
+            </a:pPr>
+            <a:r>
+              <a:t>Jira AMSQUAD · period delivery estimate</a:t>
+            </a:r>
+          </a:p>
+        </p:txBody>
+      </p:sp>
+      <p:sp>
+        <p:nvSpPr>
+          <p:cNvPr id="16" name="TextBox 15"/>
+          <p:cNvSpPr txBox="1"/>
+          <p:nvPr/>
+        </p:nvSpPr>
+        <p:spPr>
+          <a:xfrm>
+            <a:off x="8412480" y="6592824"/>
+            <a:ext cx="548640" cy="201168"/>
+          </a:xfrm>
+          <a:prstGeom prst="rect">
+            <a:avLst/>
+          </a:prstGeom>
+          <a:noFill/>
+        </p:spPr>
+        <p:txBody>
+          <a:bodyPr wrap="none">
+            <a:spAutoFit/>
+          </a:bodyPr>
+          <a:lstStyle/>
+          <a:p>
             <a:pPr algn="r">
-              <a:defRPr sz="900">
+              <a:defRPr sz="800">
                 <a:solidFill>
                   <a:srgbClr val="64748B"/>
                 </a:solidFill>
@@ -13641,7 +16706,7 @@
               </a:defRPr>
             </a:pPr>
             <a:r>
-              <a:t>Automation Bugs Discovered</a:t>
+              <a:t>Jira Sprint Delivery</a:t>
             </a:r>
           </a:p>
         </p:txBody>
@@ -13693,14 +16758,14 @@
               </a:defRPr>
             </a:pPr>
             <a:r>
-              <a:t>Quality</a:t>
+              <a:t>Jira</a:t>
             </a:r>
           </a:p>
         </p:txBody>
       </p:sp>
       <p:pic>
         <p:nvPicPr>
-          <p:cNvPr id="7" name="Picture 6" descr="10-jira-automation-bugs-by-sprint.png"/>
+          <p:cNvPr id="7" name="Picture 6" descr="09-jira-story-points-by-sprint.png"/>
           <p:cNvPicPr>
             <a:picLocks noChangeAspect="1"/>
           </p:cNvPicPr>
@@ -13715,7 +16780,7 @@
         <p:spPr>
           <a:xfrm>
             <a:off x="320040" y="868680"/>
-            <a:ext cx="4892040" cy="2287527"/>
+            <a:ext cx="4892040" cy="2410615"/>
           </a:xfrm>
           <a:prstGeom prst="rect">
             <a:avLst/>
@@ -13731,7 +16796,7 @@
         <p:spPr>
           <a:xfrm>
             <a:off x="5349240" y="868680"/>
-            <a:ext cx="3474720" cy="5349240"/>
+            <a:ext cx="3474720" cy="5074920"/>
           </a:xfrm>
           <a:prstGeom prst="roundRect">
             <a:avLst/>
@@ -13774,7 +16839,7 @@
         <p:spPr>
           <a:xfrm>
             <a:off x="5349240" y="868680"/>
-            <a:ext cx="54864" cy="5349240"/>
+            <a:ext cx="54864" cy="5074920"/>
           </a:xfrm>
           <a:prstGeom prst="rect">
             <a:avLst/>
@@ -13838,7 +16903,7 @@
               </a:defRPr>
             </a:pPr>
             <a:r>
-              <a:t>Quality signal</a:t>
+              <a:t>Sprint outcomes</a:t>
             </a:r>
           </a:p>
         </p:txBody>
@@ -13852,7 +16917,7 @@
         <p:spPr>
           <a:xfrm>
             <a:off x="5532120" y="1307592"/>
-            <a:ext cx="3200400" cy="4846320"/>
+            <a:ext cx="3200400" cy="4572000"/>
           </a:xfrm>
           <a:prstGeom prst="rect">
             <a:avLst/>
@@ -13876,7 +16941,7 @@
               </a:defRPr>
             </a:pPr>
             <a:r>
-              <a:t>• Defects found via nightly regression triage</a:t>
+              <a:t>• 245 items · 545 SP</a:t>
             </a:r>
           </a:p>
           <a:p>
@@ -13891,7 +16956,7 @@
               </a:defRPr>
             </a:pPr>
             <a:r>
-              <a:t>• Fed into automation bug lifecycle</a:t>
+              <a:t>• 20 bugs logged</a:t>
             </a:r>
           </a:p>
         </p:txBody>
@@ -13904,8 +16969,8 @@
         </p:nvSpPr>
         <p:spPr>
           <a:xfrm>
-            <a:off x="0" y="6510528"/>
-            <a:ext cx="9144000" cy="347472"/>
+            <a:off x="0" y="6291072"/>
+            <a:ext cx="9144000" cy="566928"/>
           </a:xfrm>
           <a:prstGeom prst="rect">
             <a:avLst/>
@@ -13947,7 +17012,7 @@
         </p:nvSpPr>
         <p:spPr>
           <a:xfrm>
-            <a:off x="0" y="6510528"/>
+            <a:off x="0" y="6291072"/>
             <a:ext cx="9144000" cy="18288"/>
           </a:xfrm>
           <a:prstGeom prst="rect">
@@ -13990,8 +17055,8 @@
         </p:nvSpPr>
         <p:spPr>
           <a:xfrm>
-            <a:off x="384048" y="6583680"/>
-            <a:ext cx="7772400" cy="228600"/>
+            <a:off x="384048" y="6355080"/>
+            <a:ext cx="8046720" cy="256032"/>
           </a:xfrm>
           <a:prstGeom prst="rect">
             <a:avLst/>
@@ -14005,14 +17070,14 @@
           <a:lstStyle/>
           <a:p>
             <a:pPr>
-              <a:defRPr sz="800">
+              <a:defRPr sz="750" i="1">
                 <a:solidFill>
                   <a:srgbClr val="64748B"/>
                 </a:solidFill>
               </a:defRPr>
             </a:pPr>
             <a:r>
-              <a:t>Jira AMSQUAD</a:t>
+              <a:t>Note: Story points = committed sprint work closed across 9 sprints in the reporting window.</a:t>
             </a:r>
           </a:p>
         </p:txBody>
@@ -14025,8 +17090,8 @@
         </p:nvSpPr>
         <p:spPr>
           <a:xfrm>
-            <a:off x="8412480" y="6583680"/>
-            <a:ext cx="548640" cy="228600"/>
+            <a:off x="384048" y="6592824"/>
+            <a:ext cx="7772400" cy="201168"/>
           </a:xfrm>
           <a:prstGeom prst="rect">
             <a:avLst/>
@@ -14039,8 +17104,43 @@
           </a:bodyPr>
           <a:lstStyle/>
           <a:p>
+            <a:pPr>
+              <a:defRPr sz="750">
+                <a:solidFill>
+                  <a:srgbClr val="64748B"/>
+                </a:solidFill>
+              </a:defRPr>
+            </a:pPr>
+            <a:r>
+              <a:t>Jira AMSQUAD Sprints 26.04–26.12</a:t>
+            </a:r>
+          </a:p>
+        </p:txBody>
+      </p:sp>
+      <p:sp>
+        <p:nvSpPr>
+          <p:cNvPr id="16" name="TextBox 15"/>
+          <p:cNvSpPr txBox="1"/>
+          <p:nvPr/>
+        </p:nvSpPr>
+        <p:spPr>
+          <a:xfrm>
+            <a:off x="8412480" y="6592824"/>
+            <a:ext cx="548640" cy="201168"/>
+          </a:xfrm>
+          <a:prstGeom prst="rect">
+            <a:avLst/>
+          </a:prstGeom>
+          <a:noFill/>
+        </p:spPr>
+        <p:txBody>
+          <a:bodyPr wrap="none">
+            <a:spAutoFit/>
+          </a:bodyPr>
+          <a:lstStyle/>
+          <a:p>
             <a:pPr algn="r">
-              <a:defRPr sz="900">
+              <a:defRPr sz="800">
                 <a:solidFill>
                   <a:srgbClr val="64748B"/>
                 </a:solidFill>
@@ -14079,7 +17179,93 @@
         <p:spPr>
           <a:xfrm>
             <a:off x="0" y="0"/>
-            <a:ext cx="411480" cy="6858000"/>
+            <a:ext cx="9144000" cy="6858000"/>
+          </a:xfrm>
+          <a:prstGeom prst="rect">
+            <a:avLst/>
+          </a:prstGeom>
+          <a:solidFill>
+            <a:srgbClr val="F0F4F8"/>
+          </a:solidFill>
+          <a:ln>
+            <a:noFill/>
+          </a:ln>
+        </p:spPr>
+        <p:style>
+          <a:lnRef idx="1">
+            <a:schemeClr val="accent1"/>
+          </a:lnRef>
+          <a:fillRef idx="3">
+            <a:schemeClr val="accent1"/>
+          </a:fillRef>
+          <a:effectRef idx="2">
+            <a:schemeClr val="accent1"/>
+          </a:effectRef>
+          <a:fontRef idx="minor">
+            <a:schemeClr val="lt1"/>
+          </a:fontRef>
+        </p:style>
+        <p:txBody>
+          <a:bodyPr rtlCol="0" anchor="ctr"/>
+          <a:lstStyle/>
+          <a:p>
+            <a:pPr algn="ctr"/>
+          </a:p>
+        </p:txBody>
+      </p:sp>
+      <p:sp>
+        <p:nvSpPr>
+          <p:cNvPr id="3" name="Rectangle 2"/>
+          <p:cNvSpPr/>
+          <p:nvPr/>
+        </p:nvSpPr>
+        <p:spPr>
+          <a:xfrm>
+            <a:off x="0" y="0"/>
+            <a:ext cx="9144000" cy="658368"/>
+          </a:xfrm>
+          <a:prstGeom prst="rect">
+            <a:avLst/>
+          </a:prstGeom>
+          <a:solidFill>
+            <a:srgbClr val="0A1628"/>
+          </a:solidFill>
+          <a:ln>
+            <a:noFill/>
+          </a:ln>
+        </p:spPr>
+        <p:style>
+          <a:lnRef idx="1">
+            <a:schemeClr val="accent1"/>
+          </a:lnRef>
+          <a:fillRef idx="3">
+            <a:schemeClr val="accent1"/>
+          </a:fillRef>
+          <a:effectRef idx="2">
+            <a:schemeClr val="accent1"/>
+          </a:effectRef>
+          <a:fontRef idx="minor">
+            <a:schemeClr val="lt1"/>
+          </a:fontRef>
+        </p:style>
+        <p:txBody>
+          <a:bodyPr rtlCol="0" anchor="ctr"/>
+          <a:lstStyle/>
+          <a:p>
+            <a:pPr algn="ctr"/>
+          </a:p>
+        </p:txBody>
+      </p:sp>
+      <p:sp>
+        <p:nvSpPr>
+          <p:cNvPr id="4" name="Rectangle 3"/>
+          <p:cNvSpPr/>
+          <p:nvPr/>
+        </p:nvSpPr>
+        <p:spPr>
+          <a:xfrm>
+            <a:off x="0" y="658368"/>
+            <a:ext cx="9144000" cy="36576"/>
           </a:xfrm>
           <a:prstGeom prst="rect">
             <a:avLst/>
@@ -14115,57 +17301,14 @@
       </p:sp>
       <p:sp>
         <p:nvSpPr>
-          <p:cNvPr id="3" name="Rectangle 2"/>
-          <p:cNvSpPr/>
-          <p:nvPr/>
-        </p:nvSpPr>
-        <p:spPr>
-          <a:xfrm>
-            <a:off x="411480" y="0"/>
-            <a:ext cx="8732520" cy="6858000"/>
-          </a:xfrm>
-          <a:prstGeom prst="rect">
-            <a:avLst/>
-          </a:prstGeom>
-          <a:solidFill>
-            <a:srgbClr val="0A1628"/>
-          </a:solidFill>
-          <a:ln>
-            <a:noFill/>
-          </a:ln>
-        </p:spPr>
-        <p:style>
-          <a:lnRef idx="1">
-            <a:schemeClr val="accent1"/>
-          </a:lnRef>
-          <a:fillRef idx="3">
-            <a:schemeClr val="accent1"/>
-          </a:fillRef>
-          <a:effectRef idx="2">
-            <a:schemeClr val="accent1"/>
-          </a:effectRef>
-          <a:fontRef idx="minor">
-            <a:schemeClr val="lt1"/>
-          </a:fontRef>
-        </p:style>
-        <p:txBody>
-          <a:bodyPr rtlCol="0" anchor="ctr"/>
-          <a:lstStyle/>
-          <a:p>
-            <a:pPr algn="ctr"/>
-          </a:p>
-        </p:txBody>
-      </p:sp>
-      <p:sp>
-        <p:nvSpPr>
-          <p:cNvPr id="4" name="TextBox 3"/>
+          <p:cNvPr id="5" name="TextBox 4"/>
           <p:cNvSpPr txBox="1"/>
           <p:nvPr/>
         </p:nvSpPr>
         <p:spPr>
           <a:xfrm>
-            <a:off x="777240" y="2560320"/>
-            <a:ext cx="7772400" cy="1097280"/>
+            <a:off x="384048" y="128016"/>
+            <a:ext cx="6858000" cy="457200"/>
           </a:xfrm>
           <a:prstGeom prst="rect">
             <a:avLst/>
@@ -14179,28 +17322,190 @@
           <a:lstStyle/>
           <a:p>
             <a:pPr>
-              <a:defRPr sz="3400" b="1">
+              <a:defRPr sz="2000" b="1">
                 <a:solidFill>
                   <a:srgbClr val="FFFFFF"/>
                 </a:solidFill>
               </a:defRPr>
             </a:pPr>
             <a:r>
-              <a:t>V2 Legacy UI Automation</a:t>
-            </a:r>
-          </a:p>
-        </p:txBody>
-      </p:sp>
-      <p:sp>
-        <p:nvSpPr>
-          <p:cNvPr id="5" name="TextBox 4"/>
+              <a:t>Automation Defects Discovered</a:t>
+            </a:r>
+          </a:p>
+        </p:txBody>
+      </p:sp>
+      <p:sp>
+        <p:nvSpPr>
+          <p:cNvPr id="6" name="Rounded Rectangle 5"/>
+          <p:cNvSpPr/>
+          <p:nvPr/>
+        </p:nvSpPr>
+        <p:spPr>
+          <a:xfrm>
+            <a:off x="7452360" y="164592"/>
+            <a:ext cx="1417320" cy="347472"/>
+          </a:xfrm>
+          <a:prstGeom prst="roundRect">
+            <a:avLst/>
+          </a:prstGeom>
+          <a:solidFill>
+            <a:srgbClr val="00A3E0"/>
+          </a:solidFill>
+          <a:ln>
+            <a:noFill/>
+          </a:ln>
+        </p:spPr>
+        <p:style>
+          <a:lnRef idx="1">
+            <a:schemeClr val="accent1"/>
+          </a:lnRef>
+          <a:fillRef idx="3">
+            <a:schemeClr val="accent1"/>
+          </a:fillRef>
+          <a:effectRef idx="2">
+            <a:schemeClr val="accent1"/>
+          </a:effectRef>
+          <a:fontRef idx="minor">
+            <a:schemeClr val="lt1"/>
+          </a:fontRef>
+        </p:style>
+        <p:txBody>
+          <a:bodyPr rtlCol="0" anchor="ctr"/>
+          <a:lstStyle/>
+          <a:p>
+            <a:pPr algn="ctr">
+              <a:defRPr sz="900" b="1">
+                <a:solidFill>
+                  <a:srgbClr val="FFFFFF"/>
+                </a:solidFill>
+              </a:defRPr>
+            </a:pPr>
+            <a:r>
+              <a:t>Quality</a:t>
+            </a:r>
+          </a:p>
+        </p:txBody>
+      </p:sp>
+      <p:pic>
+        <p:nvPicPr>
+          <p:cNvPr id="7" name="Picture 6" descr="10-jira-automation-bugs-by-sprint.png"/>
+          <p:cNvPicPr>
+            <a:picLocks noChangeAspect="1"/>
+          </p:cNvPicPr>
+          <p:nvPr/>
+        </p:nvPicPr>
+        <p:blipFill>
+          <a:blip r:embed="rId2"/>
+          <a:stretch>
+            <a:fillRect/>
+          </a:stretch>
+        </p:blipFill>
+        <p:spPr>
+          <a:xfrm>
+            <a:off x="320040" y="868680"/>
+            <a:ext cx="4892040" cy="2287527"/>
+          </a:xfrm>
+          <a:prstGeom prst="rect">
+            <a:avLst/>
+          </a:prstGeom>
+        </p:spPr>
+      </p:pic>
+      <p:sp>
+        <p:nvSpPr>
+          <p:cNvPr id="8" name="Rounded Rectangle 7"/>
+          <p:cNvSpPr/>
+          <p:nvPr/>
+        </p:nvSpPr>
+        <p:spPr>
+          <a:xfrm>
+            <a:off x="5349240" y="868680"/>
+            <a:ext cx="3474720" cy="5074920"/>
+          </a:xfrm>
+          <a:prstGeom prst="roundRect">
+            <a:avLst/>
+          </a:prstGeom>
+          <a:solidFill>
+            <a:srgbClr val="E8EEF6"/>
+          </a:solidFill>
+          <a:ln>
+            <a:noFill/>
+          </a:ln>
+        </p:spPr>
+        <p:style>
+          <a:lnRef idx="1">
+            <a:schemeClr val="accent1"/>
+          </a:lnRef>
+          <a:fillRef idx="3">
+            <a:schemeClr val="accent1"/>
+          </a:fillRef>
+          <a:effectRef idx="2">
+            <a:schemeClr val="accent1"/>
+          </a:effectRef>
+          <a:fontRef idx="minor">
+            <a:schemeClr val="lt1"/>
+          </a:fontRef>
+        </p:style>
+        <p:txBody>
+          <a:bodyPr rtlCol="0" anchor="ctr"/>
+          <a:lstStyle/>
+          <a:p>
+            <a:pPr algn="ctr"/>
+          </a:p>
+        </p:txBody>
+      </p:sp>
+      <p:sp>
+        <p:nvSpPr>
+          <p:cNvPr id="9" name="Rectangle 8"/>
+          <p:cNvSpPr/>
+          <p:nvPr/>
+        </p:nvSpPr>
+        <p:spPr>
+          <a:xfrm>
+            <a:off x="5349240" y="868680"/>
+            <a:ext cx="54864" cy="5074920"/>
+          </a:xfrm>
+          <a:prstGeom prst="rect">
+            <a:avLst/>
+          </a:prstGeom>
+          <a:solidFill>
+            <a:srgbClr val="00B388"/>
+          </a:solidFill>
+          <a:ln>
+            <a:noFill/>
+          </a:ln>
+        </p:spPr>
+        <p:style>
+          <a:lnRef idx="1">
+            <a:schemeClr val="accent1"/>
+          </a:lnRef>
+          <a:fillRef idx="3">
+            <a:schemeClr val="accent1"/>
+          </a:fillRef>
+          <a:effectRef idx="2">
+            <a:schemeClr val="accent1"/>
+          </a:effectRef>
+          <a:fontRef idx="minor">
+            <a:schemeClr val="lt1"/>
+          </a:fontRef>
+        </p:style>
+        <p:txBody>
+          <a:bodyPr rtlCol="0" anchor="ctr"/>
+          <a:lstStyle/>
+          <a:p>
+            <a:pPr algn="ctr"/>
+          </a:p>
+        </p:txBody>
+      </p:sp>
+      <p:sp>
+        <p:nvSpPr>
+          <p:cNvPr id="10" name="TextBox 9"/>
           <p:cNvSpPr txBox="1"/>
           <p:nvPr/>
         </p:nvSpPr>
         <p:spPr>
           <a:xfrm>
-            <a:off x="777240" y="3657600"/>
-            <a:ext cx="7315200" cy="548640"/>
+            <a:off x="5532120" y="978408"/>
+            <a:ext cx="3200400" cy="320040"/>
           </a:xfrm>
           <a:prstGeom prst="rect">
             <a:avLst/>
@@ -14214,14 +17519,258 @@
           <a:lstStyle/>
           <a:p>
             <a:pPr>
-              <a:defRPr sz="1400">
-                <a:solidFill>
-                  <a:srgbClr val="00B388"/>
-                </a:solidFill>
-              </a:defRPr>
-            </a:pPr>
-            <a:r>
-              <a:t>Jenkins Stage1 nightly</a:t>
+              <a:defRPr sz="1100" b="1">
+                <a:solidFill>
+                  <a:srgbClr val="003241"/>
+                </a:solidFill>
+              </a:defRPr>
+            </a:pPr>
+            <a:r>
+              <a:t>Quality signal</a:t>
+            </a:r>
+          </a:p>
+        </p:txBody>
+      </p:sp>
+      <p:sp>
+        <p:nvSpPr>
+          <p:cNvPr id="11" name="TextBox 10"/>
+          <p:cNvSpPr txBox="1"/>
+          <p:nvPr/>
+        </p:nvSpPr>
+        <p:spPr>
+          <a:xfrm>
+            <a:off x="5532120" y="1307592"/>
+            <a:ext cx="3200400" cy="4572000"/>
+          </a:xfrm>
+          <a:prstGeom prst="rect">
+            <a:avLst/>
+          </a:prstGeom>
+          <a:noFill/>
+        </p:spPr>
+        <p:txBody>
+          <a:bodyPr wrap="square">
+            <a:spAutoFit/>
+          </a:bodyPr>
+          <a:lstStyle/>
+          <a:p>
+            <a:pPr>
+              <a:spcAft>
+                <a:spcPts val="500"/>
+              </a:spcAft>
+              <a:defRPr sz="1000">
+                <a:solidFill>
+                  <a:srgbClr val="1A2332"/>
+                </a:solidFill>
+              </a:defRPr>
+            </a:pPr>
+            <a:r>
+              <a:t>• Defects found via nightly regression triage</a:t>
+            </a:r>
+          </a:p>
+          <a:p>
+            <a:pPr>
+              <a:spcAft>
+                <a:spcPts val="500"/>
+              </a:spcAft>
+              <a:defRPr sz="1000">
+                <a:solidFill>
+                  <a:srgbClr val="1A2332"/>
+                </a:solidFill>
+              </a:defRPr>
+            </a:pPr>
+            <a:r>
+              <a:t>• Fed into automation bug lifecycle standard</a:t>
+            </a:r>
+          </a:p>
+        </p:txBody>
+      </p:sp>
+      <p:sp>
+        <p:nvSpPr>
+          <p:cNvPr id="12" name="Rectangle 11"/>
+          <p:cNvSpPr/>
+          <p:nvPr/>
+        </p:nvSpPr>
+        <p:spPr>
+          <a:xfrm>
+            <a:off x="0" y="6291072"/>
+            <a:ext cx="9144000" cy="566928"/>
+          </a:xfrm>
+          <a:prstGeom prst="rect">
+            <a:avLst/>
+          </a:prstGeom>
+          <a:solidFill>
+            <a:srgbClr val="FFFFFF"/>
+          </a:solidFill>
+          <a:ln>
+            <a:noFill/>
+          </a:ln>
+        </p:spPr>
+        <p:style>
+          <a:lnRef idx="1">
+            <a:schemeClr val="accent1"/>
+          </a:lnRef>
+          <a:fillRef idx="3">
+            <a:schemeClr val="accent1"/>
+          </a:fillRef>
+          <a:effectRef idx="2">
+            <a:schemeClr val="accent1"/>
+          </a:effectRef>
+          <a:fontRef idx="minor">
+            <a:schemeClr val="lt1"/>
+          </a:fontRef>
+        </p:style>
+        <p:txBody>
+          <a:bodyPr rtlCol="0" anchor="ctr"/>
+          <a:lstStyle/>
+          <a:p>
+            <a:pPr algn="ctr"/>
+          </a:p>
+        </p:txBody>
+      </p:sp>
+      <p:sp>
+        <p:nvSpPr>
+          <p:cNvPr id="13" name="Rectangle 12"/>
+          <p:cNvSpPr/>
+          <p:nvPr/>
+        </p:nvSpPr>
+        <p:spPr>
+          <a:xfrm>
+            <a:off x="0" y="6291072"/>
+            <a:ext cx="9144000" cy="18288"/>
+          </a:xfrm>
+          <a:prstGeom prst="rect">
+            <a:avLst/>
+          </a:prstGeom>
+          <a:solidFill>
+            <a:srgbClr val="E8EEF6"/>
+          </a:solidFill>
+          <a:ln>
+            <a:noFill/>
+          </a:ln>
+        </p:spPr>
+        <p:style>
+          <a:lnRef idx="1">
+            <a:schemeClr val="accent1"/>
+          </a:lnRef>
+          <a:fillRef idx="3">
+            <a:schemeClr val="accent1"/>
+          </a:fillRef>
+          <a:effectRef idx="2">
+            <a:schemeClr val="accent1"/>
+          </a:effectRef>
+          <a:fontRef idx="minor">
+            <a:schemeClr val="lt1"/>
+          </a:fontRef>
+        </p:style>
+        <p:txBody>
+          <a:bodyPr rtlCol="0" anchor="ctr"/>
+          <a:lstStyle/>
+          <a:p>
+            <a:pPr algn="ctr"/>
+          </a:p>
+        </p:txBody>
+      </p:sp>
+      <p:sp>
+        <p:nvSpPr>
+          <p:cNvPr id="14" name="TextBox 13"/>
+          <p:cNvSpPr txBox="1"/>
+          <p:nvPr/>
+        </p:nvSpPr>
+        <p:spPr>
+          <a:xfrm>
+            <a:off x="384048" y="6355080"/>
+            <a:ext cx="8046720" cy="256032"/>
+          </a:xfrm>
+          <a:prstGeom prst="rect">
+            <a:avLst/>
+          </a:prstGeom>
+          <a:noFill/>
+        </p:spPr>
+        <p:txBody>
+          <a:bodyPr wrap="none">
+            <a:spAutoFit/>
+          </a:bodyPr>
+          <a:lstStyle/>
+          <a:p>
+            <a:pPr>
+              <a:defRPr sz="750" i="1">
+                <a:solidFill>
+                  <a:srgbClr val="64748B"/>
+                </a:solidFill>
+              </a:defRPr>
+            </a:pPr>
+            <a:r>
+              <a:t>Note: Bugs logged by automation team from nightly failures — not all production defects.</a:t>
+            </a:r>
+          </a:p>
+        </p:txBody>
+      </p:sp>
+      <p:sp>
+        <p:nvSpPr>
+          <p:cNvPr id="15" name="TextBox 14"/>
+          <p:cNvSpPr txBox="1"/>
+          <p:nvPr/>
+        </p:nvSpPr>
+        <p:spPr>
+          <a:xfrm>
+            <a:off x="384048" y="6592824"/>
+            <a:ext cx="7772400" cy="201168"/>
+          </a:xfrm>
+          <a:prstGeom prst="rect">
+            <a:avLst/>
+          </a:prstGeom>
+          <a:noFill/>
+        </p:spPr>
+        <p:txBody>
+          <a:bodyPr wrap="none">
+            <a:spAutoFit/>
+          </a:bodyPr>
+          <a:lstStyle/>
+          <a:p>
+            <a:pPr>
+              <a:defRPr sz="750">
+                <a:solidFill>
+                  <a:srgbClr val="64748B"/>
+                </a:solidFill>
+              </a:defRPr>
+            </a:pPr>
+            <a:r>
+              <a:t>Jira AMSQUAD</a:t>
+            </a:r>
+          </a:p>
+        </p:txBody>
+      </p:sp>
+      <p:sp>
+        <p:nvSpPr>
+          <p:cNvPr id="16" name="TextBox 15"/>
+          <p:cNvSpPr txBox="1"/>
+          <p:nvPr/>
+        </p:nvSpPr>
+        <p:spPr>
+          <a:xfrm>
+            <a:off x="8412480" y="6592824"/>
+            <a:ext cx="548640" cy="201168"/>
+          </a:xfrm>
+          <a:prstGeom prst="rect">
+            <a:avLst/>
+          </a:prstGeom>
+          <a:noFill/>
+        </p:spPr>
+        <p:txBody>
+          <a:bodyPr wrap="none">
+            <a:spAutoFit/>
+          </a:bodyPr>
+          <a:lstStyle/>
+          <a:p>
+            <a:pPr algn="r">
+              <a:defRPr sz="800">
+                <a:solidFill>
+                  <a:srgbClr val="64748B"/>
+                </a:solidFill>
+              </a:defRPr>
+            </a:pPr>
+            <a:r>
+              <a:t>7</a:t>
             </a:r>
           </a:p>
         </p:txBody>
@@ -14403,7 +17952,7 @@
               </a:defRPr>
             </a:pPr>
             <a:r>
-              <a:t>V2 Module Snapshot</a:t>
+              <a:t>Beyond the Metrics</a:t>
             </a:r>
           </a:p>
         </p:txBody>
@@ -14455,45 +18004,21 @@
               </a:defRPr>
             </a:pPr>
             <a:r>
-              <a:t>V2</a:t>
-            </a:r>
-          </a:p>
-        </p:txBody>
-      </p:sp>
-      <p:pic>
-        <p:nvPicPr>
-          <p:cNvPr id="7" name="Picture 6" descr="04-v2-regression-by-module.png"/>
-          <p:cNvPicPr>
-            <a:picLocks noChangeAspect="1"/>
-          </p:cNvPicPr>
-          <p:nvPr/>
-        </p:nvPicPr>
-        <p:blipFill>
-          <a:blip r:embed="rId2"/>
-          <a:stretch>
-            <a:fillRect/>
-          </a:stretch>
-        </p:blipFill>
+              <a:t>Value</a:t>
+            </a:r>
+          </a:p>
+        </p:txBody>
+      </p:sp>
+      <p:sp>
+        <p:nvSpPr>
+          <p:cNvPr id="7" name="Rounded Rectangle 6"/>
+          <p:cNvSpPr/>
+          <p:nvPr/>
+        </p:nvSpPr>
         <p:spPr>
           <a:xfrm>
             <a:off x="320040" y="868680"/>
-            <a:ext cx="4892040" cy="2074988"/>
-          </a:xfrm>
-          <a:prstGeom prst="rect">
-            <a:avLst/>
-          </a:prstGeom>
-        </p:spPr>
-      </p:pic>
-      <p:sp>
-        <p:nvSpPr>
-          <p:cNvPr id="8" name="Rounded Rectangle 7"/>
-          <p:cNvSpPr/>
-          <p:nvPr/>
-        </p:nvSpPr>
-        <p:spPr>
-          <a:xfrm>
-            <a:off x="5349240" y="868680"/>
-            <a:ext cx="3474720" cy="5349240"/>
+            <a:ext cx="8503920" cy="4892040"/>
           </a:xfrm>
           <a:prstGeom prst="roundRect">
             <a:avLst/>
@@ -14529,14 +18054,14 @@
       </p:sp>
       <p:sp>
         <p:nvSpPr>
-          <p:cNvPr id="9" name="Rectangle 8"/>
-          <p:cNvSpPr/>
-          <p:nvPr/>
-        </p:nvSpPr>
-        <p:spPr>
-          <a:xfrm>
-            <a:off x="5349240" y="868680"/>
-            <a:ext cx="54864" cy="5349240"/>
+          <p:cNvPr id="8" name="Rectangle 7"/>
+          <p:cNvSpPr/>
+          <p:nvPr/>
+        </p:nvSpPr>
+        <p:spPr>
+          <a:xfrm>
+            <a:off x="320040" y="868680"/>
+            <a:ext cx="54864" cy="4892040"/>
           </a:xfrm>
           <a:prstGeom prst="rect">
             <a:avLst/>
@@ -14572,14 +18097,14 @@
       </p:sp>
       <p:sp>
         <p:nvSpPr>
-          <p:cNvPr id="10" name="TextBox 9"/>
+          <p:cNvPr id="9" name="TextBox 8"/>
           <p:cNvSpPr txBox="1"/>
           <p:nvPr/>
         </p:nvSpPr>
         <p:spPr>
           <a:xfrm>
-            <a:off x="5532120" y="978408"/>
-            <a:ext cx="3200400" cy="320040"/>
+            <a:off x="502920" y="978408"/>
+            <a:ext cx="8229600" cy="320040"/>
           </a:xfrm>
           <a:prstGeom prst="rect">
             <a:avLst/>
@@ -14600,21 +18125,21 @@
               </a:defRPr>
             </a:pPr>
             <a:r>
-              <a:t>V2 coverage</a:t>
-            </a:r>
-          </a:p>
-        </p:txBody>
-      </p:sp>
-      <p:sp>
-        <p:nvSpPr>
-          <p:cNvPr id="11" name="TextBox 10"/>
+              <a:t>Key points</a:t>
+            </a:r>
+          </a:p>
+        </p:txBody>
+      </p:sp>
+      <p:sp>
+        <p:nvSpPr>
+          <p:cNvPr id="10" name="TextBox 9"/>
           <p:cNvSpPr txBox="1"/>
           <p:nvPr/>
         </p:nvSpPr>
         <p:spPr>
           <a:xfrm>
-            <a:off x="5532120" y="1307592"/>
-            <a:ext cx="3200400" cy="4846320"/>
+            <a:off x="502920" y="1307592"/>
+            <a:ext cx="8229600" cy="4389120"/>
           </a:xfrm>
           <a:prstGeom prst="rect">
             <a:avLst/>
@@ -14638,7 +18163,7 @@
               </a:defRPr>
             </a:pPr>
             <a:r>
-              <a:t>• 592 methods · 12 modules</a:t>
+              <a:t>• Framework architecture &amp; canonical repo design</a:t>
             </a:r>
           </a:p>
           <a:p>
@@ -14653,7 +18178,7 @@
               </a:defRPr>
             </a:pPr>
             <a:r>
-              <a:t>• CSR modules Apr–Jul</a:t>
+              <a:t>• AI-accelerated docs, Postman, TestNG boilerplate</a:t>
             </a:r>
           </a:p>
           <a:p>
@@ -14668,8 +18193,81 @@
               </a:defRPr>
             </a:pPr>
             <a:r>
-              <a:t>• +33 CSR Actions next</a:t>
-            </a:r>
+              <a:t>• qTest master suite &amp; automation bug lifecycle standard</a:t>
+            </a:r>
+          </a:p>
+          <a:p>
+            <a:pPr>
+              <a:spcAft>
+                <a:spcPts val="500"/>
+              </a:spcAft>
+              <a:defRPr sz="1000">
+                <a:solidFill>
+                  <a:srgbClr val="1A2332"/>
+                </a:solidFill>
+              </a:defRPr>
+            </a:pPr>
+            <a:r>
+              <a:t>• Pipeline/DevOps co-design &amp; module switches</a:t>
+            </a:r>
+          </a:p>
+          <a:p>
+            <a:pPr>
+              <a:spcAft>
+                <a:spcPts val="500"/>
+              </a:spcAft>
+              <a:defRPr sz="1000">
+                <a:solidFill>
+                  <a:srgbClr val="1A2332"/>
+                </a:solidFill>
+              </a:defRPr>
+            </a:pPr>
+            <a:r>
+              <a:t>• Cross-team emergency support &amp; release triage</a:t>
+            </a:r>
+          </a:p>
+        </p:txBody>
+      </p:sp>
+      <p:sp>
+        <p:nvSpPr>
+          <p:cNvPr id="11" name="Rectangle 10"/>
+          <p:cNvSpPr/>
+          <p:nvPr/>
+        </p:nvSpPr>
+        <p:spPr>
+          <a:xfrm>
+            <a:off x="0" y="6291072"/>
+            <a:ext cx="9144000" cy="566928"/>
+          </a:xfrm>
+          <a:prstGeom prst="rect">
+            <a:avLst/>
+          </a:prstGeom>
+          <a:solidFill>
+            <a:srgbClr val="FFFFFF"/>
+          </a:solidFill>
+          <a:ln>
+            <a:noFill/>
+          </a:ln>
+        </p:spPr>
+        <p:style>
+          <a:lnRef idx="1">
+            <a:schemeClr val="accent1"/>
+          </a:lnRef>
+          <a:fillRef idx="3">
+            <a:schemeClr val="accent1"/>
+          </a:fillRef>
+          <a:effectRef idx="2">
+            <a:schemeClr val="accent1"/>
+          </a:effectRef>
+          <a:fontRef idx="minor">
+            <a:schemeClr val="lt1"/>
+          </a:fontRef>
+        </p:style>
+        <p:txBody>
+          <a:bodyPr rtlCol="0" anchor="ctr"/>
+          <a:lstStyle/>
+          <a:p>
+            <a:pPr algn="ctr"/>
           </a:p>
         </p:txBody>
       </p:sp>
@@ -14681,14 +18279,14 @@
         </p:nvSpPr>
         <p:spPr>
           <a:xfrm>
-            <a:off x="0" y="6510528"/>
-            <a:ext cx="9144000" cy="347472"/>
-          </a:xfrm>
-          <a:prstGeom prst="rect">
-            <a:avLst/>
-          </a:prstGeom>
-          <a:solidFill>
-            <a:srgbClr val="FFFFFF"/>
+            <a:off x="0" y="6291072"/>
+            <a:ext cx="9144000" cy="18288"/>
+          </a:xfrm>
+          <a:prstGeom prst="rect">
+            <a:avLst/>
+          </a:prstGeom>
+          <a:solidFill>
+            <a:srgbClr val="E8EEF6"/>
           </a:solidFill>
           <a:ln>
             <a:noFill/>
@@ -14718,57 +18316,14 @@
       </p:sp>
       <p:sp>
         <p:nvSpPr>
-          <p:cNvPr id="13" name="Rectangle 12"/>
-          <p:cNvSpPr/>
-          <p:nvPr/>
-        </p:nvSpPr>
-        <p:spPr>
-          <a:xfrm>
-            <a:off x="0" y="6510528"/>
-            <a:ext cx="9144000" cy="18288"/>
-          </a:xfrm>
-          <a:prstGeom prst="rect">
-            <a:avLst/>
-          </a:prstGeom>
-          <a:solidFill>
-            <a:srgbClr val="E8EEF6"/>
-          </a:solidFill>
-          <a:ln>
-            <a:noFill/>
-          </a:ln>
-        </p:spPr>
-        <p:style>
-          <a:lnRef idx="1">
-            <a:schemeClr val="accent1"/>
-          </a:lnRef>
-          <a:fillRef idx="3">
-            <a:schemeClr val="accent1"/>
-          </a:fillRef>
-          <a:effectRef idx="2">
-            <a:schemeClr val="accent1"/>
-          </a:effectRef>
-          <a:fontRef idx="minor">
-            <a:schemeClr val="lt1"/>
-          </a:fontRef>
-        </p:style>
-        <p:txBody>
-          <a:bodyPr rtlCol="0" anchor="ctr"/>
-          <a:lstStyle/>
-          <a:p>
-            <a:pPr algn="ctr"/>
-          </a:p>
-        </p:txBody>
-      </p:sp>
-      <p:sp>
-        <p:nvSpPr>
-          <p:cNvPr id="14" name="TextBox 13"/>
+          <p:cNvPr id="13" name="TextBox 12"/>
           <p:cNvSpPr txBox="1"/>
           <p:nvPr/>
         </p:nvSpPr>
         <p:spPr>
           <a:xfrm>
-            <a:off x="384048" y="6583680"/>
-            <a:ext cx="7772400" cy="228600"/>
+            <a:off x="384048" y="6355080"/>
+            <a:ext cx="8046720" cy="256032"/>
           </a:xfrm>
           <a:prstGeom prst="rect">
             <a:avLst/>
@@ -14782,28 +18337,28 @@
           <a:lstStyle/>
           <a:p>
             <a:pPr>
-              <a:defRPr sz="800">
+              <a:defRPr sz="750" i="1">
                 <a:solidFill>
                   <a:srgbClr val="64748B"/>
                 </a:solidFill>
               </a:defRPr>
             </a:pPr>
             <a:r>
-              <a:t>Jenkins nightly</a:t>
-            </a:r>
-          </a:p>
-        </p:txBody>
-      </p:sp>
-      <p:sp>
-        <p:nvSpPr>
-          <p:cNvPr id="15" name="TextBox 14"/>
+              <a:t>Note: These investments are not fully captured in delivery charts or merge counts.</a:t>
+            </a:r>
+          </a:p>
+        </p:txBody>
+      </p:sp>
+      <p:sp>
+        <p:nvSpPr>
+          <p:cNvPr id="14" name="TextBox 13"/>
           <p:cNvSpPr txBox="1"/>
           <p:nvPr/>
         </p:nvSpPr>
         <p:spPr>
           <a:xfrm>
-            <a:off x="8412480" y="6583680"/>
-            <a:ext cx="548640" cy="228600"/>
+            <a:off x="384048" y="6592824"/>
+            <a:ext cx="7772400" cy="201168"/>
           </a:xfrm>
           <a:prstGeom prst="rect">
             <a:avLst/>
@@ -14816,15 +18371,50 @@
           </a:bodyPr>
           <a:lstStyle/>
           <a:p>
+            <a:pPr>
+              <a:defRPr sz="750">
+                <a:solidFill>
+                  <a:srgbClr val="64748B"/>
+                </a:solidFill>
+              </a:defRPr>
+            </a:pPr>
+            <a:r>
+              <a:t>Additional value not captured in merge or test-count metrics</a:t>
+            </a:r>
+          </a:p>
+        </p:txBody>
+      </p:sp>
+      <p:sp>
+        <p:nvSpPr>
+          <p:cNvPr id="15" name="TextBox 14"/>
+          <p:cNvSpPr txBox="1"/>
+          <p:nvPr/>
+        </p:nvSpPr>
+        <p:spPr>
+          <a:xfrm>
+            <a:off x="8412480" y="6592824"/>
+            <a:ext cx="548640" cy="201168"/>
+          </a:xfrm>
+          <a:prstGeom prst="rect">
+            <a:avLst/>
+          </a:prstGeom>
+          <a:noFill/>
+        </p:spPr>
+        <p:txBody>
+          <a:bodyPr wrap="none">
+            <a:spAutoFit/>
+          </a:bodyPr>
+          <a:lstStyle/>
+          <a:p>
             <a:pPr algn="r">
-              <a:defRPr sz="900">
+              <a:defRPr sz="800">
                 <a:solidFill>
                   <a:srgbClr val="64748B"/>
                 </a:solidFill>
               </a:defRPr>
             </a:pPr>
             <a:r>
-              <a:t>7</a:t>
+              <a:t>8</a:t>
             </a:r>
           </a:p>
         </p:txBody>
@@ -14963,7 +18553,7 @@
               </a:defRPr>
             </a:pPr>
             <a:r>
-              <a:t>V3 Universal Platform</a:t>
+              <a:t>V2 Legacy UI Automation</a:t>
             </a:r>
           </a:p>
         </p:txBody>
@@ -14998,7 +18588,7 @@
               </a:defRPr>
             </a:pPr>
             <a:r>
-              <a:t>GitLab CI nightly</a:t>
+              <a:t>Jenkins Stage1 nightly · built since Q2 2025</a:t>
             </a:r>
           </a:p>
         </p:txBody>
